--- a/S1-CL2-Cloud-Disaster-Recovery/delivery/topic_08/Topic_08_Slides.pptx
+++ b/S1-CL2-Cloud-Disaster-Recovery/delivery/topic_08/Topic_08_Slides.pptx
@@ -3679,7 +3679,7 @@
           <a:noFill/>
         </p:spPr>
         <p:txBody>
-          <a:bodyPr wrap="square" anchor="t" lIns="0" rIns="0" tIns="0" bIns="0">
+          <a:bodyPr wrap="square" anchor="ctr" lIns="0" rIns="0" tIns="0" bIns="0">
             <a:spAutoFit/>
           </a:bodyPr>
           <a:lstStyle/>
@@ -3696,7 +3696,7 @@
               </a:spcAft>
             </a:pPr>
             <a:r>
-              <a:rPr sz="1800" b="1" i="0">
+              <a:rPr sz="2400" b="1" i="0">
                 <a:solidFill>
                   <a:srgbClr val="EDAB0C"/>
                 </a:solidFill>
@@ -3705,7 +3705,7 @@
               <a:t>■  </a:t>
             </a:r>
             <a:r>
-              <a:rPr sz="1800" b="0" i="0">
+              <a:rPr sz="2400" b="0" i="0">
                 <a:solidFill>
                   <a:srgbClr val="2A2929"/>
                 </a:solidFill>
@@ -3727,7 +3727,7 @@
               </a:spcAft>
             </a:pPr>
             <a:r>
-              <a:rPr sz="1800" b="1" i="0">
+              <a:rPr sz="2400" b="1" i="0">
                 <a:solidFill>
                   <a:srgbClr val="EDAB0C"/>
                 </a:solidFill>
@@ -3736,7 +3736,7 @@
               <a:t>■  </a:t>
             </a:r>
             <a:r>
-              <a:rPr sz="1800" b="0" i="0">
+              <a:rPr sz="2400" b="0" i="0">
                 <a:solidFill>
                   <a:srgbClr val="2A2929"/>
                 </a:solidFill>
@@ -3758,7 +3758,7 @@
               </a:spcAft>
             </a:pPr>
             <a:r>
-              <a:rPr sz="1800" b="1" i="0">
+              <a:rPr sz="2400" b="1" i="0">
                 <a:solidFill>
                   <a:srgbClr val="EDAB0C"/>
                 </a:solidFill>
@@ -3767,7 +3767,7 @@
               <a:t>■  </a:t>
             </a:r>
             <a:r>
-              <a:rPr sz="1800" b="0" i="0">
+              <a:rPr sz="2400" b="0" i="0">
                 <a:solidFill>
                   <a:srgbClr val="2A2929"/>
                 </a:solidFill>
@@ -5139,7 +5139,7 @@
           <a:noFill/>
         </p:spPr>
         <p:txBody>
-          <a:bodyPr wrap="square" anchor="t" lIns="0" rIns="0" tIns="0" bIns="0">
+          <a:bodyPr wrap="square" anchor="ctr" lIns="0" rIns="0" tIns="0" bIns="0">
             <a:spAutoFit/>
           </a:bodyPr>
           <a:lstStyle/>
@@ -5156,7 +5156,7 @@
               </a:spcAft>
             </a:pPr>
             <a:r>
-              <a:rPr sz="1800" b="1" i="0">
+              <a:rPr sz="2400" b="1" i="0">
                 <a:solidFill>
                   <a:srgbClr val="EDAB0C"/>
                 </a:solidFill>
@@ -5165,7 +5165,7 @@
               <a:t>■  </a:t>
             </a:r>
             <a:r>
-              <a:rPr sz="1800" b="0" i="0">
+              <a:rPr sz="2400" b="0" i="0">
                 <a:solidFill>
                   <a:srgbClr val="2A2929"/>
                 </a:solidFill>
@@ -5187,7 +5187,7 @@
               </a:spcAft>
             </a:pPr>
             <a:r>
-              <a:rPr sz="1800" b="1" i="0">
+              <a:rPr sz="2400" b="1" i="0">
                 <a:solidFill>
                   <a:srgbClr val="EDAB0C"/>
                 </a:solidFill>
@@ -5196,7 +5196,7 @@
               <a:t>■  </a:t>
             </a:r>
             <a:r>
-              <a:rPr sz="1800" b="0" i="0">
+              <a:rPr sz="2400" b="0" i="0">
                 <a:solidFill>
                   <a:srgbClr val="2A2929"/>
                 </a:solidFill>
@@ -5218,7 +5218,7 @@
               </a:spcAft>
             </a:pPr>
             <a:r>
-              <a:rPr sz="1800" b="1" i="0">
+              <a:rPr sz="2400" b="1" i="0">
                 <a:solidFill>
                   <a:srgbClr val="EDAB0C"/>
                 </a:solidFill>
@@ -5227,7 +5227,7 @@
               <a:t>■  </a:t>
             </a:r>
             <a:r>
-              <a:rPr sz="1800" b="0" i="0">
+              <a:rPr sz="2400" b="0" i="0">
                 <a:solidFill>
                   <a:srgbClr val="2A2929"/>
                 </a:solidFill>
@@ -7483,7 +7483,7 @@
           <a:noFill/>
         </p:spPr>
         <p:txBody>
-          <a:bodyPr wrap="square" anchor="t" lIns="0" rIns="0" tIns="0" bIns="0">
+          <a:bodyPr wrap="square" anchor="ctr" lIns="0" rIns="0" tIns="0" bIns="0">
             <a:spAutoFit/>
           </a:bodyPr>
           <a:lstStyle/>
@@ -7500,7 +7500,7 @@
               </a:spcAft>
             </a:pPr>
             <a:r>
-              <a:rPr sz="1800" b="1" i="0">
+              <a:rPr sz="2400" b="1" i="0">
                 <a:solidFill>
                   <a:srgbClr val="EDAB0C"/>
                 </a:solidFill>
@@ -7509,7 +7509,7 @@
               <a:t>■  </a:t>
             </a:r>
             <a:r>
-              <a:rPr sz="1800" b="0" i="0">
+              <a:rPr sz="2400" b="0" i="0">
                 <a:solidFill>
                   <a:srgbClr val="2A2929"/>
                 </a:solidFill>
@@ -7531,7 +7531,7 @@
               </a:spcAft>
             </a:pPr>
             <a:r>
-              <a:rPr sz="1800" b="1" i="0">
+              <a:rPr sz="2400" b="1" i="0">
                 <a:solidFill>
                   <a:srgbClr val="EDAB0C"/>
                 </a:solidFill>
@@ -7540,7 +7540,7 @@
               <a:t>■  </a:t>
             </a:r>
             <a:r>
-              <a:rPr sz="1800" b="0" i="0">
+              <a:rPr sz="2400" b="0" i="0">
                 <a:solidFill>
                   <a:srgbClr val="2A2929"/>
                 </a:solidFill>
@@ -7562,7 +7562,7 @@
               </a:spcAft>
             </a:pPr>
             <a:r>
-              <a:rPr sz="1800" b="1" i="0">
+              <a:rPr sz="2400" b="1" i="0">
                 <a:solidFill>
                   <a:srgbClr val="EDAB0C"/>
                 </a:solidFill>
@@ -7571,7 +7571,7 @@
               <a:t>■  </a:t>
             </a:r>
             <a:r>
-              <a:rPr sz="1800" b="0" i="0">
+              <a:rPr sz="2400" b="0" i="0">
                 <a:solidFill>
                   <a:srgbClr val="2A2929"/>
                 </a:solidFill>
@@ -8117,7 +8117,7 @@
           <a:noFill/>
         </p:spPr>
         <p:txBody>
-          <a:bodyPr wrap="square" anchor="t" lIns="0" rIns="0" tIns="0" bIns="0">
+          <a:bodyPr wrap="square" anchor="ctr" lIns="0" rIns="0" tIns="0" bIns="0">
             <a:spAutoFit/>
           </a:bodyPr>
           <a:lstStyle/>
@@ -8134,7 +8134,7 @@
               </a:spcAft>
             </a:pPr>
             <a:r>
-              <a:rPr sz="1800" b="1" i="0">
+              <a:rPr sz="2400" b="1" i="0">
                 <a:solidFill>
                   <a:srgbClr val="EDAB0C"/>
                 </a:solidFill>
@@ -8143,7 +8143,7 @@
               <a:t>■  </a:t>
             </a:r>
             <a:r>
-              <a:rPr sz="1800" b="0" i="0">
+              <a:rPr sz="2400" b="0" i="0">
                 <a:solidFill>
                   <a:srgbClr val="2A2929"/>
                 </a:solidFill>
@@ -8165,7 +8165,7 @@
               </a:spcAft>
             </a:pPr>
             <a:r>
-              <a:rPr sz="1800" b="1" i="0">
+              <a:rPr sz="2400" b="1" i="0">
                 <a:solidFill>
                   <a:srgbClr val="EDAB0C"/>
                 </a:solidFill>
@@ -8174,7 +8174,7 @@
               <a:t>■  </a:t>
             </a:r>
             <a:r>
-              <a:rPr sz="1800" b="0" i="0">
+              <a:rPr sz="2400" b="0" i="0">
                 <a:solidFill>
                   <a:srgbClr val="2A2929"/>
                 </a:solidFill>
@@ -8196,7 +8196,7 @@
               </a:spcAft>
             </a:pPr>
             <a:r>
-              <a:rPr sz="1800" b="1" i="0">
+              <a:rPr sz="2400" b="1" i="0">
                 <a:solidFill>
                   <a:srgbClr val="EDAB0C"/>
                 </a:solidFill>
@@ -8205,7 +8205,7 @@
               <a:t>■  </a:t>
             </a:r>
             <a:r>
-              <a:rPr sz="1800" b="0" i="0">
+              <a:rPr sz="2400" b="0" i="0">
                 <a:solidFill>
                   <a:srgbClr val="2A2929"/>
                 </a:solidFill>

--- a/S1-CL2-Cloud-Disaster-Recovery/delivery/topic_08/Topic_08_Slides.pptx
+++ b/S1-CL2-Cloud-Disaster-Recovery/delivery/topic_08/Topic_08_Slides.pptx
@@ -7,22 +7,22 @@
   <p:sldIdLst>
     <p:sldId id="256" r:id="rId7"/>
     <p:sldId id="257" r:id="rId8"/>
-    <p:sldId id="258" r:id="rId9"/>
-    <p:sldId id="259" r:id="rId10"/>
-    <p:sldId id="260" r:id="rId11"/>
-    <p:sldId id="261" r:id="rId12"/>
-    <p:sldId id="262" r:id="rId13"/>
-    <p:sldId id="263" r:id="rId14"/>
-    <p:sldId id="264" r:id="rId15"/>
-    <p:sldId id="265" r:id="rId16"/>
-    <p:sldId id="266" r:id="rId17"/>
-    <p:sldId id="267" r:id="rId18"/>
-    <p:sldId id="268" r:id="rId19"/>
-    <p:sldId id="269" r:id="rId20"/>
-    <p:sldId id="270" r:id="rId21"/>
-    <p:sldId id="271" r:id="rId22"/>
-    <p:sldId id="272" r:id="rId23"/>
-    <p:sldId id="273" r:id="rId24"/>
+    <p:sldId id="258" r:id="rId10"/>
+    <p:sldId id="259" r:id="rId11"/>
+    <p:sldId id="260" r:id="rId12"/>
+    <p:sldId id="261" r:id="rId13"/>
+    <p:sldId id="262" r:id="rId14"/>
+    <p:sldId id="263" r:id="rId15"/>
+    <p:sldId id="264" r:id="rId16"/>
+    <p:sldId id="265" r:id="rId17"/>
+    <p:sldId id="266" r:id="rId18"/>
+    <p:sldId id="267" r:id="rId19"/>
+    <p:sldId id="268" r:id="rId20"/>
+    <p:sldId id="269" r:id="rId21"/>
+    <p:sldId id="270" r:id="rId22"/>
+    <p:sldId id="271" r:id="rId23"/>
+    <p:sldId id="272" r:id="rId24"/>
+    <p:sldId id="273" r:id="rId25"/>
   </p:sldIdLst>
   <p:sldSz cx="12191695" cy="6858000" type="screen4x3"/>
   <p:notesSz cx="6858000" cy="9144000"/>
@@ -122,6 +122,1902 @@
     </a:lvl9pPr>
   </p:defaultTextStyle>
 </p:presentation>
+</file>
+
+<file path=ppt/notesMasters/notesMaster1.xml><?xml version="1.0" encoding="utf-8"?>
+<p:notesMaster xmlns:a="http://schemas.openxmlformats.org/drawingml/2006/main" xmlns:p="http://schemas.openxmlformats.org/presentationml/2006/main" xmlns:r="http://schemas.openxmlformats.org/officeDocument/2006/relationships">
+  <p:cSld>
+    <p:bg>
+      <p:bgRef idx="1001">
+        <a:schemeClr val="bg1"/>
+      </p:bgRef>
+    </p:bg>
+    <p:spTree>
+      <p:nvGrpSpPr>
+        <p:cNvPr id="1" name=""/>
+        <p:cNvGrpSpPr/>
+        <p:nvPr/>
+      </p:nvGrpSpPr>
+      <p:grpSpPr>
+        <a:xfrm>
+          <a:off x="0" y="0"/>
+          <a:ext cx="0" cy="0"/>
+          <a:chOff x="0" y="0"/>
+          <a:chExt cx="0" cy="0"/>
+        </a:xfrm>
+      </p:grpSpPr>
+      <p:sp>
+        <p:nvSpPr>
+          <p:cNvPr id="2" name="Header Placeholder 1"/>
+          <p:cNvSpPr>
+            <a:spLocks noGrp="1"/>
+          </p:cNvSpPr>
+          <p:nvPr>
+            <p:ph type="hdr" sz="quarter"/>
+          </p:nvPr>
+        </p:nvSpPr>
+        <p:spPr>
+          <a:xfrm>
+            <a:off x="0" y="0"/>
+            <a:ext cx="2971800" cy="457200"/>
+          </a:xfrm>
+          <a:prstGeom prst="rect">
+            <a:avLst/>
+          </a:prstGeom>
+        </p:spPr>
+        <p:txBody>
+          <a:bodyPr vert="horz" lIns="91440" tIns="45720" rIns="91440" bIns="45720" rtlCol="0"/>
+          <a:lstStyle>
+            <a:lvl1pPr algn="l">
+              <a:defRPr sz="1200"/>
+            </a:lvl1pPr>
+          </a:lstStyle>
+          <a:p>
+            <a:endParaRPr lang="en-US"/>
+          </a:p>
+        </p:txBody>
+      </p:sp>
+      <p:sp>
+        <p:nvSpPr>
+          <p:cNvPr id="3" name="Date Placeholder 2"/>
+          <p:cNvSpPr>
+            <a:spLocks noGrp="1"/>
+          </p:cNvSpPr>
+          <p:nvPr>
+            <p:ph type="dt" idx="1"/>
+          </p:nvPr>
+        </p:nvSpPr>
+        <p:spPr>
+          <a:xfrm>
+            <a:off x="3884613" y="0"/>
+            <a:ext cx="2971800" cy="457200"/>
+          </a:xfrm>
+          <a:prstGeom prst="rect">
+            <a:avLst/>
+          </a:prstGeom>
+        </p:spPr>
+        <p:txBody>
+          <a:bodyPr vert="horz" lIns="91440" tIns="45720" rIns="91440" bIns="45720" rtlCol="0"/>
+          <a:lstStyle>
+            <a:lvl1pPr algn="r">
+              <a:defRPr sz="1200"/>
+            </a:lvl1pPr>
+          </a:lstStyle>
+          <a:p>
+            <a:fld id="{0F89C1C7-3DCD-1040-A9CF-14679D8B5DDD}" type="datetimeFigureOut">
+              <a:rPr lang="en-US" smtClean="0"/>
+              <a:t>10/17/16</a:t>
+            </a:fld>
+            <a:endParaRPr lang="en-US"/>
+          </a:p>
+        </p:txBody>
+      </p:sp>
+      <p:sp>
+        <p:nvSpPr>
+          <p:cNvPr id="4" name="Slide Image Placeholder 3"/>
+          <p:cNvSpPr>
+            <a:spLocks noGrp="1" noRot="1" noChangeAspect="1"/>
+          </p:cNvSpPr>
+          <p:nvPr>
+            <p:ph type="sldImg" idx="2"/>
+          </p:nvPr>
+        </p:nvSpPr>
+        <p:spPr>
+          <a:xfrm>
+            <a:off x="1143000" y="685800"/>
+            <a:ext cx="4572000" cy="3429000"/>
+          </a:xfrm>
+          <a:prstGeom prst="rect">
+            <a:avLst/>
+          </a:prstGeom>
+          <a:noFill/>
+          <a:ln w="12700">
+            <a:solidFill>
+              <a:prstClr val="black"/>
+            </a:solidFill>
+          </a:ln>
+        </p:spPr>
+        <p:txBody>
+          <a:bodyPr vert="horz" lIns="91440" tIns="45720" rIns="91440" bIns="45720" rtlCol="0" anchor="ctr"/>
+          <a:lstStyle/>
+          <a:p>
+            <a:endParaRPr lang="en-US"/>
+          </a:p>
+        </p:txBody>
+      </p:sp>
+      <p:sp>
+        <p:nvSpPr>
+          <p:cNvPr id="5" name="Notes Placeholder 4"/>
+          <p:cNvSpPr>
+            <a:spLocks noGrp="1"/>
+          </p:cNvSpPr>
+          <p:nvPr>
+            <p:ph type="body" sz="quarter" idx="3"/>
+          </p:nvPr>
+        </p:nvSpPr>
+        <p:spPr>
+          <a:xfrm>
+            <a:off x="685800" y="4343400"/>
+            <a:ext cx="5486400" cy="4114800"/>
+          </a:xfrm>
+          <a:prstGeom prst="rect">
+            <a:avLst/>
+          </a:prstGeom>
+        </p:spPr>
+        <p:txBody>
+          <a:bodyPr vert="horz" lIns="91440" tIns="45720" rIns="91440" bIns="45720" rtlCol="0"/>
+          <a:lstStyle/>
+          <a:p>
+            <a:pPr lvl="0"/>
+            <a:r>
+              <a:rPr lang="en-US" smtClean="0"/>
+              <a:t>Click to edit Master text styles</a:t>
+            </a:r>
+          </a:p>
+          <a:p>
+            <a:pPr lvl="1"/>
+            <a:r>
+              <a:rPr lang="en-US" smtClean="0"/>
+              <a:t>Second level</a:t>
+            </a:r>
+          </a:p>
+          <a:p>
+            <a:pPr lvl="2"/>
+            <a:r>
+              <a:rPr lang="en-US" smtClean="0"/>
+              <a:t>Third level</a:t>
+            </a:r>
+          </a:p>
+          <a:p>
+            <a:pPr lvl="3"/>
+            <a:r>
+              <a:rPr lang="en-US" smtClean="0"/>
+              <a:t>Fourth level</a:t>
+            </a:r>
+          </a:p>
+          <a:p>
+            <a:pPr lvl="4"/>
+            <a:r>
+              <a:rPr lang="en-US" smtClean="0"/>
+              <a:t>Fifth level</a:t>
+            </a:r>
+            <a:endParaRPr lang="en-US"/>
+          </a:p>
+        </p:txBody>
+      </p:sp>
+      <p:sp>
+        <p:nvSpPr>
+          <p:cNvPr id="6" name="Footer Placeholder 5"/>
+          <p:cNvSpPr>
+            <a:spLocks noGrp="1"/>
+          </p:cNvSpPr>
+          <p:nvPr>
+            <p:ph type="ftr" sz="quarter" idx="4"/>
+          </p:nvPr>
+        </p:nvSpPr>
+        <p:spPr>
+          <a:xfrm>
+            <a:off x="0" y="8685213"/>
+            <a:ext cx="2971800" cy="457200"/>
+          </a:xfrm>
+          <a:prstGeom prst="rect">
+            <a:avLst/>
+          </a:prstGeom>
+        </p:spPr>
+        <p:txBody>
+          <a:bodyPr vert="horz" lIns="91440" tIns="45720" rIns="91440" bIns="45720" rtlCol="0" anchor="b"/>
+          <a:lstStyle>
+            <a:lvl1pPr algn="l">
+              <a:defRPr sz="1200"/>
+            </a:lvl1pPr>
+          </a:lstStyle>
+          <a:p>
+            <a:endParaRPr lang="en-US"/>
+          </a:p>
+        </p:txBody>
+      </p:sp>
+      <p:sp>
+        <p:nvSpPr>
+          <p:cNvPr id="7" name="Slide Number Placeholder 6"/>
+          <p:cNvSpPr>
+            <a:spLocks noGrp="1"/>
+          </p:cNvSpPr>
+          <p:nvPr>
+            <p:ph type="sldNum" sz="quarter" idx="5"/>
+          </p:nvPr>
+        </p:nvSpPr>
+        <p:spPr>
+          <a:xfrm>
+            <a:off x="3884613" y="8685213"/>
+            <a:ext cx="2971800" cy="457200"/>
+          </a:xfrm>
+          <a:prstGeom prst="rect">
+            <a:avLst/>
+          </a:prstGeom>
+        </p:spPr>
+        <p:txBody>
+          <a:bodyPr vert="horz" lIns="91440" tIns="45720" rIns="91440" bIns="45720" rtlCol="0" anchor="b"/>
+          <a:lstStyle>
+            <a:lvl1pPr algn="r">
+              <a:defRPr sz="1200"/>
+            </a:lvl1pPr>
+          </a:lstStyle>
+          <a:p>
+            <a:fld id="{BB5E49A5-4136-284D-997B-48E1D791AD67}" type="slidenum">
+              <a:rPr lang="en-US" smtClean="0"/>
+              <a:t>‹#›</a:t>
+            </a:fld>
+            <a:endParaRPr lang="en-US"/>
+          </a:p>
+        </p:txBody>
+      </p:sp>
+    </p:spTree>
+    <p:extLst>
+      <p:ext uri="{BB962C8B-B14F-4D97-AF65-F5344CB8AC3E}">
+        <p14:creationId xmlns:p14="http://schemas.microsoft.com/office/powerpoint/2010/main" val="2623252185"/>
+      </p:ext>
+    </p:extLst>
+  </p:cSld>
+  <p:clrMap bg1="lt1" tx1="dk1" bg2="lt2" tx2="dk2" accent1="accent1" accent2="accent2" accent3="accent3" accent4="accent4" accent5="accent5" accent6="accent6" hlink="hlink" folHlink="folHlink"/>
+  <p:notesStyle>
+    <a:lvl1pPr marL="0" algn="l" defTabSz="457200" rtl="0" eaLnBrk="1" latinLnBrk="0" hangingPunct="1">
+      <a:defRPr sz="1200" kern="1200">
+        <a:solidFill>
+          <a:schemeClr val="tx1"/>
+        </a:solidFill>
+        <a:latin typeface="+mn-lt"/>
+        <a:ea typeface="+mn-ea"/>
+        <a:cs typeface="+mn-cs"/>
+      </a:defRPr>
+    </a:lvl1pPr>
+    <a:lvl2pPr marL="457200" algn="l" defTabSz="457200" rtl="0" eaLnBrk="1" latinLnBrk="0" hangingPunct="1">
+      <a:defRPr sz="1200" kern="1200">
+        <a:solidFill>
+          <a:schemeClr val="tx1"/>
+        </a:solidFill>
+        <a:latin typeface="+mn-lt"/>
+        <a:ea typeface="+mn-ea"/>
+        <a:cs typeface="+mn-cs"/>
+      </a:defRPr>
+    </a:lvl2pPr>
+    <a:lvl3pPr marL="914400" algn="l" defTabSz="457200" rtl="0" eaLnBrk="1" latinLnBrk="0" hangingPunct="1">
+      <a:defRPr sz="1200" kern="1200">
+        <a:solidFill>
+          <a:schemeClr val="tx1"/>
+        </a:solidFill>
+        <a:latin typeface="+mn-lt"/>
+        <a:ea typeface="+mn-ea"/>
+        <a:cs typeface="+mn-cs"/>
+      </a:defRPr>
+    </a:lvl3pPr>
+    <a:lvl4pPr marL="1371600" algn="l" defTabSz="457200" rtl="0" eaLnBrk="1" latinLnBrk="0" hangingPunct="1">
+      <a:defRPr sz="1200" kern="1200">
+        <a:solidFill>
+          <a:schemeClr val="tx1"/>
+        </a:solidFill>
+        <a:latin typeface="+mn-lt"/>
+        <a:ea typeface="+mn-ea"/>
+        <a:cs typeface="+mn-cs"/>
+      </a:defRPr>
+    </a:lvl4pPr>
+    <a:lvl5pPr marL="1828800" algn="l" defTabSz="457200" rtl="0" eaLnBrk="1" latinLnBrk="0" hangingPunct="1">
+      <a:defRPr sz="1200" kern="1200">
+        <a:solidFill>
+          <a:schemeClr val="tx1"/>
+        </a:solidFill>
+        <a:latin typeface="+mn-lt"/>
+        <a:ea typeface="+mn-ea"/>
+        <a:cs typeface="+mn-cs"/>
+      </a:defRPr>
+    </a:lvl5pPr>
+    <a:lvl6pPr marL="2286000" algn="l" defTabSz="457200" rtl="0" eaLnBrk="1" latinLnBrk="0" hangingPunct="1">
+      <a:defRPr sz="1200" kern="1200">
+        <a:solidFill>
+          <a:schemeClr val="tx1"/>
+        </a:solidFill>
+        <a:latin typeface="+mn-lt"/>
+        <a:ea typeface="+mn-ea"/>
+        <a:cs typeface="+mn-cs"/>
+      </a:defRPr>
+    </a:lvl6pPr>
+    <a:lvl7pPr marL="2743200" algn="l" defTabSz="457200" rtl="0" eaLnBrk="1" latinLnBrk="0" hangingPunct="1">
+      <a:defRPr sz="1200" kern="1200">
+        <a:solidFill>
+          <a:schemeClr val="tx1"/>
+        </a:solidFill>
+        <a:latin typeface="+mn-lt"/>
+        <a:ea typeface="+mn-ea"/>
+        <a:cs typeface="+mn-cs"/>
+      </a:defRPr>
+    </a:lvl7pPr>
+    <a:lvl8pPr marL="3200400" algn="l" defTabSz="457200" rtl="0" eaLnBrk="1" latinLnBrk="0" hangingPunct="1">
+      <a:defRPr sz="1200" kern="1200">
+        <a:solidFill>
+          <a:schemeClr val="tx1"/>
+        </a:solidFill>
+        <a:latin typeface="+mn-lt"/>
+        <a:ea typeface="+mn-ea"/>
+        <a:cs typeface="+mn-cs"/>
+      </a:defRPr>
+    </a:lvl8pPr>
+    <a:lvl9pPr marL="3657600" algn="l" defTabSz="457200" rtl="0" eaLnBrk="1" latinLnBrk="0" hangingPunct="1">
+      <a:defRPr sz="1200" kern="1200">
+        <a:solidFill>
+          <a:schemeClr val="tx1"/>
+        </a:solidFill>
+        <a:latin typeface="+mn-lt"/>
+        <a:ea typeface="+mn-ea"/>
+        <a:cs typeface="+mn-cs"/>
+      </a:defRPr>
+    </a:lvl9pPr>
+  </p:notesStyle>
+</p:notesMaster>
+</file>
+
+<file path=ppt/notesSlides/notesSlide1.xml><?xml version="1.0" encoding="utf-8"?>
+<p:notes xmlns:a="http://schemas.openxmlformats.org/drawingml/2006/main" xmlns:p="http://schemas.openxmlformats.org/presentationml/2006/main" xmlns:r="http://schemas.openxmlformats.org/officeDocument/2006/relationships">
+  <p:cSld>
+    <p:spTree>
+      <p:nvGrpSpPr>
+        <p:cNvPr id="1" name=""/>
+        <p:cNvGrpSpPr/>
+        <p:nvPr/>
+      </p:nvGrpSpPr>
+      <p:grpSpPr>
+        <a:xfrm>
+          <a:off x="0" y="0"/>
+          <a:ext cx="0" cy="0"/>
+          <a:chOff x="0" y="0"/>
+          <a:chExt cx="0" cy="0"/>
+        </a:xfrm>
+      </p:grpSpPr>
+      <p:sp>
+        <p:nvSpPr>
+          <p:cNvPr id="2" name="Slide Image Placeholder 1"/>
+          <p:cNvSpPr>
+            <a:spLocks noGrp="1"/>
+          </p:cNvSpPr>
+          <p:nvPr>
+            <p:ph type="sldImg" idx="2"/>
+          </p:nvPr>
+        </p:nvSpPr>
+        <p:spPr/>
+      </p:sp>
+      <p:sp>
+        <p:nvSpPr>
+          <p:cNvPr id="3" name="Notes Placeholder 2"/>
+          <p:cNvSpPr>
+            <a:spLocks noGrp="1"/>
+          </p:cNvSpPr>
+          <p:nvPr>
+            <p:ph type="body" idx="3" sz="quarter"/>
+          </p:nvPr>
+        </p:nvSpPr>
+        <p:spPr/>
+        <p:txBody>
+          <a:bodyPr/>
+          <a:lstStyle/>
+          <a:p>
+            <a:r>
+              <a:t>Frame this Topic as the convergence point of AT2 — the strands from Topics 6–8 come together into</a:t>
+            </a:r>
+          </a:p>
+          <a:p>
+            <a:r>
+              <a:t>one deployed thing. Set the mode; don't teach the wiring yet.</a:t>
+            </a:r>
+          </a:p>
+          <a:p>
+            <a:r>
+              <a:t>• First bullet: name the three strands they already hold — their OWN template (Topic 7 skill), the</a:t>
+            </a:r>
+          </a:p>
+          <a:p>
+            <a:r>
+              <a:t>PROVIDED code, and the PROVIDED store (Topic 6). Today those three assemble into a running</a:t>
+            </a:r>
+          </a:p>
+          <a:p>
+            <a:r>
+              <a:t>microservice. Deployment is assembling parts they understand, not inventing.</a:t>
+            </a:r>
+          </a:p>
+          <a:p>
+            <a:r>
+              <a:t>• Second bullet: this realises the microservice they DESIGNED in AT1 (Topic 2) — API gateway → queue</a:t>
+            </a:r>
+          </a:p>
+          <a:p>
+            <a:r>
+              <a:t>→ function → NoSQL store. Point back to that design; today the paper design becomes real.</a:t>
+            </a:r>
+          </a:p>
+          <a:p>
+            <a:r>
+              <a:t>• Third bullet (the substitution): the design places the store in India (ap-south-1) for the</a:t>
+            </a:r>
+          </a:p>
+          <a:p>
+            <a:r>
+              <a:t>scenario's reasons; in the lab they deploy to us-east-1 — `[scenario: ap-south-1 (India) | deploy:</a:t>
+            </a:r>
+          </a:p>
+          <a:p>
+            <a:r>
+              <a:t>us-east-1]`. Say it out loud — same build, only the location label changes.</a:t>
+            </a:r>
+          </a:p>
+          <a:p>
+            <a:r>
+              <a:t>• Fourth bullet: in the Learner Lab the provided `LabRole` is BOTH the function's execution role and</a:t>
+            </a:r>
+          </a:p>
+          <a:p>
+            <a:r>
+              <a:t>the API-GW→queue credentials — they don't create roles, they pass LabRole. Flag it now so nobody</a:t>
+            </a:r>
+          </a:p>
+          <a:p>
+            <a:r>
+              <a:t>goes hunting for IAM to build.</a:t>
+            </a:r>
+          </a:p>
+          <a:p>
+            <a:r>
+              <a:t>Misconception to pre-empt: "deploying means writing the service." No — the code is supplied; their</a:t>
+            </a:r>
+          </a:p>
+          <a:p>
+            <a:r>
+              <a:t>job is to provision and wire it correctly. The skill is faithful assembly + confirming it works.</a:t>
+            </a:r>
+          </a:p>
+          <a:p>
+            <a:r>
+              <a:t>Question to pose: "You designed this pipeline in AT1 — name the four pieces in order and what passes</a:t>
+            </a:r>
+          </a:p>
+          <a:p>
+            <a:r>
+              <a:t>between them." (API gateway → queue → function → store; draws out the flow before they build it.)</a:t>
+            </a:r>
+          </a:p>
+          <a:p>
+            <a:r>
+              <a:t>UoC/AT2 tie: opens the ICTCLD503 build arc (PC 3.1–3.4); everything today is evidenced in AT2 §4.4 —</a:t>
+            </a:r>
+          </a:p>
+          <a:p>
+            <a:r>
+              <a:t>the deployed, tested microservice (criterion D4).</a:t>
+            </a:r>
+          </a:p>
+        </p:txBody>
+      </p:sp>
+      <p:sp>
+        <p:nvSpPr>
+          <p:cNvPr id="4" name="Slide Number Placeholder 3"/>
+          <p:cNvSpPr>
+            <a:spLocks noGrp="1"/>
+          </p:cNvSpPr>
+          <p:nvPr>
+            <p:ph type="sldNum" idx="5" sz="quarter"/>
+          </p:nvPr>
+        </p:nvSpPr>
+        <p:spPr/>
+      </p:sp>
+    </p:spTree>
+  </p:cSld>
+  <p:clrMapOvr>
+    <a:masterClrMapping/>
+  </p:clrMapOvr>
+</p:notes>
+</file>
+
+<file path=ppt/notesSlides/notesSlide10.xml><?xml version="1.0" encoding="utf-8"?>
+<p:notes xmlns:a="http://schemas.openxmlformats.org/drawingml/2006/main" xmlns:p="http://schemas.openxmlformats.org/presentationml/2006/main" xmlns:r="http://schemas.openxmlformats.org/officeDocument/2006/relationships">
+  <p:cSld>
+    <p:spTree>
+      <p:nvGrpSpPr>
+        <p:cNvPr id="1" name=""/>
+        <p:cNvGrpSpPr/>
+        <p:nvPr/>
+      </p:nvGrpSpPr>
+      <p:grpSpPr>
+        <a:xfrm>
+          <a:off x="0" y="0"/>
+          <a:ext cx="0" cy="0"/>
+          <a:chOff x="0" y="0"/>
+          <a:chExt cx="0" cy="0"/>
+        </a:xfrm>
+      </p:grpSpPr>
+      <p:sp>
+        <p:nvSpPr>
+          <p:cNvPr id="2" name="Slide Image Placeholder 1"/>
+          <p:cNvSpPr>
+            <a:spLocks noGrp="1"/>
+          </p:cNvSpPr>
+          <p:nvPr>
+            <p:ph type="sldImg" idx="2"/>
+          </p:nvPr>
+        </p:nvSpPr>
+        <p:spPr/>
+      </p:sp>
+      <p:sp>
+        <p:nvSpPr>
+          <p:cNvPr id="3" name="Notes Placeholder 2"/>
+          <p:cNvSpPr>
+            <a:spLocks noGrp="1"/>
+          </p:cNvSpPr>
+          <p:nvPr>
+            <p:ph type="body" idx="3" sz="quarter"/>
+          </p:nvPr>
+        </p:nvSpPr>
+        <p:spPr/>
+        <p:txBody>
+          <a:bodyPr/>
+          <a:lstStyle/>
+          <a:p>
+            <a:r>
+              <a:t>Teach troubleshooting as a log-driven procedure — the failure is recorded somewhere; the skill is</a:t>
+            </a:r>
+          </a:p>
+          <a:p>
+            <a:r>
+              <a:t>reading it, not guessing. Frame it as read → diagnose → fix → redeploy → re-test.</a:t>
+            </a:r>
+          </a:p>
+          <a:p>
+            <a:r>
+              <a:t>• First bullet: the faults they'll meet — a permission error, a payload-validation bug, a mis-wired</a:t>
+            </a:r>
+          </a:p>
+          <a:p>
+            <a:r>
+              <a:t>event source. Name the categories so they know the shape of what they're hunting.</a:t>
+            </a:r>
+          </a:p>
+          <a:p>
+            <a:r>
+              <a:t>• Second bullet (the technique): read the FUNCTION LOGS and the queue/dead-letter behaviour — the</a:t>
+            </a:r>
+          </a:p>
+          <a:p>
+            <a:r>
+              <a:t>failure is recorded, find it (KE 5). A message stuck on a dead-letter queue is telling you something.</a:t>
+            </a:r>
+          </a:p>
+          <a:p>
+            <a:r>
+              <a:t>• Third bullet: fix, redeploy, re-test — confirm the record now writes. The loop isn't done until the</a:t>
+            </a:r>
+          </a:p>
+          <a:p>
+            <a:r>
+              <a:t>observable outcome is restored (ties back to C3's testing discipline).</a:t>
+            </a:r>
+          </a:p>
+          <a:p>
+            <a:r>
+              <a:t>Misconception to pre-empt: "if it didn't work I'll just redeploy and hope." No — read the log first;</a:t>
+            </a:r>
+          </a:p>
+          <a:p>
+            <a:r>
+              <a:t>blind redeploys fix nothing and burn the lab clock. The log names the cause.</a:t>
+            </a:r>
+          </a:p>
+          <a:p>
+            <a:r>
+              <a:t>Question to pose: "The function runs but nothing lands in the store, and the logs show access-denied —</a:t>
+            </a:r>
+          </a:p>
+          <a:p>
+            <a:r>
+              <a:t>what's the likely cause?" (a permissions/wiring issue — LabRole or the event-source mapping; reason</a:t>
+            </a:r>
+          </a:p>
+          <a:p>
+            <a:r>
+              <a:t>from the log to the fix).</a:t>
+            </a:r>
+          </a:p>
+          <a:p>
+            <a:r>
+              <a:t>UoC/AT2 tie: ICTCLD503 PC 3.4 (troubleshoot and fix errors) + KE 5 → AT2 §6 troubleshooting log (D9).</a:t>
+            </a:r>
+          </a:p>
+        </p:txBody>
+      </p:sp>
+      <p:sp>
+        <p:nvSpPr>
+          <p:cNvPr id="4" name="Slide Number Placeholder 3"/>
+          <p:cNvSpPr>
+            <a:spLocks noGrp="1"/>
+          </p:cNvSpPr>
+          <p:nvPr>
+            <p:ph type="sldNum" idx="5" sz="quarter"/>
+          </p:nvPr>
+        </p:nvSpPr>
+        <p:spPr/>
+      </p:sp>
+    </p:spTree>
+  </p:cSld>
+  <p:clrMapOvr>
+    <a:masterClrMapping/>
+  </p:clrMapOvr>
+</p:notes>
+</file>
+
+<file path=ppt/notesSlides/notesSlide11.xml><?xml version="1.0" encoding="utf-8"?>
+<p:notes xmlns:a="http://schemas.openxmlformats.org/drawingml/2006/main" xmlns:p="http://schemas.openxmlformats.org/presentationml/2006/main" xmlns:r="http://schemas.openxmlformats.org/officeDocument/2006/relationships">
+  <p:cSld>
+    <p:spTree>
+      <p:nvGrpSpPr>
+        <p:cNvPr id="1" name=""/>
+        <p:cNvGrpSpPr/>
+        <p:nvPr/>
+      </p:nvGrpSpPr>
+      <p:grpSpPr>
+        <a:xfrm>
+          <a:off x="0" y="0"/>
+          <a:ext cx="0" cy="0"/>
+          <a:chOff x="0" y="0"/>
+          <a:chExt cx="0" cy="0"/>
+        </a:xfrm>
+      </p:grpSpPr>
+      <p:sp>
+        <p:nvSpPr>
+          <p:cNvPr id="2" name="Slide Image Placeholder 1"/>
+          <p:cNvSpPr>
+            <a:spLocks noGrp="1"/>
+          </p:cNvSpPr>
+          <p:nvPr>
+            <p:ph type="sldImg" idx="2"/>
+          </p:nvPr>
+        </p:nvSpPr>
+        <p:spPr/>
+      </p:sp>
+      <p:sp>
+        <p:nvSpPr>
+          <p:cNvPr id="3" name="Notes Placeholder 2"/>
+          <p:cNvSpPr>
+            <a:spLocks noGrp="1"/>
+          </p:cNvSpPr>
+          <p:nvPr>
+            <p:ph type="body" idx="3" sz="quarter"/>
+          </p:nvPr>
+        </p:nvSpPr>
+        <p:spPr/>
+        <p:txBody>
+          <a:bodyPr/>
+          <a:lstStyle/>
+          <a:p>
+            <a:r>
+              <a:t>Facilitation — the C4 practice; students diagnose a SEEDED fault, so everyone practises reading logs</a:t>
+            </a:r>
+          </a:p>
+          <a:p>
+            <a:r>
+              <a:t>(not just those who happened to break something).</a:t>
+            </a:r>
+          </a:p>
+          <a:p>
+            <a:r>
+              <a:t>Tell students, in these words: "On the practice scenario, a fault has been introduced. Diagnose it</a:t>
+            </a:r>
+          </a:p>
+          <a:p>
+            <a:r>
+              <a:t>from the logs, fix it, redeploy, and confirm the event records."</a:t>
+            </a:r>
+          </a:p>
+          <a:p>
+            <a:r>
+              <a:t>Steps (put on the board):</a:t>
+            </a:r>
+          </a:p>
+          <a:p>
+            <a:r>
+              <a:t>1. Post an event — observe that no record is written (or an error surfaces).</a:t>
+            </a:r>
+          </a:p>
+          <a:p>
+            <a:r>
+              <a:t>2. Read the function logs and the queue/dead-letter behaviour — find where and why it fails.</a:t>
+            </a:r>
+          </a:p>
+          <a:p>
+            <a:r>
+              <a:t>3. Fix the cause, redeploy, and re-test — confirm the record now writes.</a:t>
+            </a:r>
+          </a:p>
+          <a:p>
+            <a:r>
+              <a:t>Must produce: a short diagnosis (what the log showed, what the cause was, what you changed) plus a</a:t>
+            </a:r>
+          </a:p>
+          <a:p>
+            <a:r>
+              <a:t>passing re-test — this is the troubleshooting-log evidence AT2 wants.</a:t>
+            </a:r>
+          </a:p>
+          <a:p>
+            <a:r>
+              <a:t>Timing: ~20 min. Where they get stuck: they try to fix before reading the log — hold them at the log</a:t>
+            </a:r>
+          </a:p>
+          <a:p>
+            <a:r>
+              <a:t>until they can NAME the cause; and they fix but forget to redeploy before re-testing.</a:t>
+            </a:r>
+          </a:p>
+          <a:p>
+            <a:r>
+              <a:t>Share-back prompt: take one seeded fault and have a student walk log → cause → fix out loud.</a:t>
+            </a:r>
+          </a:p>
+          <a:p>
+            <a:r>
+              <a:t>No-leakage note: the practice scenario is comparable-not-identical to the AT2 build; keep them on the</a:t>
+            </a:r>
+          </a:p>
+          <a:p>
+            <a:r>
+              <a:t>practice microservice here.</a:t>
+            </a:r>
+          </a:p>
+        </p:txBody>
+      </p:sp>
+      <p:sp>
+        <p:nvSpPr>
+          <p:cNvPr id="4" name="Slide Number Placeholder 3"/>
+          <p:cNvSpPr>
+            <a:spLocks noGrp="1"/>
+          </p:cNvSpPr>
+          <p:nvPr>
+            <p:ph type="sldNum" idx="5" sz="quarter"/>
+          </p:nvPr>
+        </p:nvSpPr>
+        <p:spPr/>
+      </p:sp>
+    </p:spTree>
+  </p:cSld>
+  <p:clrMapOvr>
+    <a:masterClrMapping/>
+  </p:clrMapOvr>
+</p:notes>
+</file>
+
+<file path=ppt/notesSlides/notesSlide2.xml><?xml version="1.0" encoding="utf-8"?>
+<p:notes xmlns:a="http://schemas.openxmlformats.org/drawingml/2006/main" xmlns:p="http://schemas.openxmlformats.org/presentationml/2006/main" xmlns:r="http://schemas.openxmlformats.org/officeDocument/2006/relationships">
+  <p:cSld>
+    <p:spTree>
+      <p:nvGrpSpPr>
+        <p:cNvPr id="1" name=""/>
+        <p:cNvGrpSpPr/>
+        <p:nvPr/>
+      </p:nvGrpSpPr>
+      <p:grpSpPr>
+        <a:xfrm>
+          <a:off x="0" y="0"/>
+          <a:ext cx="0" cy="0"/>
+          <a:chOff x="0" y="0"/>
+          <a:chExt cx="0" cy="0"/>
+        </a:xfrm>
+      </p:grpSpPr>
+      <p:sp>
+        <p:nvSpPr>
+          <p:cNvPr id="2" name="Slide Image Placeholder 1"/>
+          <p:cNvSpPr>
+            <a:spLocks noGrp="1"/>
+          </p:cNvSpPr>
+          <p:nvPr>
+            <p:ph type="sldImg" idx="2"/>
+          </p:nvPr>
+        </p:nvSpPr>
+        <p:spPr/>
+      </p:sp>
+      <p:sp>
+        <p:nvSpPr>
+          <p:cNvPr id="3" name="Notes Placeholder 2"/>
+          <p:cNvSpPr>
+            <a:spLocks noGrp="1"/>
+          </p:cNvSpPr>
+          <p:nvPr>
+            <p:ph type="body" idx="3" sz="quarter"/>
+          </p:nvPr>
+        </p:nvSpPr>
+        <p:spPr/>
+        <p:txBody>
+          <a:bodyPr/>
+          <a:lstStyle/>
+          <a:p>
+            <a:r>
+              <a:t>Teach the discipline that must come BEFORE any console work — review the design and the supplied</a:t>
+            </a:r>
+          </a:p>
+          <a:p>
+            <a:r>
+              <a:t>code so deployment is informed assembly. Short slide, firm point.</a:t>
+            </a:r>
+          </a:p>
+          <a:p>
+            <a:r>
+              <a:t>• First bullet: review the microservice design from AT1 — the services chosen, the flow, the contract</a:t>
+            </a:r>
+          </a:p>
+          <a:p>
+            <a:r>
+              <a:t>the webhook implements. They wrote this design; make them re-read it as the build spec.</a:t>
+            </a:r>
+          </a:p>
+          <a:p>
+            <a:r>
+              <a:t>• Second bullet: review the SUPPLIED code components and the webhook contract they implement before</a:t>
+            </a:r>
+          </a:p>
+          <a:p>
+            <a:r>
+              <a:t>deploying. Know what each component expects (its event shape, its config) so you wire it right.</a:t>
+            </a:r>
+          </a:p>
+          <a:p>
+            <a:r>
+              <a:t>• Third bullet (the point): deployment is ASSEMBLING, not inventing. If they know what each piece does</a:t>
+            </a:r>
+          </a:p>
+          <a:p>
+            <a:r>
+              <a:t>and how it connects, the deploy is mechanical; if they skip the review, they wire it blind.</a:t>
+            </a:r>
+          </a:p>
+          <a:p>
+            <a:r>
+              <a:t>Misconception to pre-empt: "the code is given, so I can just deploy it and read it later." No —</a:t>
+            </a:r>
+          </a:p>
+          <a:p>
+            <a:r>
+              <a:t>deploying code you haven't read is how you get a mis-wired event source you can't diagnose. Read first.</a:t>
+            </a:r>
+          </a:p>
+          <a:p>
+            <a:r>
+              <a:t>Question to pose: "The function needs to know which table to write to — where does that come from, the</a:t>
+            </a:r>
+          </a:p>
+          <a:p>
+            <a:r>
+              <a:t>code or the deployment config?" (config — sets up the C2 wiring, and why review matters).</a:t>
+            </a:r>
+          </a:p>
+          <a:p>
+            <a:r>
+              <a:t>UoC/AT2 tie: ICTCLD503 PC 3.1 (review microservice design and code components) → AT2 §4.4 (D4); the</a:t>
+            </a:r>
+          </a:p>
+          <a:p>
+            <a:r>
+              <a:t>review is the first assessed step of the build.</a:t>
+            </a:r>
+          </a:p>
+        </p:txBody>
+      </p:sp>
+      <p:sp>
+        <p:nvSpPr>
+          <p:cNvPr id="4" name="Slide Number Placeholder 3"/>
+          <p:cNvSpPr>
+            <a:spLocks noGrp="1"/>
+          </p:cNvSpPr>
+          <p:nvPr>
+            <p:ph type="sldNum" idx="5" sz="quarter"/>
+          </p:nvPr>
+        </p:nvSpPr>
+        <p:spPr/>
+      </p:sp>
+    </p:spTree>
+  </p:cSld>
+  <p:clrMapOvr>
+    <a:masterClrMapping/>
+  </p:clrMapOvr>
+</p:notes>
+</file>
+
+<file path=ppt/notesSlides/notesSlide3.xml><?xml version="1.0" encoding="utf-8"?>
+<p:notes xmlns:a="http://schemas.openxmlformats.org/drawingml/2006/main" xmlns:p="http://schemas.openxmlformats.org/presentationml/2006/main" xmlns:r="http://schemas.openxmlformats.org/officeDocument/2006/relationships">
+  <p:cSld>
+    <p:spTree>
+      <p:nvGrpSpPr>
+        <p:cNvPr id="1" name=""/>
+        <p:cNvGrpSpPr/>
+        <p:nvPr/>
+      </p:nvGrpSpPr>
+      <p:grpSpPr>
+        <a:xfrm>
+          <a:off x="0" y="0"/>
+          <a:ext cx="0" cy="0"/>
+          <a:chOff x="0" y="0"/>
+          <a:chExt cx="0" cy="0"/>
+        </a:xfrm>
+      </p:grpSpPr>
+      <p:sp>
+        <p:nvSpPr>
+          <p:cNvPr id="2" name="Slide Image Placeholder 1"/>
+          <p:cNvSpPr>
+            <a:spLocks noGrp="1"/>
+          </p:cNvSpPr>
+          <p:nvPr>
+            <p:ph type="sldImg" idx="2"/>
+          </p:nvPr>
+        </p:nvSpPr>
+        <p:spPr/>
+      </p:sp>
+      <p:sp>
+        <p:nvSpPr>
+          <p:cNvPr id="3" name="Notes Placeholder 2"/>
+          <p:cNvSpPr>
+            <a:spLocks noGrp="1"/>
+          </p:cNvSpPr>
+          <p:nvPr>
+            <p:ph type="body" idx="3" sz="quarter"/>
+          </p:nvPr>
+        </p:nvSpPr>
+        <p:spPr/>
+        <p:txBody>
+          <a:bodyPr/>
+          <a:lstStyle/>
+          <a:p>
+            <a:r>
+              <a:t>A vendor-neutral primer on how the pieces connect — teach the event-driven wiring pattern before the</a:t>
+            </a:r>
+          </a:p>
+          <a:p>
+            <a:r>
+              <a:t>AWS specifics. This is the mental model for the whole deploy.</a:t>
+            </a:r>
+          </a:p>
+          <a:p>
+            <a:r>
+              <a:t>• First bullet: the API route — the gateway receives the webhook and hands it on. It's the front door;</a:t>
+            </a:r>
+          </a:p>
+          <a:p>
+            <a:r>
+              <a:t>it doesn't process, it accepts and forwards.</a:t>
+            </a:r>
+          </a:p>
+          <a:p>
+            <a:r>
+              <a:t>• Second bullet (the key idea): the queue is the function's EVENT SOURCE — the function is triggered as</a:t>
+            </a:r>
+          </a:p>
+          <a:p>
+            <a:r>
+              <a:t>events arrive on the queue, not called directly. This decoupling is what makes it resilient and</a:t>
+            </a:r>
+          </a:p>
+          <a:p>
+            <a:r>
+              <a:t>scalable; stress it, because students expect a direct API→function call.</a:t>
+            </a:r>
+          </a:p>
+          <a:p>
+            <a:r>
+              <a:t>• Third bullet: the function writes to the provided store; the store's TABLE NAME is handed to the</a:t>
+            </a:r>
+          </a:p>
+          <a:p>
+            <a:r>
+              <a:t>function as config (not hard-coded). Connect back to C1's review point.</a:t>
+            </a:r>
+          </a:p>
+          <a:p>
+            <a:r>
+              <a:t>Misconception to pre-empt: "the API calls the function directly." No — the queue sits between them as</a:t>
+            </a:r>
+          </a:p>
+          <a:p>
+            <a:r>
+              <a:t>the event source; that buffer is deliberate (absorbs bursts, retries failures). Draw the four boxes.</a:t>
+            </a:r>
+          </a:p>
+          <a:p>
+            <a:r>
+              <a:t>Question to pose: "Why put a queue between the API and the function instead of calling the function</a:t>
+            </a:r>
+          </a:p>
+          <a:p>
+            <a:r>
+              <a:t>straight from the API?" (decouples producer from consumer; buffers bursts; enables retry/DLQ — the</a:t>
+            </a:r>
+          </a:p>
+          <a:p>
+            <a:r>
+              <a:t>scaling signal they'll monitor in Topic 9).</a:t>
+            </a:r>
+          </a:p>
+          <a:p>
+            <a:r>
+              <a:t>UoC/AT2 tie: ICTCLD503 PC 3.2 + PE 3 — the wiring model they must implement; evidenced in AT2 §4.4 (D4).</a:t>
+            </a:r>
+          </a:p>
+        </p:txBody>
+      </p:sp>
+      <p:sp>
+        <p:nvSpPr>
+          <p:cNvPr id="4" name="Slide Number Placeholder 3"/>
+          <p:cNvSpPr>
+            <a:spLocks noGrp="1"/>
+          </p:cNvSpPr>
+          <p:nvPr>
+            <p:ph type="sldNum" idx="5" sz="quarter"/>
+          </p:nvPr>
+        </p:nvSpPr>
+        <p:spPr/>
+      </p:sp>
+    </p:spTree>
+  </p:cSld>
+  <p:clrMapOvr>
+    <a:masterClrMapping/>
+  </p:clrMapOvr>
+</p:notes>
+</file>
+
+<file path=ppt/notesSlides/notesSlide4.xml><?xml version="1.0" encoding="utf-8"?>
+<p:notes xmlns:a="http://schemas.openxmlformats.org/drawingml/2006/main" xmlns:p="http://schemas.openxmlformats.org/presentationml/2006/main" xmlns:r="http://schemas.openxmlformats.org/officeDocument/2006/relationships">
+  <p:cSld>
+    <p:spTree>
+      <p:nvGrpSpPr>
+        <p:cNvPr id="1" name=""/>
+        <p:cNvGrpSpPr/>
+        <p:nvPr/>
+      </p:nvGrpSpPr>
+      <p:grpSpPr>
+        <a:xfrm>
+          <a:off x="0" y="0"/>
+          <a:ext cx="0" cy="0"/>
+          <a:chOff x="0" y="0"/>
+          <a:chExt cx="0" cy="0"/>
+        </a:xfrm>
+      </p:grpSpPr>
+      <p:sp>
+        <p:nvSpPr>
+          <p:cNvPr id="2" name="Slide Image Placeholder 1"/>
+          <p:cNvSpPr>
+            <a:spLocks noGrp="1"/>
+          </p:cNvSpPr>
+          <p:nvPr>
+            <p:ph type="sldImg" idx="2"/>
+          </p:nvPr>
+        </p:nvSpPr>
+        <p:spPr/>
+      </p:sp>
+      <p:sp>
+        <p:nvSpPr>
+          <p:cNvPr id="3" name="Notes Placeholder 2"/>
+          <p:cNvSpPr>
+            <a:spLocks noGrp="1"/>
+          </p:cNvSpPr>
+          <p:nvPr>
+            <p:ph type="body" idx="3" sz="quarter"/>
+          </p:nvPr>
+        </p:nvSpPr>
+        <p:spPr/>
+        <p:txBody>
+          <a:bodyPr/>
+          <a:lstStyle/>
+          <a:p>
+            <a:r>
+              <a:t>The concrete AWS deploy, off the wiring diagram — turn the primer's pattern into the actual services.</a:t>
+            </a:r>
+          </a:p>
+          <a:p>
+            <a:r>
+              <a:t>Walk it against the `microservice-deploy` diagram on screen.</a:t>
+            </a:r>
+          </a:p>
+          <a:p>
+            <a:r>
+              <a:t>• First bullet: deploy and configure the serverless services to implement the application FROM THE</a:t>
+            </a:r>
+          </a:p>
+          <a:p>
+            <a:r>
+              <a:t>PROVIDED CODE — API, queue, function, store, in the lab.</a:t>
+            </a:r>
+          </a:p>
+          <a:p>
+            <a:r>
+              <a:t>• Second bullet: pass `LabRole` as the execution role, and wire API → queue → function → store. This</a:t>
+            </a:r>
+          </a:p>
+          <a:p>
+            <a:r>
+              <a:t>is the Learner Lab substitution for building IAM roles — say it plainly so nobody builds a role.</a:t>
+            </a:r>
+          </a:p>
+          <a:p>
+            <a:r>
+              <a:t>• Third bullet: they may use the console, CLI or SDK to deploy and confirm (PE 4 — the tooling</a:t>
+            </a:r>
+          </a:p>
+          <a:p>
+            <a:r>
+              <a:t>evidence). Any of the three is fine; what's assessed is that it stands up and they can show it.</a:t>
+            </a:r>
+          </a:p>
+          <a:p>
+            <a:r>
+              <a:t>Misconception to pre-empt: "I need to create an execution role for the function." No — in the lab you</a:t>
+            </a:r>
+          </a:p>
+          <a:p>
+            <a:r>
+              <a:t>pass the provided `LabRole`; creating IAM is out of scope here and just costs them time.</a:t>
+            </a:r>
+          </a:p>
+          <a:p>
+            <a:r>
+              <a:t>Question to pose: "What's the ONE thing you must configure so the function fires when an event lands on</a:t>
+            </a:r>
+          </a:p>
+          <a:p>
+            <a:r>
+              <a:t>the queue?" (the event-source mapping between queue and function — the piece students forget).</a:t>
+            </a:r>
+          </a:p>
+          <a:p>
+            <a:r>
+              <a:t>UoC/AT2 tie: ICTCLD503 PC 3.2 + PE 3 (deploy/configure the services) + PE 4 (console/CLI/SDK) → AT2</a:t>
+            </a:r>
+          </a:p>
+          <a:p>
+            <a:r>
+              <a:t>§4.4 (D4); this is the core build step.</a:t>
+            </a:r>
+          </a:p>
+        </p:txBody>
+      </p:sp>
+      <p:sp>
+        <p:nvSpPr>
+          <p:cNvPr id="4" name="Slide Number Placeholder 3"/>
+          <p:cNvSpPr>
+            <a:spLocks noGrp="1"/>
+          </p:cNvSpPr>
+          <p:nvPr>
+            <p:ph type="sldNum" idx="5" sz="quarter"/>
+          </p:nvPr>
+        </p:nvSpPr>
+        <p:spPr/>
+      </p:sp>
+    </p:spTree>
+  </p:cSld>
+  <p:clrMapOvr>
+    <a:masterClrMapping/>
+  </p:clrMapOvr>
+</p:notes>
+</file>
+
+<file path=ppt/notesSlides/notesSlide5.xml><?xml version="1.0" encoding="utf-8"?>
+<p:notes xmlns:a="http://schemas.openxmlformats.org/drawingml/2006/main" xmlns:p="http://schemas.openxmlformats.org/presentationml/2006/main" xmlns:r="http://schemas.openxmlformats.org/officeDocument/2006/relationships">
+  <p:cSld>
+    <p:spTree>
+      <p:nvGrpSpPr>
+        <p:cNvPr id="1" name=""/>
+        <p:cNvGrpSpPr/>
+        <p:nvPr/>
+      </p:nvGrpSpPr>
+      <p:grpSpPr>
+        <a:xfrm>
+          <a:off x="0" y="0"/>
+          <a:ext cx="0" cy="0"/>
+          <a:chOff x="0" y="0"/>
+          <a:chExt cx="0" cy="0"/>
+        </a:xfrm>
+      </p:grpSpPr>
+      <p:sp>
+        <p:nvSpPr>
+          <p:cNvPr id="2" name="Slide Image Placeholder 1"/>
+          <p:cNvSpPr>
+            <a:spLocks noGrp="1"/>
+          </p:cNvSpPr>
+          <p:nvPr>
+            <p:ph type="sldImg" idx="2"/>
+          </p:nvPr>
+        </p:nvSpPr>
+        <p:spPr/>
+      </p:sp>
+      <p:sp>
+        <p:nvSpPr>
+          <p:cNvPr id="3" name="Notes Placeholder 2"/>
+          <p:cNvSpPr>
+            <a:spLocks noGrp="1"/>
+          </p:cNvSpPr>
+          <p:nvPr>
+            <p:ph type="body" idx="3" sz="quarter"/>
+          </p:nvPr>
+        </p:nvSpPr>
+        <p:spPr/>
+        <p:txBody>
+          <a:bodyPr/>
+          <a:lstStyle/>
+          <a:p>
+            <a:r>
+              <a:t>LIVE DEMONSTRATION (educator-led against the lab-pack — screen your own deploy of the course's</a:t>
+            </a:r>
+          </a:p>
+          <a:p>
+            <a:r>
+              <a:t>microservice; there is no recorded demo for this). Show it end to end, then they replicate on the</a:t>
+            </a:r>
+          </a:p>
+          <a:p>
+            <a:r>
+              <a:t>practice scenario next.</a:t>
+            </a:r>
+          </a:p>
+          <a:p/>
+          <a:p>
+            <a:r>
+              <a:t>WHAT TO DEMONSTRATE (step by step, in the lab, us-east-1):</a:t>
+            </a:r>
+          </a:p>
+          <a:p>
+            <a:r>
+              <a:t>1. Deploy the API, queue and function from the SUPPLIED code — provision the resources.</a:t>
+            </a:r>
+          </a:p>
+          <a:p>
+            <a:r>
+              <a:t>2. Pass `LabRole` as the execution role; do NOT create a role.</a:t>
+            </a:r>
+          </a:p>
+          <a:p>
+            <a:r>
+              <a:t>3. Wire the event-source mapping so the queue triggers the function; point it at the provided store.</a:t>
+            </a:r>
+          </a:p>
+          <a:p>
+            <a:r>
+              <a:t>4. Confirm each resource exists and the event-source mapping is enabled.</a:t>
+            </a:r>
+          </a:p>
+          <a:p/>
+          <a:p>
+            <a:r>
+              <a:t>WHAT TO EMPHASISE:</a:t>
+            </a:r>
+          </a:p>
+          <a:p>
+            <a:r>
+              <a:t>• Say the substitution out loud — `[scenario: ap-south-1 (India) | deploy: us-east-1]` — as you set</a:t>
+            </a:r>
+          </a:p>
+          <a:p>
+            <a:r>
+              <a:t>the Region.</a:t>
+            </a:r>
+          </a:p>
+          <a:p>
+            <a:r>
+              <a:t>• The event-source mapping is the make-or-break wiring step — show where it lives and that it's ON.</a:t>
+            </a:r>
+          </a:p>
+          <a:p>
+            <a:r>
+              <a:t>• This is assembling supplied parts, not writing code — narrate that mindset as you go.</a:t>
+            </a:r>
+          </a:p>
+          <a:p/>
+          <a:p>
+            <a:r>
+              <a:t>PREP: clean Learner Lab open with `LabRole` available; the supplied microservice code + template to</a:t>
+            </a:r>
+          </a:p>
+          <a:p>
+            <a:r>
+              <a:t>hand; the provided store already in place (Topic 6). ~8–10 min to screen + narrate before the activity.</a:t>
+            </a:r>
+          </a:p>
+        </p:txBody>
+      </p:sp>
+      <p:sp>
+        <p:nvSpPr>
+          <p:cNvPr id="4" name="Slide Number Placeholder 3"/>
+          <p:cNvSpPr>
+            <a:spLocks noGrp="1"/>
+          </p:cNvSpPr>
+          <p:nvPr>
+            <p:ph type="sldNum" idx="5" sz="quarter"/>
+          </p:nvPr>
+        </p:nvSpPr>
+        <p:spPr/>
+      </p:sp>
+    </p:spTree>
+  </p:cSld>
+  <p:clrMapOvr>
+    <a:masterClrMapping/>
+  </p:clrMapOvr>
+</p:notes>
+</file>
+
+<file path=ppt/notesSlides/notesSlide6.xml><?xml version="1.0" encoding="utf-8"?>
+<p:notes xmlns:a="http://schemas.openxmlformats.org/drawingml/2006/main" xmlns:p="http://schemas.openxmlformats.org/presentationml/2006/main" xmlns:r="http://schemas.openxmlformats.org/officeDocument/2006/relationships">
+  <p:cSld>
+    <p:spTree>
+      <p:nvGrpSpPr>
+        <p:cNvPr id="1" name=""/>
+        <p:cNvGrpSpPr/>
+        <p:nvPr/>
+      </p:nvGrpSpPr>
+      <p:grpSpPr>
+        <a:xfrm>
+          <a:off x="0" y="0"/>
+          <a:ext cx="0" cy="0"/>
+          <a:chOff x="0" y="0"/>
+          <a:chExt cx="0" cy="0"/>
+        </a:xfrm>
+      </p:grpSpPr>
+      <p:sp>
+        <p:nvSpPr>
+          <p:cNvPr id="2" name="Slide Image Placeholder 1"/>
+          <p:cNvSpPr>
+            <a:spLocks noGrp="1"/>
+          </p:cNvSpPr>
+          <p:nvPr>
+            <p:ph type="sldImg" idx="2"/>
+          </p:nvPr>
+        </p:nvSpPr>
+        <p:spPr/>
+      </p:sp>
+      <p:sp>
+        <p:nvSpPr>
+          <p:cNvPr id="3" name="Notes Placeholder 2"/>
+          <p:cNvSpPr>
+            <a:spLocks noGrp="1"/>
+          </p:cNvSpPr>
+          <p:nvPr>
+            <p:ph type="body" idx="3" sz="quarter"/>
+          </p:nvPr>
+        </p:nvSpPr>
+        <p:spPr/>
+        <p:txBody>
+          <a:bodyPr/>
+          <a:lstStyle/>
+          <a:p>
+            <a:r>
+              <a:t>Facilitation — the C2 practice; students deploy the practice microservice they just watched demoed.</a:t>
+            </a:r>
+          </a:p>
+          <a:p>
+            <a:r>
+              <a:t>Tell students, in these words: "On the practice scenario, deploy the practice microservice from the</a:t>
+            </a:r>
+          </a:p>
+          <a:p>
+            <a:r>
+              <a:t>supplied code and wire it to the practice store. Deploy to us-east-1, pass `LabRole`, and confirm the</a:t>
+            </a:r>
+          </a:p>
+          <a:p>
+            <a:r>
+              <a:t>pipeline stands up."</a:t>
+            </a:r>
+          </a:p>
+          <a:p>
+            <a:r>
+              <a:t>Steps (put on the board):</a:t>
+            </a:r>
+          </a:p>
+          <a:p>
+            <a:r>
+              <a:t>1. Deploy the API, queue and function from the supplied practice code.</a:t>
+            </a:r>
+          </a:p>
+          <a:p>
+            <a:r>
+              <a:t>2. Pass `LabRole` as the execution role; configure the event-source mapping (queue → function).</a:t>
+            </a:r>
+          </a:p>
+          <a:p>
+            <a:r>
+              <a:t>3. Point the function at the practice store (its table name as config).</a:t>
+            </a:r>
+          </a:p>
+          <a:p>
+            <a:r>
+              <a:t>4. Confirm each resource, and that the event-source mapping is enabled.</a:t>
+            </a:r>
+          </a:p>
+          <a:p>
+            <a:r>
+              <a:t>Must produce: a stood-up pipeline in us-east-1 — API, queue, function and store all present and wired,</a:t>
+            </a:r>
+          </a:p>
+          <a:p>
+            <a:r>
+              <a:t>ready to test in the next activity.</a:t>
+            </a:r>
+          </a:p>
+          <a:p>
+            <a:r>
+              <a:t>Timing: ~30 min. Where they get stuck: the event-source mapping (a deployed function that never fires</a:t>
+            </a:r>
+          </a:p>
+          <a:p>
+            <a:r>
+              <a:t>because nothing triggers it) and hunting for an IAM role instead of passing `LabRole` — circulate and</a:t>
+            </a:r>
+          </a:p>
+          <a:p>
+            <a:r>
+              <a:t>check both.</a:t>
+            </a:r>
+          </a:p>
+          <a:p>
+            <a:r>
+              <a:t>Share-back prompt: ask one student to show their event-source mapping is enabled and points queue → function.</a:t>
+            </a:r>
+          </a:p>
+          <a:p>
+            <a:r>
+              <a:t>No-leakage note: the practice scenario is comparable-not-identical to the AT2 build — the assessed</a:t>
+            </a:r>
+          </a:p>
+          <a:p>
+            <a:r>
+              <a:t>microservice is a different one. Keep them on the practice artefacts here.</a:t>
+            </a:r>
+          </a:p>
+        </p:txBody>
+      </p:sp>
+      <p:sp>
+        <p:nvSpPr>
+          <p:cNvPr id="4" name="Slide Number Placeholder 3"/>
+          <p:cNvSpPr>
+            <a:spLocks noGrp="1"/>
+          </p:cNvSpPr>
+          <p:nvPr>
+            <p:ph type="sldNum" idx="5" sz="quarter"/>
+          </p:nvPr>
+        </p:nvSpPr>
+        <p:spPr/>
+      </p:sp>
+    </p:spTree>
+  </p:cSld>
+  <p:clrMapOvr>
+    <a:masterClrMapping/>
+  </p:clrMapOvr>
+</p:notes>
+</file>
+
+<file path=ppt/notesSlides/notesSlide7.xml><?xml version="1.0" encoding="utf-8"?>
+<p:notes xmlns:a="http://schemas.openxmlformats.org/drawingml/2006/main" xmlns:p="http://schemas.openxmlformats.org/presentationml/2006/main" xmlns:r="http://schemas.openxmlformats.org/officeDocument/2006/relationships">
+  <p:cSld>
+    <p:spTree>
+      <p:nvGrpSpPr>
+        <p:cNvPr id="1" name=""/>
+        <p:cNvGrpSpPr/>
+        <p:nvPr/>
+      </p:nvGrpSpPr>
+      <p:grpSpPr>
+        <a:xfrm>
+          <a:off x="0" y="0"/>
+          <a:ext cx="0" cy="0"/>
+          <a:chOff x="0" y="0"/>
+          <a:chExt cx="0" cy="0"/>
+        </a:xfrm>
+      </p:grpSpPr>
+      <p:sp>
+        <p:nvSpPr>
+          <p:cNvPr id="2" name="Slide Image Placeholder 1"/>
+          <p:cNvSpPr>
+            <a:spLocks noGrp="1"/>
+          </p:cNvSpPr>
+          <p:nvPr>
+            <p:ph type="sldImg" idx="2"/>
+          </p:nvPr>
+        </p:nvSpPr>
+        <p:spPr/>
+      </p:sp>
+      <p:sp>
+        <p:nvSpPr>
+          <p:cNvPr id="3" name="Notes Placeholder 2"/>
+          <p:cNvSpPr>
+            <a:spLocks noGrp="1"/>
+          </p:cNvSpPr>
+          <p:nvPr>
+            <p:ph type="body" idx="3" sz="quarter"/>
+          </p:nvPr>
+        </p:nvSpPr>
+        <p:spPr/>
+        <p:txBody>
+          <a:bodyPr/>
+          <a:lstStyle/>
+          <a:p>
+            <a:r>
+              <a:t>Teach testing as confirming the OBSERVABLE OUTCOME, not trusting a status code. This is the discipline</a:t>
+            </a:r>
+          </a:p>
+          <a:p>
+            <a:r>
+              <a:t>that separates "it deployed" from "it works."</a:t>
+            </a:r>
+          </a:p>
+          <a:p>
+            <a:r>
+              <a:t>• First bullet: post sample events to the contract and confirm each is persisted EXACTLY ONCE in the</a:t>
+            </a:r>
+          </a:p>
+          <a:p>
+            <a:r>
+              <a:t>data store. Exactly-once matters — a duplicate is a bug even if nothing errored.</a:t>
+            </a:r>
+          </a:p>
+          <a:p>
+            <a:r>
+              <a:t>• Second bullet: also post an INVALID event and confirm it is rejected — prove the validation works,</a:t>
+            </a:r>
+          </a:p>
+          <a:p>
+            <a:r>
+              <a:t>not just the happy path. A service that accepts garbage is not done.</a:t>
+            </a:r>
+          </a:p>
+          <a:p>
+            <a:r>
+              <a:t>• Third bullet (the technique, KE 5): assert the observable outcome — the RECORD in the store — not</a:t>
+            </a:r>
+          </a:p>
+          <a:p>
+            <a:r>
+              <a:t>just a 200. A 200 says the API accepted it; only the record says the pipeline delivered it.</a:t>
+            </a:r>
+          </a:p>
+          <a:p>
+            <a:r>
+              <a:t>Misconception to pre-empt: "I got a 200, so it works." No — the 200 is the API gateway accepting the</a:t>
+            </a:r>
+          </a:p>
+          <a:p>
+            <a:r>
+              <a:t>event; the function runs asynchronously off the queue. Only the stored record proves end-to-end.</a:t>
+            </a:r>
+          </a:p>
+          <a:p>
+            <a:r>
+              <a:t>Question to pose: "You post an event and get a 200 but find no record in the store — where did it get</a:t>
+            </a:r>
+          </a:p>
+          <a:p>
+            <a:r>
+              <a:t>lost, and how would you know?" (somewhere queue→function→store; the record's absence is the signal —</a:t>
+            </a:r>
+          </a:p>
+          <a:p>
+            <a:r>
+              <a:t>leads into troubleshooting, C4).</a:t>
+            </a:r>
+          </a:p>
+          <a:p>
+            <a:r>
+              <a:t>UoC/AT2 tie: ICTCLD503 PC 3.3 + KE 5 (testing/debugging techniques) → AT2 §4.4 / §6 (D5).</a:t>
+            </a:r>
+          </a:p>
+        </p:txBody>
+      </p:sp>
+      <p:sp>
+        <p:nvSpPr>
+          <p:cNvPr id="4" name="Slide Number Placeholder 3"/>
+          <p:cNvSpPr>
+            <a:spLocks noGrp="1"/>
+          </p:cNvSpPr>
+          <p:nvPr>
+            <p:ph type="sldNum" idx="5" sz="quarter"/>
+          </p:nvPr>
+        </p:nvSpPr>
+        <p:spPr/>
+      </p:sp>
+    </p:spTree>
+  </p:cSld>
+  <p:clrMapOvr>
+    <a:masterClrMapping/>
+  </p:clrMapOvr>
+</p:notes>
+</file>
+
+<file path=ppt/notesSlides/notesSlide8.xml><?xml version="1.0" encoding="utf-8"?>
+<p:notes xmlns:a="http://schemas.openxmlformats.org/drawingml/2006/main" xmlns:p="http://schemas.openxmlformats.org/presentationml/2006/main" xmlns:r="http://schemas.openxmlformats.org/officeDocument/2006/relationships">
+  <p:cSld>
+    <p:spTree>
+      <p:nvGrpSpPr>
+        <p:cNvPr id="1" name=""/>
+        <p:cNvGrpSpPr/>
+        <p:nvPr/>
+      </p:nvGrpSpPr>
+      <p:grpSpPr>
+        <a:xfrm>
+          <a:off x="0" y="0"/>
+          <a:ext cx="0" cy="0"/>
+          <a:chOff x="0" y="0"/>
+          <a:chExt cx="0" cy="0"/>
+        </a:xfrm>
+      </p:grpSpPr>
+      <p:sp>
+        <p:nvSpPr>
+          <p:cNvPr id="2" name="Slide Image Placeholder 1"/>
+          <p:cNvSpPr>
+            <a:spLocks noGrp="1"/>
+          </p:cNvSpPr>
+          <p:nvPr>
+            <p:ph type="sldImg" idx="2"/>
+          </p:nvPr>
+        </p:nvSpPr>
+        <p:spPr/>
+      </p:sp>
+      <p:sp>
+        <p:nvSpPr>
+          <p:cNvPr id="3" name="Notes Placeholder 2"/>
+          <p:cNvSpPr>
+            <a:spLocks noGrp="1"/>
+          </p:cNvSpPr>
+          <p:nvPr>
+            <p:ph type="body" idx="3" sz="quarter"/>
+          </p:nvPr>
+        </p:nvSpPr>
+        <p:spPr/>
+        <p:txBody>
+          <a:bodyPr/>
+          <a:lstStyle/>
+          <a:p>
+            <a:r>
+              <a:t>LIVE DEMONSTRATION (educator-led — screen it live against your deployed microservice; no recorded</a:t>
+            </a:r>
+          </a:p>
+          <a:p>
+            <a:r>
+              <a:t>demo for this). Show both paths, then they replicate on the practice scenario.</a:t>
+            </a:r>
+          </a:p>
+          <a:p/>
+          <a:p>
+            <a:r>
+              <a:t>WHAT TO DEMONSTRATE (in the lab):</a:t>
+            </a:r>
+          </a:p>
+          <a:p>
+            <a:r>
+              <a:t>1. Post a VALID event to the contract → go to the store and find the item written (exactly once).</a:t>
+            </a:r>
+          </a:p>
+          <a:p>
+            <a:r>
+              <a:t>2. Post an INVALID event → confirm it is REJECTED and no bad record is written.</a:t>
+            </a:r>
+          </a:p>
+          <a:p>
+            <a:r>
+              <a:t>3. Show WHERE you look — the store item, not just the API response.</a:t>
+            </a:r>
+          </a:p>
+          <a:p/>
+          <a:p>
+            <a:r>
+              <a:t>WHAT TO EMPHASISE:</a:t>
+            </a:r>
+          </a:p>
+          <a:p>
+            <a:r>
+              <a:t>• The 200 is not the proof — walk from the API response THROUGH to the stored record every time.</a:t>
+            </a:r>
+          </a:p>
+          <a:p>
+            <a:r>
+              <a:t>• Show the exactly-once check: one post, one item (not zero, not two).</a:t>
+            </a:r>
+          </a:p>
+          <a:p>
+            <a:r>
+              <a:t>• Contrast the two paths side by side — valid persists, invalid is turned away — so students see the</a:t>
+            </a:r>
+          </a:p>
+          <a:p>
+            <a:r>
+              <a:t>validation is real.</a:t>
+            </a:r>
+          </a:p>
+          <a:p/>
+          <a:p>
+            <a:r>
+              <a:t>PREP: the microservice from the previous demo deployed and running; a valid and an invalid sample</a:t>
+            </a:r>
+          </a:p>
+          <a:p>
+            <a:r>
+              <a:t>event ready to post; the store open in another tab. ~6–8 min to screen before the activity.</a:t>
+            </a:r>
+          </a:p>
+        </p:txBody>
+      </p:sp>
+      <p:sp>
+        <p:nvSpPr>
+          <p:cNvPr id="4" name="Slide Number Placeholder 3"/>
+          <p:cNvSpPr>
+            <a:spLocks noGrp="1"/>
+          </p:cNvSpPr>
+          <p:nvPr>
+            <p:ph type="sldNum" idx="5" sz="quarter"/>
+          </p:nvPr>
+        </p:nvSpPr>
+        <p:spPr/>
+      </p:sp>
+    </p:spTree>
+  </p:cSld>
+  <p:clrMapOvr>
+    <a:masterClrMapping/>
+  </p:clrMapOvr>
+</p:notes>
+</file>
+
+<file path=ppt/notesSlides/notesSlide9.xml><?xml version="1.0" encoding="utf-8"?>
+<p:notes xmlns:a="http://schemas.openxmlformats.org/drawingml/2006/main" xmlns:p="http://schemas.openxmlformats.org/presentationml/2006/main" xmlns:r="http://schemas.openxmlformats.org/officeDocument/2006/relationships">
+  <p:cSld>
+    <p:spTree>
+      <p:nvGrpSpPr>
+        <p:cNvPr id="1" name=""/>
+        <p:cNvGrpSpPr/>
+        <p:nvPr/>
+      </p:nvGrpSpPr>
+      <p:grpSpPr>
+        <a:xfrm>
+          <a:off x="0" y="0"/>
+          <a:ext cx="0" cy="0"/>
+          <a:chOff x="0" y="0"/>
+          <a:chExt cx="0" cy="0"/>
+        </a:xfrm>
+      </p:grpSpPr>
+      <p:sp>
+        <p:nvSpPr>
+          <p:cNvPr id="2" name="Slide Image Placeholder 1"/>
+          <p:cNvSpPr>
+            <a:spLocks noGrp="1"/>
+          </p:cNvSpPr>
+          <p:nvPr>
+            <p:ph type="sldImg" idx="2"/>
+          </p:nvPr>
+        </p:nvSpPr>
+        <p:spPr/>
+      </p:sp>
+      <p:sp>
+        <p:nvSpPr>
+          <p:cNvPr id="3" name="Notes Placeholder 2"/>
+          <p:cNvSpPr>
+            <a:spLocks noGrp="1"/>
+          </p:cNvSpPr>
+          <p:nvPr>
+            <p:ph type="body" idx="3" sz="quarter"/>
+          </p:nvPr>
+        </p:nvSpPr>
+        <p:spPr/>
+        <p:txBody>
+          <a:bodyPr/>
+          <a:lstStyle/>
+          <a:p>
+            <a:r>
+              <a:t>Facilitation — the C3 practice; students test the pipeline they deployed in the C2 activity.</a:t>
+            </a:r>
+          </a:p>
+          <a:p>
+            <a:r>
+              <a:t>Tell students, in these words: "On the practice scenario, post sample events and confirm each is</a:t>
+            </a:r>
+          </a:p>
+          <a:p>
+            <a:r>
+              <a:t>recorded exactly once in the store; then post an invalid event and confirm it is rejected."</a:t>
+            </a:r>
+          </a:p>
+          <a:p>
+            <a:r>
+              <a:t>Steps (put on the board):</a:t>
+            </a:r>
+          </a:p>
+          <a:p>
+            <a:r>
+              <a:t>1. Post a valid event to the contract; find the item in the store — confirm exactly one record.</a:t>
+            </a:r>
+          </a:p>
+          <a:p>
+            <a:r>
+              <a:t>2. Repeat with a second valid event; confirm a second distinct record (no duplicates, no misses).</a:t>
+            </a:r>
+          </a:p>
+          <a:p>
+            <a:r>
+              <a:t>3. Post an invalid event; confirm it is rejected and no record is written.</a:t>
+            </a:r>
+          </a:p>
+          <a:p>
+            <a:r>
+              <a:t>Must produce: evidence that valid events persist exactly once and invalid events are rejected — the</a:t>
+            </a:r>
+          </a:p>
+          <a:p>
+            <a:r>
+              <a:t>functional-test result for their pipeline.</a:t>
+            </a:r>
+          </a:p>
+          <a:p>
+            <a:r>
+              <a:t>Timing: ~20 min. Where they get stuck: they check the 200 and stop — push them to open the store and</a:t>
+            </a:r>
+          </a:p>
+          <a:p>
+            <a:r>
+              <a:t>verify the RECORD; and a "missing" record that's actually a wiring fault, which sets up C4.</a:t>
+            </a:r>
+          </a:p>
+          <a:p>
+            <a:r>
+              <a:t>Share-back prompt: "Who had an event that returned 200 but never reached the store?" — surface it as</a:t>
+            </a:r>
+          </a:p>
+          <a:p>
+            <a:r>
+              <a:t>the bridge into troubleshooting.</a:t>
+            </a:r>
+          </a:p>
+          <a:p>
+            <a:r>
+              <a:t>No-leakage note: the practice scenario is comparable-not-identical to the AT2 build; keep them on the</a:t>
+            </a:r>
+          </a:p>
+          <a:p>
+            <a:r>
+              <a:t>practice microservice here.</a:t>
+            </a:r>
+          </a:p>
+        </p:txBody>
+      </p:sp>
+      <p:sp>
+        <p:nvSpPr>
+          <p:cNvPr id="4" name="Slide Number Placeholder 3"/>
+          <p:cNvSpPr>
+            <a:spLocks noGrp="1"/>
+          </p:cNvSpPr>
+          <p:nvPr>
+            <p:ph type="sldNum" idx="5" sz="quarter"/>
+          </p:nvPr>
+        </p:nvSpPr>
+        <p:spPr/>
+      </p:sp>
+    </p:spTree>
+  </p:cSld>
+  <p:clrMapOvr>
+    <a:masterClrMapping/>
+  </p:clrMapOvr>
+</p:notes>
 </file>
 
 <file path=ppt/slideLayouts/slideLayout1.xml><?xml version="1.0" encoding="utf-8"?>
@@ -9918,4 +11814,324 @@
   </a:objectDefaults>
   <a:extraClrSchemeLst/>
 </a:theme>
+</file>
+
+<file path=ppt/theme/theme2.xml><?xml version="1.0" encoding="utf-8"?>
+<a:theme xmlns:a="http://schemas.openxmlformats.org/drawingml/2006/main" name="Office Theme">
+  <a:themeElements>
+    <a:clrScheme name="Office">
+      <a:dk1>
+        <a:sysClr val="windowText" lastClr="000000"/>
+      </a:dk1>
+      <a:lt1>
+        <a:sysClr val="window" lastClr="FFFFFF"/>
+      </a:lt1>
+      <a:dk2>
+        <a:srgbClr val="1F497D"/>
+      </a:dk2>
+      <a:lt2>
+        <a:srgbClr val="EEECE1"/>
+      </a:lt2>
+      <a:accent1>
+        <a:srgbClr val="4F81BD"/>
+      </a:accent1>
+      <a:accent2>
+        <a:srgbClr val="C0504D"/>
+      </a:accent2>
+      <a:accent3>
+        <a:srgbClr val="9BBB59"/>
+      </a:accent3>
+      <a:accent4>
+        <a:srgbClr val="8064A2"/>
+      </a:accent4>
+      <a:accent5>
+        <a:srgbClr val="4BACC6"/>
+      </a:accent5>
+      <a:accent6>
+        <a:srgbClr val="F79646"/>
+      </a:accent6>
+      <a:hlink>
+        <a:srgbClr val="0000FF"/>
+      </a:hlink>
+      <a:folHlink>
+        <a:srgbClr val="800080"/>
+      </a:folHlink>
+    </a:clrScheme>
+    <a:fontScheme name="Office">
+      <a:majorFont>
+        <a:latin typeface="Calibri"/>
+        <a:ea typeface=""/>
+        <a:cs typeface=""/>
+        <a:font script="Jpan" typeface="ＭＳ Ｐゴシック"/>
+        <a:font script="Hang" typeface="맑은 고딕"/>
+        <a:font script="Hans" typeface="宋体"/>
+        <a:font script="Hant" typeface="新細明體"/>
+        <a:font script="Arab" typeface="Times New Roman"/>
+        <a:font script="Hebr" typeface="Times New Roman"/>
+        <a:font script="Thai" typeface="Angsana New"/>
+        <a:font script="Ethi" typeface="Nyala"/>
+        <a:font script="Beng" typeface="Vrinda"/>
+        <a:font script="Gujr" typeface="Shruti"/>
+        <a:font script="Khmr" typeface="MoolBoran"/>
+        <a:font script="Knda" typeface="Tunga"/>
+        <a:font script="Guru" typeface="Raavi"/>
+        <a:font script="Cans" typeface="Euphemia"/>
+        <a:font script="Cher" typeface="Plantagenet Cherokee"/>
+        <a:font script="Yiii" typeface="Microsoft Yi Baiti"/>
+        <a:font script="Tibt" typeface="Microsoft Himalaya"/>
+        <a:font script="Thaa" typeface="MV Boli"/>
+        <a:font script="Deva" typeface="Mangal"/>
+        <a:font script="Telu" typeface="Gautami"/>
+        <a:font script="Taml" typeface="Latha"/>
+        <a:font script="Syrc" typeface="Estrangelo Edessa"/>
+        <a:font script="Orya" typeface="Kalinga"/>
+        <a:font script="Mlym" typeface="Kartika"/>
+        <a:font script="Laoo" typeface="DokChampa"/>
+        <a:font script="Sinh" typeface="Iskoola Pota"/>
+        <a:font script="Mong" typeface="Mongolian Baiti"/>
+        <a:font script="Viet" typeface="Times New Roman"/>
+        <a:font script="Uigh" typeface="Microsoft Uighur"/>
+        <a:font script="Geor" typeface="Sylfaen"/>
+      </a:majorFont>
+      <a:minorFont>
+        <a:latin typeface="Calibri"/>
+        <a:ea typeface=""/>
+        <a:cs typeface=""/>
+        <a:font script="Jpan" typeface="ＭＳ Ｐゴシック"/>
+        <a:font script="Hang" typeface="맑은 고딕"/>
+        <a:font script="Hans" typeface="宋体"/>
+        <a:font script="Hant" typeface="新細明體"/>
+        <a:font script="Arab" typeface="Arial"/>
+        <a:font script="Hebr" typeface="Arial"/>
+        <a:font script="Thai" typeface="Cordia New"/>
+        <a:font script="Ethi" typeface="Nyala"/>
+        <a:font script="Beng" typeface="Vrinda"/>
+        <a:font script="Gujr" typeface="Shruti"/>
+        <a:font script="Khmr" typeface="DaunPenh"/>
+        <a:font script="Knda" typeface="Tunga"/>
+        <a:font script="Guru" typeface="Raavi"/>
+        <a:font script="Cans" typeface="Euphemia"/>
+        <a:font script="Cher" typeface="Plantagenet Cherokee"/>
+        <a:font script="Yiii" typeface="Microsoft Yi Baiti"/>
+        <a:font script="Tibt" typeface="Microsoft Himalaya"/>
+        <a:font script="Thaa" typeface="MV Boli"/>
+        <a:font script="Deva" typeface="Mangal"/>
+        <a:font script="Telu" typeface="Gautami"/>
+        <a:font script="Taml" typeface="Latha"/>
+        <a:font script="Syrc" typeface="Estrangelo Edessa"/>
+        <a:font script="Orya" typeface="Kalinga"/>
+        <a:font script="Mlym" typeface="Kartika"/>
+        <a:font script="Laoo" typeface="DokChampa"/>
+        <a:font script="Sinh" typeface="Iskoola Pota"/>
+        <a:font script="Mong" typeface="Mongolian Baiti"/>
+        <a:font script="Viet" typeface="Arial"/>
+        <a:font script="Uigh" typeface="Microsoft Uighur"/>
+        <a:font script="Geor" typeface="Sylfaen"/>
+      </a:minorFont>
+    </a:fontScheme>
+    <a:fmtScheme name="Office">
+      <a:fillStyleLst>
+        <a:solidFill>
+          <a:schemeClr val="phClr"/>
+        </a:solidFill>
+        <a:gradFill rotWithShape="1">
+          <a:gsLst>
+            <a:gs pos="0">
+              <a:schemeClr val="phClr">
+                <a:tint val="50000"/>
+                <a:satMod val="300000"/>
+              </a:schemeClr>
+            </a:gs>
+            <a:gs pos="35000">
+              <a:schemeClr val="phClr">
+                <a:tint val="37000"/>
+                <a:satMod val="300000"/>
+              </a:schemeClr>
+            </a:gs>
+            <a:gs pos="100000">
+              <a:schemeClr val="phClr">
+                <a:tint val="15000"/>
+                <a:satMod val="350000"/>
+              </a:schemeClr>
+            </a:gs>
+          </a:gsLst>
+          <a:lin ang="16200000" scaled="1"/>
+        </a:gradFill>
+        <a:gradFill rotWithShape="1">
+          <a:gsLst>
+            <a:gs pos="0">
+              <a:schemeClr val="phClr">
+                <a:tint val="100000"/>
+                <a:shade val="100000"/>
+                <a:satMod val="130000"/>
+              </a:schemeClr>
+            </a:gs>
+            <a:gs pos="100000">
+              <a:schemeClr val="phClr">
+                <a:tint val="50000"/>
+                <a:shade val="100000"/>
+                <a:satMod val="350000"/>
+              </a:schemeClr>
+            </a:gs>
+          </a:gsLst>
+          <a:lin ang="16200000" scaled="0"/>
+        </a:gradFill>
+      </a:fillStyleLst>
+      <a:lnStyleLst>
+        <a:ln w="9525" cap="flat" cmpd="sng" algn="ctr">
+          <a:solidFill>
+            <a:schemeClr val="phClr">
+              <a:shade val="95000"/>
+              <a:satMod val="105000"/>
+            </a:schemeClr>
+          </a:solidFill>
+          <a:prstDash val="solid"/>
+        </a:ln>
+        <a:ln w="25400" cap="flat" cmpd="sng" algn="ctr">
+          <a:solidFill>
+            <a:schemeClr val="phClr"/>
+          </a:solidFill>
+          <a:prstDash val="solid"/>
+        </a:ln>
+        <a:ln w="38100" cap="flat" cmpd="sng" algn="ctr">
+          <a:solidFill>
+            <a:schemeClr val="phClr"/>
+          </a:solidFill>
+          <a:prstDash val="solid"/>
+        </a:ln>
+      </a:lnStyleLst>
+      <a:effectStyleLst>
+        <a:effectStyle>
+          <a:effectLst>
+            <a:outerShdw blurRad="40000" dist="20000" dir="5400000" rotWithShape="0">
+              <a:srgbClr val="000000">
+                <a:alpha val="38000"/>
+              </a:srgbClr>
+            </a:outerShdw>
+          </a:effectLst>
+        </a:effectStyle>
+        <a:effectStyle>
+          <a:effectLst>
+            <a:outerShdw blurRad="40000" dist="23000" dir="5400000" rotWithShape="0">
+              <a:srgbClr val="000000">
+                <a:alpha val="35000"/>
+              </a:srgbClr>
+            </a:outerShdw>
+          </a:effectLst>
+        </a:effectStyle>
+        <a:effectStyle>
+          <a:effectLst>
+            <a:outerShdw blurRad="40000" dist="23000" dir="5400000" rotWithShape="0">
+              <a:srgbClr val="000000">
+                <a:alpha val="35000"/>
+              </a:srgbClr>
+            </a:outerShdw>
+          </a:effectLst>
+          <a:scene3d>
+            <a:camera prst="orthographicFront">
+              <a:rot lat="0" lon="0" rev="0"/>
+            </a:camera>
+            <a:lightRig rig="threePt" dir="t">
+              <a:rot lat="0" lon="0" rev="1200000"/>
+            </a:lightRig>
+          </a:scene3d>
+          <a:sp3d>
+            <a:bevelT w="63500" h="25400"/>
+          </a:sp3d>
+        </a:effectStyle>
+      </a:effectStyleLst>
+      <a:bgFillStyleLst>
+        <a:solidFill>
+          <a:schemeClr val="phClr"/>
+        </a:solidFill>
+        <a:gradFill rotWithShape="1">
+          <a:gsLst>
+            <a:gs pos="0">
+              <a:schemeClr val="phClr">
+                <a:tint val="40000"/>
+                <a:satMod val="350000"/>
+              </a:schemeClr>
+            </a:gs>
+            <a:gs pos="40000">
+              <a:schemeClr val="phClr">
+                <a:tint val="45000"/>
+                <a:shade val="99000"/>
+                <a:satMod val="350000"/>
+              </a:schemeClr>
+            </a:gs>
+            <a:gs pos="100000">
+              <a:schemeClr val="phClr">
+                <a:shade val="20000"/>
+                <a:satMod val="255000"/>
+              </a:schemeClr>
+            </a:gs>
+          </a:gsLst>
+          <a:path path="circle">
+            <a:fillToRect l="50000" t="-80000" r="50000" b="180000"/>
+          </a:path>
+        </a:gradFill>
+        <a:gradFill rotWithShape="1">
+          <a:gsLst>
+            <a:gs pos="0">
+              <a:schemeClr val="phClr">
+                <a:tint val="80000"/>
+                <a:satMod val="300000"/>
+              </a:schemeClr>
+            </a:gs>
+            <a:gs pos="100000">
+              <a:schemeClr val="phClr">
+                <a:shade val="30000"/>
+                <a:satMod val="200000"/>
+              </a:schemeClr>
+            </a:gs>
+          </a:gsLst>
+          <a:path path="circle">
+            <a:fillToRect l="50000" t="50000" r="50000" b="50000"/>
+          </a:path>
+        </a:gradFill>
+      </a:bgFillStyleLst>
+    </a:fmtScheme>
+  </a:themeElements>
+  <a:objectDefaults>
+    <a:spDef>
+      <a:spPr/>
+      <a:bodyPr/>
+      <a:lstStyle/>
+      <a:style>
+        <a:lnRef idx="1">
+          <a:schemeClr val="accent1"/>
+        </a:lnRef>
+        <a:fillRef idx="3">
+          <a:schemeClr val="accent1"/>
+        </a:fillRef>
+        <a:effectRef idx="2">
+          <a:schemeClr val="accent1"/>
+        </a:effectRef>
+        <a:fontRef idx="minor">
+          <a:schemeClr val="lt1"/>
+        </a:fontRef>
+      </a:style>
+    </a:spDef>
+    <a:lnDef>
+      <a:spPr/>
+      <a:bodyPr/>
+      <a:lstStyle/>
+      <a:style>
+        <a:lnRef idx="2">
+          <a:schemeClr val="accent1"/>
+        </a:lnRef>
+        <a:fillRef idx="0">
+          <a:schemeClr val="accent1"/>
+        </a:fillRef>
+        <a:effectRef idx="1">
+          <a:schemeClr val="accent1"/>
+        </a:effectRef>
+        <a:fontRef idx="minor">
+          <a:schemeClr val="tx1"/>
+        </a:fontRef>
+      </a:style>
+    </a:lnDef>
+  </a:objectDefaults>
+  <a:extraClrSchemeLst/>
+</a:theme>
 </file>
--- a/S1-CL2-Cloud-Disaster-Recovery/delivery/topic_08/Topic_08_Slides.pptx
+++ b/S1-CL2-Cloud-Disaster-Recovery/delivery/topic_08/Topic_08_Slides.pptx
@@ -8042,7 +8042,7 @@
                 </a:solidFill>
                 <a:latin typeface="Roboto"/>
               </a:rPr>
-              <a:t>Wire API → queue (event source) → function → store; `LabRole` is the execution role.</a:t>
+              <a:t>Wire API → queue (event source) → function → store; LabRole is the execution role.</a:t>
             </a:r>
           </a:p>
         </p:txBody>
@@ -8784,7 +8784,7 @@
                 </a:solidFill>
                 <a:latin typeface="Roboto"/>
               </a:rPr>
-              <a:t>The design places the store in India (ap-south-1); in the lab you deploy to us-east-1 — `[scenario: ap-south-1 (India) | deploy: us-east-1]`.</a:t>
+              <a:t>The design places the store in India (ap-south-1); in the lab you deploy to us-east-1 — [scenario: ap-south-1 (India) | deploy: us-east-1].</a:t>
             </a:r>
           </a:p>
           <a:p>
@@ -8815,7 +8815,7 @@
                 </a:solidFill>
                 <a:latin typeface="Roboto"/>
               </a:rPr>
-              <a:t>The lab's `LabRole` serves as both the function's execution role and the API-GW→queue credentials.</a:t>
+              <a:t>The lab's LabRole serves as both the function's execution role and the API-GW→queue credentials.</a:t>
             </a:r>
           </a:p>
         </p:txBody>
@@ -10418,7 +10418,7 @@
                 </a:solidFill>
                 <a:latin typeface="Roboto"/>
               </a:rPr>
-              <a:t>Pass `LabRole` as the execution role; wire the API → queue → function → store.</a:t>
+              <a:t>Pass LabRole as the execution role; wire the API → queue → function → store.</a:t>
             </a:r>
           </a:p>
           <a:p>

--- a/S1-CL2-Cloud-Disaster-Recovery/delivery/topic_08/Topic_08_Slides.pptx
+++ b/S1-CL2-Cloud-Disaster-Recovery/delivery/topic_08/Topic_08_Slides.pptx
@@ -17,12 +17,6 @@
     <p:sldId id="265" r:id="rId17"/>
     <p:sldId id="266" r:id="rId18"/>
     <p:sldId id="267" r:id="rId19"/>
-    <p:sldId id="268" r:id="rId20"/>
-    <p:sldId id="269" r:id="rId21"/>
-    <p:sldId id="270" r:id="rId22"/>
-    <p:sldId id="271" r:id="rId23"/>
-    <p:sldId id="272" r:id="rId24"/>
-    <p:sldId id="273" r:id="rId25"/>
   </p:sldIdLst>
   <p:sldSz cx="12191695" cy="6858000" type="screen4x3"/>
   <p:notesSz cx="6858000" cy="9144000"/>
@@ -519,372 +513,12 @@
           <a:lstStyle/>
           <a:p>
             <a:r>
-              <a:t>Frame this Topic as the convergence point of AT2 — the strands from Topics 6–8 come together into</a:t>
-            </a:r>
-          </a:p>
-          <a:p>
-            <a:r>
-              <a:t>one deployed thing. Set the mode; don't teach the wiring yet.</a:t>
-            </a:r>
-          </a:p>
-          <a:p>
-            <a:r>
-              <a:t>• First bullet: name the three strands they already hold — their OWN template (Topic 7 skill), the</a:t>
-            </a:r>
-          </a:p>
-          <a:p>
-            <a:r>
-              <a:t>PROVIDED code, and the PROVIDED store (Topic 6). Today those three assemble into a running</a:t>
-            </a:r>
-          </a:p>
-          <a:p>
-            <a:r>
-              <a:t>microservice. Deployment is assembling parts they understand, not inventing.</a:t>
-            </a:r>
-          </a:p>
-          <a:p>
-            <a:r>
-              <a:t>• Second bullet: this realises the microservice they DESIGNED in AT1 (Topic 2) — API gateway → queue</a:t>
-            </a:r>
-          </a:p>
-          <a:p>
-            <a:r>
-              <a:t>→ function → NoSQL store. Point back to that design; today the paper design becomes real.</a:t>
-            </a:r>
-          </a:p>
-          <a:p>
-            <a:r>
-              <a:t>• Third bullet (the substitution): the design places the store in India (ap-south-1) for the</a:t>
-            </a:r>
-          </a:p>
-          <a:p>
-            <a:r>
-              <a:t>scenario's reasons; in the lab they deploy to us-east-1 — `[scenario: ap-south-1 (India) | deploy:</a:t>
-            </a:r>
-          </a:p>
-          <a:p>
-            <a:r>
-              <a:t>us-east-1]`. Say it out loud — same build, only the location label changes.</a:t>
-            </a:r>
-          </a:p>
-          <a:p>
-            <a:r>
-              <a:t>• Fourth bullet: in the Learner Lab the provided `LabRole` is BOTH the function's execution role and</a:t>
-            </a:r>
-          </a:p>
-          <a:p>
-            <a:r>
-              <a:t>the API-GW→queue credentials — they don't create roles, they pass LabRole. Flag it now so nobody</a:t>
-            </a:r>
-          </a:p>
-          <a:p>
-            <a:r>
-              <a:t>goes hunting for IAM to build.</a:t>
-            </a:r>
-          </a:p>
-          <a:p>
-            <a:r>
-              <a:t>Misconception to pre-empt: "deploying means writing the service." No — the code is supplied; their</a:t>
-            </a:r>
-          </a:p>
-          <a:p>
-            <a:r>
-              <a:t>job is to provision and wire it correctly. The skill is faithful assembly + confirming it works.</a:t>
-            </a:r>
-          </a:p>
-          <a:p>
-            <a:r>
-              <a:t>Question to pose: "You designed this pipeline in AT1 — name the four pieces in order and what passes</a:t>
-            </a:r>
-          </a:p>
-          <a:p>
-            <a:r>
-              <a:t>between them." (API gateway → queue → function → store; draws out the flow before they build it.)</a:t>
-            </a:r>
-          </a:p>
-          <a:p>
-            <a:r>
-              <a:t>UoC/AT2 tie: opens the ICTCLD503 build arc (PC 3.1–3.4); everything today is evidenced in AT2 §4.4 —</a:t>
-            </a:r>
-          </a:p>
-          <a:p>
-            <a:r>
-              <a:t>the deployed, tested microservice (criterion D4).</a:t>
-            </a:r>
-          </a:p>
-        </p:txBody>
-      </p:sp>
-      <p:sp>
-        <p:nvSpPr>
-          <p:cNvPr id="4" name="Slide Number Placeholder 3"/>
-          <p:cNvSpPr>
-            <a:spLocks noGrp="1"/>
-          </p:cNvSpPr>
-          <p:nvPr>
-            <p:ph type="sldNum" idx="5" sz="quarter"/>
-          </p:nvPr>
-        </p:nvSpPr>
-        <p:spPr/>
-      </p:sp>
-    </p:spTree>
-  </p:cSld>
-  <p:clrMapOvr>
-    <a:masterClrMapping/>
-  </p:clrMapOvr>
-</p:notes>
-</file>
-
-<file path=ppt/notesSlides/notesSlide10.xml><?xml version="1.0" encoding="utf-8"?>
-<p:notes xmlns:a="http://schemas.openxmlformats.org/drawingml/2006/main" xmlns:p="http://schemas.openxmlformats.org/presentationml/2006/main" xmlns:r="http://schemas.openxmlformats.org/officeDocument/2006/relationships">
-  <p:cSld>
-    <p:spTree>
-      <p:nvGrpSpPr>
-        <p:cNvPr id="1" name=""/>
-        <p:cNvGrpSpPr/>
-        <p:nvPr/>
-      </p:nvGrpSpPr>
-      <p:grpSpPr>
-        <a:xfrm>
-          <a:off x="0" y="0"/>
-          <a:ext cx="0" cy="0"/>
-          <a:chOff x="0" y="0"/>
-          <a:chExt cx="0" cy="0"/>
-        </a:xfrm>
-      </p:grpSpPr>
-      <p:sp>
-        <p:nvSpPr>
-          <p:cNvPr id="2" name="Slide Image Placeholder 1"/>
-          <p:cNvSpPr>
-            <a:spLocks noGrp="1"/>
-          </p:cNvSpPr>
-          <p:nvPr>
-            <p:ph type="sldImg" idx="2"/>
-          </p:nvPr>
-        </p:nvSpPr>
-        <p:spPr/>
-      </p:sp>
-      <p:sp>
-        <p:nvSpPr>
-          <p:cNvPr id="3" name="Notes Placeholder 2"/>
-          <p:cNvSpPr>
-            <a:spLocks noGrp="1"/>
-          </p:cNvSpPr>
-          <p:nvPr>
-            <p:ph type="body" idx="3" sz="quarter"/>
-          </p:nvPr>
-        </p:nvSpPr>
-        <p:spPr/>
-        <p:txBody>
-          <a:bodyPr/>
-          <a:lstStyle/>
-          <a:p>
-            <a:r>
-              <a:t>Teach troubleshooting as a log-driven procedure — the failure is recorded somewhere; the skill is</a:t>
-            </a:r>
-          </a:p>
-          <a:p>
-            <a:r>
-              <a:t>reading it, not guessing. Frame it as read → diagnose → fix → redeploy → re-test.</a:t>
-            </a:r>
-          </a:p>
-          <a:p>
-            <a:r>
-              <a:t>• First bullet: the faults they'll meet — a permission error, a payload-validation bug, a mis-wired</a:t>
-            </a:r>
-          </a:p>
-          <a:p>
-            <a:r>
-              <a:t>event source. Name the categories so they know the shape of what they're hunting.</a:t>
-            </a:r>
-          </a:p>
-          <a:p>
-            <a:r>
-              <a:t>• Second bullet (the technique): read the FUNCTION LOGS and the queue/dead-letter behaviour — the</a:t>
-            </a:r>
-          </a:p>
-          <a:p>
-            <a:r>
-              <a:t>failure is recorded, find it (KE 5). A message stuck on a dead-letter queue is telling you something.</a:t>
-            </a:r>
-          </a:p>
-          <a:p>
-            <a:r>
-              <a:t>• Third bullet: fix, redeploy, re-test — confirm the record now writes. The loop isn't done until the</a:t>
-            </a:r>
-          </a:p>
-          <a:p>
-            <a:r>
-              <a:t>observable outcome is restored (ties back to C3's testing discipline).</a:t>
-            </a:r>
-          </a:p>
-          <a:p>
-            <a:r>
-              <a:t>Misconception to pre-empt: "if it didn't work I'll just redeploy and hope." No — read the log first;</a:t>
-            </a:r>
-          </a:p>
-          <a:p>
-            <a:r>
-              <a:t>blind redeploys fix nothing and burn the lab clock. The log names the cause.</a:t>
-            </a:r>
-          </a:p>
-          <a:p>
-            <a:r>
-              <a:t>Question to pose: "The function runs but nothing lands in the store, and the logs show access-denied —</a:t>
-            </a:r>
-          </a:p>
-          <a:p>
-            <a:r>
-              <a:t>what's the likely cause?" (a permissions/wiring issue — LabRole or the event-source mapping; reason</a:t>
-            </a:r>
-          </a:p>
-          <a:p>
-            <a:r>
-              <a:t>from the log to the fix).</a:t>
-            </a:r>
-          </a:p>
-          <a:p>
-            <a:r>
-              <a:t>UoC/AT2 tie: ICTCLD503 PC 3.4 (troubleshoot and fix errors) + KE 5 → AT2 §6 troubleshooting log (D9).</a:t>
-            </a:r>
-          </a:p>
-        </p:txBody>
-      </p:sp>
-      <p:sp>
-        <p:nvSpPr>
-          <p:cNvPr id="4" name="Slide Number Placeholder 3"/>
-          <p:cNvSpPr>
-            <a:spLocks noGrp="1"/>
-          </p:cNvSpPr>
-          <p:nvPr>
-            <p:ph type="sldNum" idx="5" sz="quarter"/>
-          </p:nvPr>
-        </p:nvSpPr>
-        <p:spPr/>
-      </p:sp>
-    </p:spTree>
-  </p:cSld>
-  <p:clrMapOvr>
-    <a:masterClrMapping/>
-  </p:clrMapOvr>
-</p:notes>
-</file>
-
-<file path=ppt/notesSlides/notesSlide11.xml><?xml version="1.0" encoding="utf-8"?>
-<p:notes xmlns:a="http://schemas.openxmlformats.org/drawingml/2006/main" xmlns:p="http://schemas.openxmlformats.org/presentationml/2006/main" xmlns:r="http://schemas.openxmlformats.org/officeDocument/2006/relationships">
-  <p:cSld>
-    <p:spTree>
-      <p:nvGrpSpPr>
-        <p:cNvPr id="1" name=""/>
-        <p:cNvGrpSpPr/>
-        <p:nvPr/>
-      </p:nvGrpSpPr>
-      <p:grpSpPr>
-        <a:xfrm>
-          <a:off x="0" y="0"/>
-          <a:ext cx="0" cy="0"/>
-          <a:chOff x="0" y="0"/>
-          <a:chExt cx="0" cy="0"/>
-        </a:xfrm>
-      </p:grpSpPr>
-      <p:sp>
-        <p:nvSpPr>
-          <p:cNvPr id="2" name="Slide Image Placeholder 1"/>
-          <p:cNvSpPr>
-            <a:spLocks noGrp="1"/>
-          </p:cNvSpPr>
-          <p:nvPr>
-            <p:ph type="sldImg" idx="2"/>
-          </p:nvPr>
-        </p:nvSpPr>
-        <p:spPr/>
-      </p:sp>
-      <p:sp>
-        <p:nvSpPr>
-          <p:cNvPr id="3" name="Notes Placeholder 2"/>
-          <p:cNvSpPr>
-            <a:spLocks noGrp="1"/>
-          </p:cNvSpPr>
-          <p:nvPr>
-            <p:ph type="body" idx="3" sz="quarter"/>
-          </p:nvPr>
-        </p:nvSpPr>
-        <p:spPr/>
-        <p:txBody>
-          <a:bodyPr/>
-          <a:lstStyle/>
-          <a:p>
-            <a:r>
-              <a:t>Facilitation — the C4 practice; students diagnose a SEEDED fault, so everyone practises reading logs</a:t>
-            </a:r>
-          </a:p>
-          <a:p>
-            <a:r>
-              <a:t>(not just those who happened to break something).</a:t>
-            </a:r>
-          </a:p>
-          <a:p>
-            <a:r>
-              <a:t>Tell students, in these words: "On the practice scenario, a fault has been introduced. Diagnose it</a:t>
-            </a:r>
-          </a:p>
-          <a:p>
-            <a:r>
-              <a:t>from the logs, fix it, redeploy, and confirm the event records."</a:t>
-            </a:r>
-          </a:p>
-          <a:p>
-            <a:r>
-              <a:t>Steps (put on the board):</a:t>
-            </a:r>
-          </a:p>
-          <a:p>
-            <a:r>
-              <a:t>1. Post an event — observe that no record is written (or an error surfaces).</a:t>
-            </a:r>
-          </a:p>
-          <a:p>
-            <a:r>
-              <a:t>2. Read the function logs and the queue/dead-letter behaviour — find where and why it fails.</a:t>
-            </a:r>
-          </a:p>
-          <a:p>
-            <a:r>
-              <a:t>3. Fix the cause, redeploy, and re-test — confirm the record now writes.</a:t>
-            </a:r>
-          </a:p>
-          <a:p>
-            <a:r>
-              <a:t>Must produce: a short diagnosis (what the log showed, what the cause was, what you changed) plus a</a:t>
-            </a:r>
-          </a:p>
-          <a:p>
-            <a:r>
-              <a:t>passing re-test — this is the troubleshooting-log evidence AT2 wants.</a:t>
-            </a:r>
-          </a:p>
-          <a:p>
-            <a:r>
-              <a:t>Timing: ~20 min. Where they get stuck: they try to fix before reading the log — hold them at the log</a:t>
-            </a:r>
-          </a:p>
-          <a:p>
-            <a:r>
-              <a:t>until they can NAME the cause; and they fix but forget to redeploy before re-testing.</a:t>
-            </a:r>
-          </a:p>
-          <a:p>
-            <a:r>
-              <a:t>Share-back prompt: take one seeded fault and have a student walk log → cause → fix out loud.</a:t>
-            </a:r>
-          </a:p>
-          <a:p>
-            <a:r>
-              <a:t>No-leakage note: the practice scenario is comparable-not-identical to the AT2 build; keep them on the</a:t>
-            </a:r>
-          </a:p>
-          <a:p>
-            <a:r>
-              <a:t>practice microservice here.</a:t>
+              <a:t>The pivot from "it runs" to "you can see it running" — workbook task 19.</a:t>
+            </a:r>
+          </a:p>
+          <a:p>
+            <a:r>
+              <a:t>Tie back to Topic 4's detection step: a system you can't observe can't meet its own recovery objectives.</a:t>
             </a:r>
           </a:p>
         </p:txBody>
@@ -954,72 +588,12 @@
           <a:lstStyle/>
           <a:p>
             <a:r>
-              <a:t>Teach the discipline that must come BEFORE any console work — review the design and the supplied</a:t>
-            </a:r>
-          </a:p>
-          <a:p>
-            <a:r>
-              <a:t>code so deployment is informed assembly. Short slide, firm point.</a:t>
-            </a:r>
-          </a:p>
-          <a:p>
-            <a:r>
-              <a:t>• First bullet: review the microservice design from AT1 — the services chosen, the flow, the contract</a:t>
-            </a:r>
-          </a:p>
-          <a:p>
-            <a:r>
-              <a:t>the webhook implements. They wrote this design; make them re-read it as the build spec.</a:t>
-            </a:r>
-          </a:p>
-          <a:p>
-            <a:r>
-              <a:t>• Second bullet: review the SUPPLIED code components and the webhook contract they implement before</a:t>
-            </a:r>
-          </a:p>
-          <a:p>
-            <a:r>
-              <a:t>deploying. Know what each component expects (its event shape, its config) so you wire it right.</a:t>
-            </a:r>
-          </a:p>
-          <a:p>
-            <a:r>
-              <a:t>• Third bullet (the point): deployment is ASSEMBLING, not inventing. If they know what each piece does</a:t>
-            </a:r>
-          </a:p>
-          <a:p>
-            <a:r>
-              <a:t>and how it connects, the deploy is mechanical; if they skip the review, they wire it blind.</a:t>
-            </a:r>
-          </a:p>
-          <a:p>
-            <a:r>
-              <a:t>Misconception to pre-empt: "the code is given, so I can just deploy it and read it later." No —</a:t>
-            </a:r>
-          </a:p>
-          <a:p>
-            <a:r>
-              <a:t>deploying code you haven't read is how you get a mis-wired event source you can't diagnose. Read first.</a:t>
-            </a:r>
-          </a:p>
-          <a:p>
-            <a:r>
-              <a:t>Question to pose: "The function needs to know which table to write to — where does that come from, the</a:t>
-            </a:r>
-          </a:p>
-          <a:p>
-            <a:r>
-              <a:t>code or the deployment config?" (config — sets up the C2 wiring, and why review matters).</a:t>
-            </a:r>
-          </a:p>
-          <a:p>
-            <a:r>
-              <a:t>UoC/AT2 tie: ICTCLD503 PC 3.1 (review microservice design and code components) → AT2 §4.4 (D4); the</a:t>
-            </a:r>
-          </a:p>
-          <a:p>
-            <a:r>
-              <a:t>review is the first assessed step of the build.</a:t>
+              <a:t>Foundation slide. The art is choosing the few leading signals, not building a dashboard wall.</a:t>
+            </a:r>
+          </a:p>
+          <a:p>
+            <a:r>
+              <a:t>A useful metric moves before the failure — a rising queue, not a user complaint.</a:t>
             </a:r>
           </a:p>
         </p:txBody>
@@ -1089,77 +663,12 @@
           <a:lstStyle/>
           <a:p>
             <a:r>
-              <a:t>A vendor-neutral primer on how the pieces connect — teach the event-driven wiring pattern before the</a:t>
-            </a:r>
-          </a:p>
-          <a:p>
-            <a:r>
-              <a:t>AWS specifics. This is the mental model for the whole deploy.</a:t>
-            </a:r>
-          </a:p>
-          <a:p>
-            <a:r>
-              <a:t>• First bullet: the API route — the gateway receives the webhook and hands it on. It's the front door;</a:t>
-            </a:r>
-          </a:p>
-          <a:p>
-            <a:r>
-              <a:t>it doesn't process, it accepts and forwards.</a:t>
-            </a:r>
-          </a:p>
-          <a:p>
-            <a:r>
-              <a:t>• Second bullet (the key idea): the queue is the function's EVENT SOURCE — the function is triggered as</a:t>
-            </a:r>
-          </a:p>
-          <a:p>
-            <a:r>
-              <a:t>events arrive on the queue, not called directly. This decoupling is what makes it resilient and</a:t>
-            </a:r>
-          </a:p>
-          <a:p>
-            <a:r>
-              <a:t>scalable; stress it, because students expect a direct API→function call.</a:t>
-            </a:r>
-          </a:p>
-          <a:p>
-            <a:r>
-              <a:t>• Third bullet: the function writes to the provided store; the store's TABLE NAME is handed to the</a:t>
-            </a:r>
-          </a:p>
-          <a:p>
-            <a:r>
-              <a:t>function as config (not hard-coded). Connect back to C1's review point.</a:t>
-            </a:r>
-          </a:p>
-          <a:p>
-            <a:r>
-              <a:t>Misconception to pre-empt: "the API calls the function directly." No — the queue sits between them as</a:t>
-            </a:r>
-          </a:p>
-          <a:p>
-            <a:r>
-              <a:t>the event source; that buffer is deliberate (absorbs bursts, retries failures). Draw the four boxes.</a:t>
-            </a:r>
-          </a:p>
-          <a:p>
-            <a:r>
-              <a:t>Question to pose: "Why put a queue between the API and the function instead of calling the function</a:t>
-            </a:r>
-          </a:p>
-          <a:p>
-            <a:r>
-              <a:t>straight from the API?" (decouples producer from consumer; buffers bursts; enables retry/DLQ — the</a:t>
-            </a:r>
-          </a:p>
-          <a:p>
-            <a:r>
-              <a:t>scaling signal they'll monitor in Topic 9).</a:t>
-            </a:r>
-          </a:p>
-          <a:p>
-            <a:r>
-              <a:t>UoC/AT2 tie: ICTCLD503 PC 3.2 + PE 3 — the wiring model they must implement; evidenced in AT2 §4.4 (D4).</a:t>
+              <a:t>The primer made concrete for their pipeline. No server CPU to watch — the serverless signals differ from a VM's.</a:t>
+            </a:r>
+          </a:p>
+          <a:p>
+            <a:r>
+              <a:t>Queue depth is the headline: it predicts overload, which makes it the natural alarm candidate.</a:t>
             </a:r>
           </a:p>
         </p:txBody>
@@ -1229,72 +738,12 @@
           <a:lstStyle/>
           <a:p>
             <a:r>
-              <a:t>The concrete AWS deploy, off the wiring diagram — turn the primer's pattern into the actual services.</a:t>
-            </a:r>
-          </a:p>
-          <a:p>
-            <a:r>
-              <a:t>Walk it against the `microservice-deploy` diagram on screen.</a:t>
-            </a:r>
-          </a:p>
-          <a:p>
-            <a:r>
-              <a:t>• First bullet: deploy and configure the serverless services to implement the application FROM THE</a:t>
-            </a:r>
-          </a:p>
-          <a:p>
-            <a:r>
-              <a:t>PROVIDED CODE — API, queue, function, store, in the lab.</a:t>
-            </a:r>
-          </a:p>
-          <a:p>
-            <a:r>
-              <a:t>• Second bullet: pass `LabRole` as the execution role, and wire API → queue → function → store. This</a:t>
-            </a:r>
-          </a:p>
-          <a:p>
-            <a:r>
-              <a:t>is the Learner Lab substitution for building IAM roles — say it plainly so nobody builds a role.</a:t>
-            </a:r>
-          </a:p>
-          <a:p>
-            <a:r>
-              <a:t>• Third bullet: they may use the console, CLI or SDK to deploy and confirm (PE 4 — the tooling</a:t>
-            </a:r>
-          </a:p>
-          <a:p>
-            <a:r>
-              <a:t>evidence). Any of the three is fine; what's assessed is that it stands up and they can show it.</a:t>
-            </a:r>
-          </a:p>
-          <a:p>
-            <a:r>
-              <a:t>Misconception to pre-empt: "I need to create an execution role for the function." No — in the lab you</a:t>
-            </a:r>
-          </a:p>
-          <a:p>
-            <a:r>
-              <a:t>pass the provided `LabRole`; creating IAM is out of scope here and just costs them time.</a:t>
-            </a:r>
-          </a:p>
-          <a:p>
-            <a:r>
-              <a:t>Question to pose: "What's the ONE thing you must configure so the function fires when an event lands on</a:t>
-            </a:r>
-          </a:p>
-          <a:p>
-            <a:r>
-              <a:t>the queue?" (the event-source mapping between queue and function — the piece students forget).</a:t>
-            </a:r>
-          </a:p>
-          <a:p>
-            <a:r>
-              <a:t>UoC/AT2 tie: ICTCLD503 PC 3.2 + PE 3 (deploy/configure the services) + PE 4 (console/CLI/SDK) → AT2</a:t>
-            </a:r>
-          </a:p>
-          <a:p>
-            <a:r>
-              <a:t>§4.4 (D4); this is the core build step.</a:t>
+              <a:t>Workbook task 19's discipline: metric, threshold, notification — and the threshold defensible from the design.</a:t>
+            </a:r>
+          </a:p>
+          <a:p>
+            <a:r>
+              <a:t>Round numbers plucked from the air are the thing to challenge.</a:t>
             </a:r>
           </a:p>
         </p:txBody>
@@ -1364,80 +813,22 @@
           <a:lstStyle/>
           <a:p>
             <a:r>
-              <a:t>LIVE DEMONSTRATION (educator-led against the lab-pack — screen your own deploy of the course's</a:t>
-            </a:r>
-          </a:p>
-          <a:p>
-            <a:r>
-              <a:t>microservice; there is no recorded demo for this). Show it end to end, then they replicate on the</a:t>
-            </a:r>
-          </a:p>
-          <a:p>
-            <a:r>
-              <a:t>practice scenario next.</a:t>
-            </a:r>
-          </a:p>
-          <a:p/>
-          <a:p>
-            <a:r>
-              <a:t>WHAT TO DEMONSTRATE (step by step, in the lab, us-east-1):</a:t>
-            </a:r>
-          </a:p>
-          <a:p>
-            <a:r>
-              <a:t>1. Deploy the API, queue and function from the SUPPLIED code — provision the resources.</a:t>
-            </a:r>
-          </a:p>
-          <a:p>
-            <a:r>
-              <a:t>2. Pass `LabRole` as the execution role; do NOT create a role.</a:t>
-            </a:r>
-          </a:p>
-          <a:p>
-            <a:r>
-              <a:t>3. Wire the event-source mapping so the queue triggers the function; point it at the provided store.</a:t>
-            </a:r>
-          </a:p>
-          <a:p>
-            <a:r>
-              <a:t>4. Confirm each resource exists and the event-source mapping is enabled.</a:t>
-            </a:r>
-          </a:p>
-          <a:p/>
-          <a:p>
-            <a:r>
-              <a:t>WHAT TO EMPHASISE:</a:t>
-            </a:r>
-          </a:p>
-          <a:p>
-            <a:r>
-              <a:t>• Say the substitution out loud — `[scenario: ap-south-1 (India) | deploy: us-east-1]` — as you set</a:t>
-            </a:r>
-          </a:p>
-          <a:p>
-            <a:r>
-              <a:t>the Region.</a:t>
-            </a:r>
-          </a:p>
-          <a:p>
-            <a:r>
-              <a:t>• The event-source mapping is the make-or-break wiring step — show where it lives and that it's ON.</a:t>
-            </a:r>
-          </a:p>
-          <a:p>
-            <a:r>
-              <a:t>• This is assembling supplied parts, not writing code — narrate that mindset as you go.</a:t>
-            </a:r>
-          </a:p>
-          <a:p/>
-          <a:p>
-            <a:r>
-              <a:t>PREP: clean Learner Lab open with `LabRole` available; the supplied microservice code + template to</a:t>
-            </a:r>
-          </a:p>
-          <a:p>
-            <a:r>
-              <a:t>hand; the provided store already in place (Topic 6). ~8–10 min to screen + narrate before the activity.</a:t>
+              <a:t>Live demonstration, educator-led (screen it live — no recorded-demos catalogue in CL2).</a:t>
+            </a:r>
+          </a:p>
+          <a:p>
+            <a:r>
+              <a:t>Say where the threshold number comes from as you type it.</a:t>
+            </a:r>
+          </a:p>
+          <a:p>
+            <a:r>
+              <a:t>Show the full lifecycle: OK, alarm, notification, back to OK — a configured-but-never-fired alarm is untested.</a:t>
+            </a:r>
+          </a:p>
+          <a:p>
+            <a:r>
+              <a:t>Prep: the microservice running, a way to flood the queue, the notification target visible. ~8–10 min.</a:t>
             </a:r>
           </a:p>
         </p:txBody>
@@ -1507,495 +898,12 @@
           <a:lstStyle/>
           <a:p>
             <a:r>
-              <a:t>Facilitation — the C2 practice; students deploy the practice microservice they just watched demoed.</a:t>
-            </a:r>
-          </a:p>
-          <a:p>
-            <a:r>
-              <a:t>Tell students, in these words: "On the practice scenario, deploy the practice microservice from the</a:t>
-            </a:r>
-          </a:p>
-          <a:p>
-            <a:r>
-              <a:t>supplied code and wire it to the practice store. Deploy to us-east-1, pass `LabRole`, and confirm the</a:t>
-            </a:r>
-          </a:p>
-          <a:p>
-            <a:r>
-              <a:t>pipeline stands up."</a:t>
-            </a:r>
-          </a:p>
-          <a:p>
-            <a:r>
-              <a:t>Steps (put on the board):</a:t>
-            </a:r>
-          </a:p>
-          <a:p>
-            <a:r>
-              <a:t>1. Deploy the API, queue and function from the supplied practice code.</a:t>
-            </a:r>
-          </a:p>
-          <a:p>
-            <a:r>
-              <a:t>2. Pass `LabRole` as the execution role; configure the event-source mapping (queue → function).</a:t>
-            </a:r>
-          </a:p>
-          <a:p>
-            <a:r>
-              <a:t>3. Point the function at the practice store (its table name as config).</a:t>
-            </a:r>
-          </a:p>
-          <a:p>
-            <a:r>
-              <a:t>4. Confirm each resource, and that the event-source mapping is enabled.</a:t>
-            </a:r>
-          </a:p>
-          <a:p>
-            <a:r>
-              <a:t>Must produce: a stood-up pipeline in us-east-1 — API, queue, function and store all present and wired,</a:t>
-            </a:r>
-          </a:p>
-          <a:p>
-            <a:r>
-              <a:t>ready to test in the next activity.</a:t>
-            </a:r>
-          </a:p>
-          <a:p>
-            <a:r>
-              <a:t>Timing: ~30 min. Where they get stuck: the event-source mapping (a deployed function that never fires</a:t>
-            </a:r>
-          </a:p>
-          <a:p>
-            <a:r>
-              <a:t>because nothing triggers it) and hunting for an IAM role instead of passing `LabRole` — circulate and</a:t>
-            </a:r>
-          </a:p>
-          <a:p>
-            <a:r>
-              <a:t>check both.</a:t>
-            </a:r>
-          </a:p>
-          <a:p>
-            <a:r>
-              <a:t>Share-back prompt: ask one student to show their event-source mapping is enabled and points queue → function.</a:t>
-            </a:r>
-          </a:p>
-          <a:p>
-            <a:r>
-              <a:t>No-leakage note: the practice scenario is comparable-not-identical to the AT2 build — the assessed</a:t>
-            </a:r>
-          </a:p>
-          <a:p>
-            <a:r>
-              <a:t>microservice is a different one. Keep them on the practice artefacts here.</a:t>
-            </a:r>
-          </a:p>
-        </p:txBody>
-      </p:sp>
-      <p:sp>
-        <p:nvSpPr>
-          <p:cNvPr id="4" name="Slide Number Placeholder 3"/>
-          <p:cNvSpPr>
-            <a:spLocks noGrp="1"/>
-          </p:cNvSpPr>
-          <p:nvPr>
-            <p:ph type="sldNum" idx="5" sz="quarter"/>
-          </p:nvPr>
-        </p:nvSpPr>
-        <p:spPr/>
-      </p:sp>
-    </p:spTree>
-  </p:cSld>
-  <p:clrMapOvr>
-    <a:masterClrMapping/>
-  </p:clrMapOvr>
-</p:notes>
-</file>
-
-<file path=ppt/notesSlides/notesSlide7.xml><?xml version="1.0" encoding="utf-8"?>
-<p:notes xmlns:a="http://schemas.openxmlformats.org/drawingml/2006/main" xmlns:p="http://schemas.openxmlformats.org/presentationml/2006/main" xmlns:r="http://schemas.openxmlformats.org/officeDocument/2006/relationships">
-  <p:cSld>
-    <p:spTree>
-      <p:nvGrpSpPr>
-        <p:cNvPr id="1" name=""/>
-        <p:cNvGrpSpPr/>
-        <p:nvPr/>
-      </p:nvGrpSpPr>
-      <p:grpSpPr>
-        <a:xfrm>
-          <a:off x="0" y="0"/>
-          <a:ext cx="0" cy="0"/>
-          <a:chOff x="0" y="0"/>
-          <a:chExt cx="0" cy="0"/>
-        </a:xfrm>
-      </p:grpSpPr>
-      <p:sp>
-        <p:nvSpPr>
-          <p:cNvPr id="2" name="Slide Image Placeholder 1"/>
-          <p:cNvSpPr>
-            <a:spLocks noGrp="1"/>
-          </p:cNvSpPr>
-          <p:nvPr>
-            <p:ph type="sldImg" idx="2"/>
-          </p:nvPr>
-        </p:nvSpPr>
-        <p:spPr/>
-      </p:sp>
-      <p:sp>
-        <p:nvSpPr>
-          <p:cNvPr id="3" name="Notes Placeholder 2"/>
-          <p:cNvSpPr>
-            <a:spLocks noGrp="1"/>
-          </p:cNvSpPr>
-          <p:nvPr>
-            <p:ph type="body" idx="3" sz="quarter"/>
-          </p:nvPr>
-        </p:nvSpPr>
-        <p:spPr/>
-        <p:txBody>
-          <a:bodyPr/>
-          <a:lstStyle/>
-          <a:p>
-            <a:r>
-              <a:t>Teach testing as confirming the OBSERVABLE OUTCOME, not trusting a status code. This is the discipline</a:t>
-            </a:r>
-          </a:p>
-          <a:p>
-            <a:r>
-              <a:t>that separates "it deployed" from "it works."</a:t>
-            </a:r>
-          </a:p>
-          <a:p>
-            <a:r>
-              <a:t>• First bullet: post sample events to the contract and confirm each is persisted EXACTLY ONCE in the</a:t>
-            </a:r>
-          </a:p>
-          <a:p>
-            <a:r>
-              <a:t>data store. Exactly-once matters — a duplicate is a bug even if nothing errored.</a:t>
-            </a:r>
-          </a:p>
-          <a:p>
-            <a:r>
-              <a:t>• Second bullet: also post an INVALID event and confirm it is rejected — prove the validation works,</a:t>
-            </a:r>
-          </a:p>
-          <a:p>
-            <a:r>
-              <a:t>not just the happy path. A service that accepts garbage is not done.</a:t>
-            </a:r>
-          </a:p>
-          <a:p>
-            <a:r>
-              <a:t>• Third bullet (the technique, KE 5): assert the observable outcome — the RECORD in the store — not</a:t>
-            </a:r>
-          </a:p>
-          <a:p>
-            <a:r>
-              <a:t>just a 200. A 200 says the API accepted it; only the record says the pipeline delivered it.</a:t>
-            </a:r>
-          </a:p>
-          <a:p>
-            <a:r>
-              <a:t>Misconception to pre-empt: "I got a 200, so it works." No — the 200 is the API gateway accepting the</a:t>
-            </a:r>
-          </a:p>
-          <a:p>
-            <a:r>
-              <a:t>event; the function runs asynchronously off the queue. Only the stored record proves end-to-end.</a:t>
-            </a:r>
-          </a:p>
-          <a:p>
-            <a:r>
-              <a:t>Question to pose: "You post an event and get a 200 but find no record in the store — where did it get</a:t>
-            </a:r>
-          </a:p>
-          <a:p>
-            <a:r>
-              <a:t>lost, and how would you know?" (somewhere queue→function→store; the record's absence is the signal —</a:t>
-            </a:r>
-          </a:p>
-          <a:p>
-            <a:r>
-              <a:t>leads into troubleshooting, C4).</a:t>
-            </a:r>
-          </a:p>
-          <a:p>
-            <a:r>
-              <a:t>UoC/AT2 tie: ICTCLD503 PC 3.3 + KE 5 (testing/debugging techniques) → AT2 §4.4 / §6 (D5).</a:t>
-            </a:r>
-          </a:p>
-        </p:txBody>
-      </p:sp>
-      <p:sp>
-        <p:nvSpPr>
-          <p:cNvPr id="4" name="Slide Number Placeholder 3"/>
-          <p:cNvSpPr>
-            <a:spLocks noGrp="1"/>
-          </p:cNvSpPr>
-          <p:nvPr>
-            <p:ph type="sldNum" idx="5" sz="quarter"/>
-          </p:nvPr>
-        </p:nvSpPr>
-        <p:spPr/>
-      </p:sp>
-    </p:spTree>
-  </p:cSld>
-  <p:clrMapOvr>
-    <a:masterClrMapping/>
-  </p:clrMapOvr>
-</p:notes>
-</file>
-
-<file path=ppt/notesSlides/notesSlide8.xml><?xml version="1.0" encoding="utf-8"?>
-<p:notes xmlns:a="http://schemas.openxmlformats.org/drawingml/2006/main" xmlns:p="http://schemas.openxmlformats.org/presentationml/2006/main" xmlns:r="http://schemas.openxmlformats.org/officeDocument/2006/relationships">
-  <p:cSld>
-    <p:spTree>
-      <p:nvGrpSpPr>
-        <p:cNvPr id="1" name=""/>
-        <p:cNvGrpSpPr/>
-        <p:nvPr/>
-      </p:nvGrpSpPr>
-      <p:grpSpPr>
-        <a:xfrm>
-          <a:off x="0" y="0"/>
-          <a:ext cx="0" cy="0"/>
-          <a:chOff x="0" y="0"/>
-          <a:chExt cx="0" cy="0"/>
-        </a:xfrm>
-      </p:grpSpPr>
-      <p:sp>
-        <p:nvSpPr>
-          <p:cNvPr id="2" name="Slide Image Placeholder 1"/>
-          <p:cNvSpPr>
-            <a:spLocks noGrp="1"/>
-          </p:cNvSpPr>
-          <p:nvPr>
-            <p:ph type="sldImg" idx="2"/>
-          </p:nvPr>
-        </p:nvSpPr>
-        <p:spPr/>
-      </p:sp>
-      <p:sp>
-        <p:nvSpPr>
-          <p:cNvPr id="3" name="Notes Placeholder 2"/>
-          <p:cNvSpPr>
-            <a:spLocks noGrp="1"/>
-          </p:cNvSpPr>
-          <p:nvPr>
-            <p:ph type="body" idx="3" sz="quarter"/>
-          </p:nvPr>
-        </p:nvSpPr>
-        <p:spPr/>
-        <p:txBody>
-          <a:bodyPr/>
-          <a:lstStyle/>
-          <a:p>
-            <a:r>
-              <a:t>LIVE DEMONSTRATION (educator-led — screen it live against your deployed microservice; no recorded</a:t>
-            </a:r>
-          </a:p>
-          <a:p>
-            <a:r>
-              <a:t>demo for this). Show both paths, then they replicate on the practice scenario.</a:t>
-            </a:r>
-          </a:p>
-          <a:p/>
-          <a:p>
-            <a:r>
-              <a:t>WHAT TO DEMONSTRATE (in the lab):</a:t>
-            </a:r>
-          </a:p>
-          <a:p>
-            <a:r>
-              <a:t>1. Post a VALID event to the contract → go to the store and find the item written (exactly once).</a:t>
-            </a:r>
-          </a:p>
-          <a:p>
-            <a:r>
-              <a:t>2. Post an INVALID event → confirm it is REJECTED and no bad record is written.</a:t>
-            </a:r>
-          </a:p>
-          <a:p>
-            <a:r>
-              <a:t>3. Show WHERE you look — the store item, not just the API response.</a:t>
-            </a:r>
-          </a:p>
-          <a:p/>
-          <a:p>
-            <a:r>
-              <a:t>WHAT TO EMPHASISE:</a:t>
-            </a:r>
-          </a:p>
-          <a:p>
-            <a:r>
-              <a:t>• The 200 is not the proof — walk from the API response THROUGH to the stored record every time.</a:t>
-            </a:r>
-          </a:p>
-          <a:p>
-            <a:r>
-              <a:t>• Show the exactly-once check: one post, one item (not zero, not two).</a:t>
-            </a:r>
-          </a:p>
-          <a:p>
-            <a:r>
-              <a:t>• Contrast the two paths side by side — valid persists, invalid is turned away — so students see the</a:t>
-            </a:r>
-          </a:p>
-          <a:p>
-            <a:r>
-              <a:t>validation is real.</a:t>
-            </a:r>
-          </a:p>
-          <a:p/>
-          <a:p>
-            <a:r>
-              <a:t>PREP: the microservice from the previous demo deployed and running; a valid and an invalid sample</a:t>
-            </a:r>
-          </a:p>
-          <a:p>
-            <a:r>
-              <a:t>event ready to post; the store open in another tab. ~6–8 min to screen before the activity.</a:t>
-            </a:r>
-          </a:p>
-        </p:txBody>
-      </p:sp>
-      <p:sp>
-        <p:nvSpPr>
-          <p:cNvPr id="4" name="Slide Number Placeholder 3"/>
-          <p:cNvSpPr>
-            <a:spLocks noGrp="1"/>
-          </p:cNvSpPr>
-          <p:nvPr>
-            <p:ph type="sldNum" idx="5" sz="quarter"/>
-          </p:nvPr>
-        </p:nvSpPr>
-        <p:spPr/>
-      </p:sp>
-    </p:spTree>
-  </p:cSld>
-  <p:clrMapOvr>
-    <a:masterClrMapping/>
-  </p:clrMapOvr>
-</p:notes>
-</file>
-
-<file path=ppt/notesSlides/notesSlide9.xml><?xml version="1.0" encoding="utf-8"?>
-<p:notes xmlns:a="http://schemas.openxmlformats.org/drawingml/2006/main" xmlns:p="http://schemas.openxmlformats.org/presentationml/2006/main" xmlns:r="http://schemas.openxmlformats.org/officeDocument/2006/relationships">
-  <p:cSld>
-    <p:spTree>
-      <p:nvGrpSpPr>
-        <p:cNvPr id="1" name=""/>
-        <p:cNvGrpSpPr/>
-        <p:nvPr/>
-      </p:nvGrpSpPr>
-      <p:grpSpPr>
-        <a:xfrm>
-          <a:off x="0" y="0"/>
-          <a:ext cx="0" cy="0"/>
-          <a:chOff x="0" y="0"/>
-          <a:chExt cx="0" cy="0"/>
-        </a:xfrm>
-      </p:grpSpPr>
-      <p:sp>
-        <p:nvSpPr>
-          <p:cNvPr id="2" name="Slide Image Placeholder 1"/>
-          <p:cNvSpPr>
-            <a:spLocks noGrp="1"/>
-          </p:cNvSpPr>
-          <p:nvPr>
-            <p:ph type="sldImg" idx="2"/>
-          </p:nvPr>
-        </p:nvSpPr>
-        <p:spPr/>
-      </p:sp>
-      <p:sp>
-        <p:nvSpPr>
-          <p:cNvPr id="3" name="Notes Placeholder 2"/>
-          <p:cNvSpPr>
-            <a:spLocks noGrp="1"/>
-          </p:cNvSpPr>
-          <p:nvPr>
-            <p:ph type="body" idx="3" sz="quarter"/>
-          </p:nvPr>
-        </p:nvSpPr>
-        <p:spPr/>
-        <p:txBody>
-          <a:bodyPr/>
-          <a:lstStyle/>
-          <a:p>
-            <a:r>
-              <a:t>Facilitation — the C3 practice; students test the pipeline they deployed in the C2 activity.</a:t>
-            </a:r>
-          </a:p>
-          <a:p>
-            <a:r>
-              <a:t>Tell students, in these words: "On the practice scenario, post sample events and confirm each is</a:t>
-            </a:r>
-          </a:p>
-          <a:p>
-            <a:r>
-              <a:t>recorded exactly once in the store; then post an invalid event and confirm it is rejected."</a:t>
-            </a:r>
-          </a:p>
-          <a:p>
-            <a:r>
-              <a:t>Steps (put on the board):</a:t>
-            </a:r>
-          </a:p>
-          <a:p>
-            <a:r>
-              <a:t>1. Post a valid event to the contract; find the item in the store — confirm exactly one record.</a:t>
-            </a:r>
-          </a:p>
-          <a:p>
-            <a:r>
-              <a:t>2. Repeat with a second valid event; confirm a second distinct record (no duplicates, no misses).</a:t>
-            </a:r>
-          </a:p>
-          <a:p>
-            <a:r>
-              <a:t>3. Post an invalid event; confirm it is rejected and no record is written.</a:t>
-            </a:r>
-          </a:p>
-          <a:p>
-            <a:r>
-              <a:t>Must produce: evidence that valid events persist exactly once and invalid events are rejected — the</a:t>
-            </a:r>
-          </a:p>
-          <a:p>
-            <a:r>
-              <a:t>functional-test result for their pipeline.</a:t>
-            </a:r>
-          </a:p>
-          <a:p>
-            <a:r>
-              <a:t>Timing: ~20 min. Where they get stuck: they check the 200 and stop — push them to open the store and</a:t>
-            </a:r>
-          </a:p>
-          <a:p>
-            <a:r>
-              <a:t>verify the RECORD; and a "missing" record that's actually a wiring fault, which sets up C4.</a:t>
-            </a:r>
-          </a:p>
-          <a:p>
-            <a:r>
-              <a:t>Share-back prompt: "Who had an event that returned 200 but never reached the store?" — surface it as</a:t>
-            </a:r>
-          </a:p>
-          <a:p>
-            <a:r>
-              <a:t>the bridge into troubleshooting.</a:t>
-            </a:r>
-          </a:p>
-          <a:p>
-            <a:r>
-              <a:t>No-leakage note: the practice scenario is comparable-not-identical to the AT2 build; keep them on the</a:t>
-            </a:r>
-          </a:p>
-          <a:p>
-            <a:r>
-              <a:t>practice microservice here.</a:t>
+              <a:t>Activity = practice workbook task 19.</a:t>
+            </a:r>
+          </a:p>
+          <a:p>
+            <a:r>
+              <a:t>The two misses: an alarm configured but never fired, and a threshold they can't justify.</a:t>
             </a:r>
           </a:p>
         </p:txBody>
@@ -5098,7 +4006,7 @@
                 </a:solidFill>
                 <a:latin typeface="Roboto"/>
               </a:rPr>
-              <a:t>Building &amp; deploying the serverless microservice</a:t>
+              <a:t>Monitoring &amp; alarms</a:t>
             </a:r>
           </a:p>
           <a:p>
@@ -5114,7 +4022,7 @@
                 </a:solidFill>
                 <a:latin typeface="Roboto Light"/>
               </a:rPr>
-              <a:t>Provision the serverless audit-log microservice from the supplied code, wire it to the store, and confirm it records</a:t>
+              <a:t>Make the running microservice observable — a metric and a scaling-relevant alarm</a:t>
             </a:r>
           </a:p>
         </p:txBody>
@@ -5197,13 +4105,13 @@
         <p:spPr>
           <a:xfrm>
             <a:off x="0" y="0"/>
-            <a:ext cx="3931920" cy="6858000"/>
+            <a:ext cx="12191695" cy="1234440"/>
           </a:xfrm>
           <a:prstGeom prst="rect">
             <a:avLst/>
           </a:prstGeom>
           <a:solidFill>
-            <a:srgbClr val="205F61"/>
+            <a:srgbClr val="27B5CE"/>
           </a:solidFill>
           <a:ln>
             <a:noFill/>
@@ -5234,120 +4142,20 @@
       </p:sp>
       <p:sp>
         <p:nvSpPr>
-          <p:cNvPr id="3" name="TextBox 2"/>
-          <p:cNvSpPr txBox="1"/>
-          <p:nvPr/>
-        </p:nvSpPr>
-        <p:spPr>
-          <a:xfrm>
-            <a:off x="365760" y="2103120"/>
-            <a:ext cx="3291840" cy="2194560"/>
-          </a:xfrm>
-          <a:prstGeom prst="rect">
-            <a:avLst/>
-          </a:prstGeom>
-          <a:noFill/>
-        </p:spPr>
-        <p:txBody>
-          <a:bodyPr wrap="square" anchor="t" lIns="0" rIns="0" tIns="0" bIns="0">
-            <a:spAutoFit/>
-          </a:bodyPr>
-          <a:lstStyle/>
-          <a:p>
-            <a:r>
-              <a:rPr sz="13000" b="1" i="0">
-                <a:solidFill>
-                  <a:srgbClr val="FFFFFF"/>
-                </a:solidFill>
-                <a:latin typeface="Roboto"/>
-              </a:rPr>
-              <a:t>03</a:t>
-            </a:r>
-          </a:p>
-        </p:txBody>
-      </p:sp>
-      <p:sp>
-        <p:nvSpPr>
-          <p:cNvPr id="4" name="TextBox 3"/>
-          <p:cNvSpPr txBox="1"/>
-          <p:nvPr/>
-        </p:nvSpPr>
-        <p:spPr>
-          <a:xfrm>
-            <a:off x="4480560" y="2468880"/>
-            <a:ext cx="7132320" cy="2194560"/>
-          </a:xfrm>
-          <a:prstGeom prst="rect">
-            <a:avLst/>
-          </a:prstGeom>
-          <a:noFill/>
-        </p:spPr>
-        <p:txBody>
-          <a:bodyPr wrap="square" anchor="t" lIns="0" rIns="0" tIns="0" bIns="0">
-            <a:spAutoFit/>
-          </a:bodyPr>
-          <a:lstStyle/>
-          <a:p>
-            <a:r>
-              <a:rPr sz="1600" b="1" i="0">
-                <a:solidFill>
-                  <a:srgbClr val="205F61"/>
-                </a:solidFill>
-                <a:latin typeface="Roboto"/>
-              </a:rPr>
-              <a:t>SECTION</a:t>
-            </a:r>
-          </a:p>
-          <a:p>
-            <a:pPr>
-              <a:spcBef>
-                <a:spcPts val="600"/>
-              </a:spcBef>
-            </a:pPr>
-            <a:r>
-              <a:rPr sz="3800" b="1" i="0">
-                <a:solidFill>
-                  <a:srgbClr val="2A2929"/>
-                </a:solidFill>
-                <a:latin typeface="Roboto"/>
-              </a:rPr>
-              <a:t>Test &amp; confirm functioning</a:t>
-            </a:r>
-          </a:p>
-          <a:p>
-            <a:pPr>
-              <a:spcBef>
-                <a:spcPts val="1000"/>
-              </a:spcBef>
-            </a:pPr>
-            <a:r>
-              <a:rPr sz="2000" b="0" i="1">
-                <a:solidFill>
-                  <a:srgbClr val="484848"/>
-                </a:solidFill>
-                <a:latin typeface="Roboto Light"/>
-              </a:rPr>
-              <a:t>post an event, find the record</a:t>
-            </a:r>
-          </a:p>
-        </p:txBody>
-      </p:sp>
-      <p:sp>
-        <p:nvSpPr>
-          <p:cNvPr id="5" name="Rectangle 4"/>
+          <p:cNvPr id="3" name="Rounded Rectangle 2"/>
           <p:cNvSpPr/>
           <p:nvPr/>
         </p:nvSpPr>
         <p:spPr>
           <a:xfrm>
-            <a:off x="0" y="6565392"/>
-            <a:ext cx="12191695" cy="38100"/>
-          </a:xfrm>
-          <a:prstGeom prst="rect">
+            <a:off x="640080" y="384048"/>
+            <a:ext cx="1691640" cy="457200"/>
+          </a:xfrm>
+          <a:prstGeom prst="roundRect">
             <a:avLst/>
           </a:prstGeom>
           <a:solidFill>
-            <a:srgbClr val="205F61"/>
+            <a:srgbClr val="2A2929"/>
           </a:solidFill>
           <a:ln>
             <a:noFill/>
@@ -5373,188 +4181,15 @@
           <a:lstStyle/>
           <a:p>
             <a:pPr algn="ctr"/>
-          </a:p>
-        </p:txBody>
-      </p:sp>
-      <p:sp>
-        <p:nvSpPr>
-          <p:cNvPr id="6" name="TextBox 5"/>
-          <p:cNvSpPr txBox="1"/>
-          <p:nvPr/>
-        </p:nvSpPr>
-        <p:spPr>
-          <a:xfrm>
-            <a:off x="502920" y="6400800"/>
-            <a:ext cx="5486400" cy="320040"/>
-          </a:xfrm>
-          <a:prstGeom prst="rect">
-            <a:avLst/>
-          </a:prstGeom>
-          <a:noFill/>
-        </p:spPr>
-        <p:txBody>
-          <a:bodyPr wrap="square" anchor="t" lIns="0" rIns="0" tIns="0" bIns="0">
-            <a:spAutoFit/>
-          </a:bodyPr>
-          <a:lstStyle/>
-          <a:p>
-            <a:r>
-              <a:rPr sz="1100" b="1" i="0">
-                <a:solidFill>
-                  <a:srgbClr val="2A2929"/>
-                </a:solidFill>
-                <a:latin typeface="Roboto"/>
-              </a:rPr>
-              <a:t>Kangan </a:t>
-            </a:r>
-            <a:r>
-              <a:rPr sz="1100" b="1" i="0">
-                <a:solidFill>
-                  <a:srgbClr val="D68E10"/>
-                </a:solidFill>
-                <a:latin typeface="Roboto"/>
-              </a:rPr>
-              <a:t>Institute</a:t>
-            </a:r>
-          </a:p>
-        </p:txBody>
-      </p:sp>
-      <p:sp>
-        <p:nvSpPr>
-          <p:cNvPr id="7" name="TextBox 6"/>
-          <p:cNvSpPr txBox="1"/>
-          <p:nvPr/>
-        </p:nvSpPr>
-        <p:spPr>
-          <a:xfrm>
-            <a:off x="10515600" y="6400800"/>
-            <a:ext cx="1188720" cy="320040"/>
-          </a:xfrm>
-          <a:prstGeom prst="rect">
-            <a:avLst/>
-          </a:prstGeom>
-          <a:noFill/>
-        </p:spPr>
-        <p:txBody>
-          <a:bodyPr wrap="square" anchor="t" lIns="0" rIns="0" tIns="0" bIns="0">
-            <a:spAutoFit/>
-          </a:bodyPr>
-          <a:lstStyle/>
-          <a:p>
-            <a:pPr algn="r"/>
-            <a:r>
-              <a:rPr sz="1100" b="0" i="0">
-                <a:solidFill>
-                  <a:srgbClr val="7A7A7A"/>
-                </a:solidFill>
-                <a:latin typeface="Roboto"/>
-              </a:rPr>
-              <a:t/>
-            </a:r>
-          </a:p>
-        </p:txBody>
-      </p:sp>
-    </p:spTree>
-  </p:cSld>
-  <p:clrMapOvr>
-    <a:masterClrMapping/>
-  </p:clrMapOvr>
-</p:sld>
-</file>
-
-<file path=ppt/slides/slide11.xml><?xml version="1.0" encoding="utf-8"?>
-<p:sld xmlns:a="http://schemas.openxmlformats.org/drawingml/2006/main" xmlns:p="http://schemas.openxmlformats.org/presentationml/2006/main" xmlns:r="http://schemas.openxmlformats.org/officeDocument/2006/relationships">
-  <p:cSld>
-    <p:bg>
-      <p:bgPr>
-        <a:solidFill>
-          <a:srgbClr val="FFFFFF"/>
-        </a:solidFill>
-        <a:effectLst/>
-      </p:bgPr>
-    </p:bg>
-    <p:spTree>
-      <p:nvGrpSpPr>
-        <p:cNvPr id="1" name=""/>
-        <p:cNvGrpSpPr/>
-        <p:nvPr/>
-      </p:nvGrpSpPr>
-      <p:grpSpPr/>
-      <p:sp>
-        <p:nvSpPr>
-          <p:cNvPr id="2" name="TextBox 1"/>
-          <p:cNvSpPr txBox="1"/>
-          <p:nvPr/>
-        </p:nvSpPr>
-        <p:spPr>
-          <a:xfrm>
-            <a:off x="640080" y="457200"/>
-            <a:ext cx="10881360" cy="960120"/>
-          </a:xfrm>
-          <a:prstGeom prst="rect">
-            <a:avLst/>
-          </a:prstGeom>
-          <a:noFill/>
-        </p:spPr>
-        <p:txBody>
-          <a:bodyPr wrap="square" anchor="t" lIns="0" rIns="0" tIns="0" bIns="0">
-            <a:spAutoFit/>
-          </a:bodyPr>
-          <a:lstStyle/>
-          <a:p>
-            <a:r>
-              <a:rPr sz="2800" b="1" i="0">
-                <a:solidFill>
-                  <a:srgbClr val="2A2929"/>
-                </a:solidFill>
-                <a:latin typeface="Roboto"/>
-              </a:rPr>
-              <a:t>Test the microservice</a:t>
-            </a:r>
-          </a:p>
-        </p:txBody>
-      </p:sp>
-      <p:sp>
-        <p:nvSpPr>
-          <p:cNvPr id="3" name="Rectangle 2"/>
-          <p:cNvSpPr/>
-          <p:nvPr/>
-        </p:nvSpPr>
-        <p:spPr>
-          <a:xfrm>
-            <a:off x="658368" y="1371600"/>
-            <a:ext cx="1463040" cy="50800"/>
-          </a:xfrm>
-          <a:prstGeom prst="rect">
-            <a:avLst/>
-          </a:prstGeom>
-          <a:solidFill>
-            <a:srgbClr val="205F61"/>
-          </a:solidFill>
-          <a:ln>
-            <a:noFill/>
-          </a:ln>
-          <a:effectLst/>
-        </p:spPr>
-        <p:style>
-          <a:lnRef idx="1">
-            <a:schemeClr val="accent1"/>
-          </a:lnRef>
-          <a:fillRef idx="3">
-            <a:schemeClr val="accent1"/>
-          </a:fillRef>
-          <a:effectRef idx="2">
-            <a:schemeClr val="accent1"/>
-          </a:effectRef>
-          <a:fontRef idx="minor">
-            <a:schemeClr val="lt1"/>
-          </a:fontRef>
-        </p:style>
-        <p:txBody>
-          <a:bodyPr rtlCol="0" anchor="ctr"/>
-          <a:lstStyle/>
-          <a:p>
-            <a:pPr algn="ctr"/>
+            <a:r>
+              <a:rPr sz="1400" b="1" i="0">
+                <a:solidFill>
+                  <a:srgbClr val="FBB900"/>
+                </a:solidFill>
+                <a:latin typeface="Roboto"/>
+              </a:rPr>
+              <a:t>ACTIVITY</a:t>
+            </a:r>
           </a:p>
         </p:txBody>
       </p:sp>
@@ -5566,8 +4201,8 @@
         </p:nvSpPr>
         <p:spPr>
           <a:xfrm>
-            <a:off x="658368" y="1691640"/>
-            <a:ext cx="10881360" cy="4480560"/>
+            <a:off x="2560320" y="310896"/>
+            <a:ext cx="8961120" cy="685800"/>
           </a:xfrm>
           <a:prstGeom prst="rect">
             <a:avLst/>
@@ -5576,6 +4211,40 @@
         </p:spPr>
         <p:txBody>
           <a:bodyPr wrap="square" anchor="ctr" lIns="0" rIns="0" tIns="0" bIns="0">
+            <a:spAutoFit/>
+          </a:bodyPr>
+          <a:lstStyle/>
+          <a:p>
+            <a:r>
+              <a:rPr sz="2600" b="1" i="0">
+                <a:solidFill>
+                  <a:srgbClr val="FFFFFF"/>
+                </a:solidFill>
+                <a:latin typeface="Roboto"/>
+              </a:rPr>
+              <a:t>Set up the metric and the alarm</a:t>
+            </a:r>
+          </a:p>
+        </p:txBody>
+      </p:sp>
+      <p:sp>
+        <p:nvSpPr>
+          <p:cNvPr id="5" name="TextBox 4"/>
+          <p:cNvSpPr txBox="1"/>
+          <p:nvPr/>
+        </p:nvSpPr>
+        <p:spPr>
+          <a:xfrm>
+            <a:off x="658368" y="1554480"/>
+            <a:ext cx="10881360" cy="4297680"/>
+          </a:xfrm>
+          <a:prstGeom prst="rect">
+            <a:avLst/>
+          </a:prstGeom>
+          <a:noFill/>
+        </p:spPr>
+        <p:txBody>
+          <a:bodyPr wrap="square" anchor="t" lIns="0" rIns="0" tIns="0" bIns="0">
             <a:spAutoFit/>
           </a:bodyPr>
           <a:lstStyle/>
@@ -5592,7 +4261,7 @@
               </a:spcAft>
             </a:pPr>
             <a:r>
-              <a:rPr sz="2400" b="1" i="0">
+              <a:rPr sz="1700" b="1" i="0">
                 <a:solidFill>
                   <a:srgbClr val="EDAB0C"/>
                 </a:solidFill>
@@ -5601,13 +4270,13 @@
               <a:t>■  </a:t>
             </a:r>
             <a:r>
-              <a:rPr sz="2400" b="0" i="0">
+              <a:rPr sz="1700" b="0" i="0">
                 <a:solidFill>
                   <a:srgbClr val="2A2929"/>
                 </a:solidFill>
                 <a:latin typeface="Roboto"/>
               </a:rPr>
-              <a:t>Post sample events to the contract; confirm each is persisted exactly once in the data store.</a:t>
+              <a:t>Workbook — task 19.</a:t>
             </a:r>
           </a:p>
           <a:p>
@@ -5623,7 +4292,7 @@
               </a:spcAft>
             </a:pPr>
             <a:r>
-              <a:rPr sz="2400" b="1" i="0">
+              <a:rPr sz="1700" b="1" i="0">
                 <a:solidFill>
                   <a:srgbClr val="EDAB0C"/>
                 </a:solidFill>
@@ -5632,377 +4301,13 @@
               <a:t>■  </a:t>
             </a:r>
             <a:r>
-              <a:rPr sz="2400" b="0" i="0">
+              <a:rPr sz="1700" b="0" i="0">
                 <a:solidFill>
                   <a:srgbClr val="2A2929"/>
                 </a:solidFill>
                 <a:latin typeface="Roboto"/>
               </a:rPr>
-              <a:t>Confirm an invalid event is rejected — the validation works, not just the happy path.</a:t>
-            </a:r>
-          </a:p>
-          <a:p>
-            <a:pPr marL="0" indent="0">
-              <a:lnSpc>
-                <a:spcPct val="105000"/>
-              </a:lnSpc>
-              <a:spcBef>
-                <a:spcPts val="0"/>
-              </a:spcBef>
-              <a:spcAft>
-                <a:spcPts val="1000"/>
-              </a:spcAft>
-            </a:pPr>
-            <a:r>
-              <a:rPr sz="2400" b="1" i="0">
-                <a:solidFill>
-                  <a:srgbClr val="EDAB0C"/>
-                </a:solidFill>
-                <a:latin typeface="Roboto"/>
-              </a:rPr>
-              <a:t>■  </a:t>
-            </a:r>
-            <a:r>
-              <a:rPr sz="2400" b="0" i="0">
-                <a:solidFill>
-                  <a:srgbClr val="2A2929"/>
-                </a:solidFill>
-                <a:latin typeface="Roboto"/>
-              </a:rPr>
-              <a:t>Testing/debugging technique: assert the observable outcome (the record), not just a 200 response (KE 5).</a:t>
-            </a:r>
-          </a:p>
-        </p:txBody>
-      </p:sp>
-      <p:sp>
-        <p:nvSpPr>
-          <p:cNvPr id="5" name="Rectangle 4"/>
-          <p:cNvSpPr/>
-          <p:nvPr/>
-        </p:nvSpPr>
-        <p:spPr>
-          <a:xfrm>
-            <a:off x="0" y="6565392"/>
-            <a:ext cx="12191695" cy="38100"/>
-          </a:xfrm>
-          <a:prstGeom prst="rect">
-            <a:avLst/>
-          </a:prstGeom>
-          <a:solidFill>
-            <a:srgbClr val="205F61"/>
-          </a:solidFill>
-          <a:ln>
-            <a:noFill/>
-          </a:ln>
-          <a:effectLst/>
-        </p:spPr>
-        <p:style>
-          <a:lnRef idx="1">
-            <a:schemeClr val="accent1"/>
-          </a:lnRef>
-          <a:fillRef idx="3">
-            <a:schemeClr val="accent1"/>
-          </a:fillRef>
-          <a:effectRef idx="2">
-            <a:schemeClr val="accent1"/>
-          </a:effectRef>
-          <a:fontRef idx="minor">
-            <a:schemeClr val="lt1"/>
-          </a:fontRef>
-        </p:style>
-        <p:txBody>
-          <a:bodyPr rtlCol="0" anchor="ctr"/>
-          <a:lstStyle/>
-          <a:p>
-            <a:pPr algn="ctr"/>
-          </a:p>
-        </p:txBody>
-      </p:sp>
-      <p:sp>
-        <p:nvSpPr>
-          <p:cNvPr id="6" name="TextBox 5"/>
-          <p:cNvSpPr txBox="1"/>
-          <p:nvPr/>
-        </p:nvSpPr>
-        <p:spPr>
-          <a:xfrm>
-            <a:off x="502920" y="6400800"/>
-            <a:ext cx="5486400" cy="320040"/>
-          </a:xfrm>
-          <a:prstGeom prst="rect">
-            <a:avLst/>
-          </a:prstGeom>
-          <a:noFill/>
-        </p:spPr>
-        <p:txBody>
-          <a:bodyPr wrap="square" anchor="t" lIns="0" rIns="0" tIns="0" bIns="0">
-            <a:spAutoFit/>
-          </a:bodyPr>
-          <a:lstStyle/>
-          <a:p>
-            <a:r>
-              <a:rPr sz="1100" b="1" i="0">
-                <a:solidFill>
-                  <a:srgbClr val="2A2929"/>
-                </a:solidFill>
-                <a:latin typeface="Roboto"/>
-              </a:rPr>
-              <a:t>Kangan </a:t>
-            </a:r>
-            <a:r>
-              <a:rPr sz="1100" b="1" i="0">
-                <a:solidFill>
-                  <a:srgbClr val="D68E10"/>
-                </a:solidFill>
-                <a:latin typeface="Roboto"/>
-              </a:rPr>
-              <a:t>Institute</a:t>
-            </a:r>
-          </a:p>
-        </p:txBody>
-      </p:sp>
-      <p:sp>
-        <p:nvSpPr>
-          <p:cNvPr id="7" name="TextBox 6"/>
-          <p:cNvSpPr txBox="1"/>
-          <p:nvPr/>
-        </p:nvSpPr>
-        <p:spPr>
-          <a:xfrm>
-            <a:off x="10515600" y="6400800"/>
-            <a:ext cx="1188720" cy="320040"/>
-          </a:xfrm>
-          <a:prstGeom prst="rect">
-            <a:avLst/>
-          </a:prstGeom>
-          <a:noFill/>
-        </p:spPr>
-        <p:txBody>
-          <a:bodyPr wrap="square" anchor="t" lIns="0" rIns="0" tIns="0" bIns="0">
-            <a:spAutoFit/>
-          </a:bodyPr>
-          <a:lstStyle/>
-          <a:p>
-            <a:pPr algn="r"/>
-            <a:r>
-              <a:rPr sz="1100" b="0" i="0">
-                <a:solidFill>
-                  <a:srgbClr val="7A7A7A"/>
-                </a:solidFill>
-                <a:latin typeface="Roboto"/>
-              </a:rPr>
-              <a:t>7</a:t>
-            </a:r>
-          </a:p>
-        </p:txBody>
-      </p:sp>
-    </p:spTree>
-  </p:cSld>
-  <p:clrMapOvr>
-    <a:masterClrMapping/>
-  </p:clrMapOvr>
-</p:sld>
-</file>
-
-<file path=ppt/slides/slide12.xml><?xml version="1.0" encoding="utf-8"?>
-<p:sld xmlns:a="http://schemas.openxmlformats.org/drawingml/2006/main" xmlns:p="http://schemas.openxmlformats.org/presentationml/2006/main" xmlns:r="http://schemas.openxmlformats.org/officeDocument/2006/relationships">
-  <p:cSld>
-    <p:bg>
-      <p:bgPr>
-        <a:solidFill>
-          <a:srgbClr val="FFFFFF"/>
-        </a:solidFill>
-        <a:effectLst/>
-      </p:bgPr>
-    </p:bg>
-    <p:spTree>
-      <p:nvGrpSpPr>
-        <p:cNvPr id="1" name=""/>
-        <p:cNvGrpSpPr/>
-        <p:nvPr/>
-      </p:nvGrpSpPr>
-      <p:grpSpPr/>
-      <p:sp>
-        <p:nvSpPr>
-          <p:cNvPr id="2" name="Rectangle 1"/>
-          <p:cNvSpPr/>
-          <p:nvPr/>
-        </p:nvSpPr>
-        <p:spPr>
-          <a:xfrm>
-            <a:off x="0" y="0"/>
-            <a:ext cx="12191695" cy="1234440"/>
-          </a:xfrm>
-          <a:prstGeom prst="rect">
-            <a:avLst/>
-          </a:prstGeom>
-          <a:solidFill>
-            <a:srgbClr val="2A2929"/>
-          </a:solidFill>
-          <a:ln>
-            <a:noFill/>
-          </a:ln>
-          <a:effectLst/>
-        </p:spPr>
-        <p:style>
-          <a:lnRef idx="1">
-            <a:schemeClr val="accent1"/>
-          </a:lnRef>
-          <a:fillRef idx="3">
-            <a:schemeClr val="accent1"/>
-          </a:fillRef>
-          <a:effectRef idx="2">
-            <a:schemeClr val="accent1"/>
-          </a:effectRef>
-          <a:fontRef idx="minor">
-            <a:schemeClr val="lt1"/>
-          </a:fontRef>
-        </p:style>
-        <p:txBody>
-          <a:bodyPr rtlCol="0" anchor="ctr"/>
-          <a:lstStyle/>
-          <a:p>
-            <a:pPr algn="ctr"/>
-          </a:p>
-        </p:txBody>
-      </p:sp>
-      <p:sp>
-        <p:nvSpPr>
-          <p:cNvPr id="3" name="Rounded Rectangle 2"/>
-          <p:cNvSpPr/>
-          <p:nvPr/>
-        </p:nvSpPr>
-        <p:spPr>
-          <a:xfrm>
-            <a:off x="640080" y="384048"/>
-            <a:ext cx="2331720" cy="457200"/>
-          </a:xfrm>
-          <a:prstGeom prst="roundRect">
-            <a:avLst/>
-          </a:prstGeom>
-          <a:solidFill>
-            <a:srgbClr val="205F61"/>
-          </a:solidFill>
-          <a:ln>
-            <a:noFill/>
-          </a:ln>
-          <a:effectLst/>
-        </p:spPr>
-        <p:style>
-          <a:lnRef idx="1">
-            <a:schemeClr val="accent1"/>
-          </a:lnRef>
-          <a:fillRef idx="3">
-            <a:schemeClr val="accent1"/>
-          </a:fillRef>
-          <a:effectRef idx="2">
-            <a:schemeClr val="accent1"/>
-          </a:effectRef>
-          <a:fontRef idx="minor">
-            <a:schemeClr val="lt1"/>
-          </a:fontRef>
-        </p:style>
-        <p:txBody>
-          <a:bodyPr rtlCol="0" anchor="ctr"/>
-          <a:lstStyle/>
-          <a:p>
-            <a:pPr algn="ctr"/>
-            <a:r>
-              <a:rPr sz="1300" b="1" i="0">
-                <a:solidFill>
-                  <a:srgbClr val="2A2929"/>
-                </a:solidFill>
-                <a:latin typeface="Roboto"/>
-              </a:rPr>
-              <a:t>RECORDED DEMO</a:t>
-            </a:r>
-          </a:p>
-        </p:txBody>
-      </p:sp>
-      <p:sp>
-        <p:nvSpPr>
-          <p:cNvPr id="4" name="TextBox 3"/>
-          <p:cNvSpPr txBox="1"/>
-          <p:nvPr/>
-        </p:nvSpPr>
-        <p:spPr>
-          <a:xfrm>
-            <a:off x="3200400" y="310896"/>
-            <a:ext cx="8321040" cy="685800"/>
-          </a:xfrm>
-          <a:prstGeom prst="rect">
-            <a:avLst/>
-          </a:prstGeom>
-          <a:noFill/>
-        </p:spPr>
-        <p:txBody>
-          <a:bodyPr wrap="square" anchor="ctr" lIns="0" rIns="0" tIns="0" bIns="0">
-            <a:spAutoFit/>
-          </a:bodyPr>
-          <a:lstStyle/>
-          <a:p>
-            <a:r>
-              <a:rPr sz="2500" b="1" i="0">
-                <a:solidFill>
-                  <a:srgbClr val="FFFFFF"/>
-                </a:solidFill>
-                <a:latin typeface="Roboto"/>
-              </a:rPr>
-              <a:t>Post events &amp; confirm records</a:t>
-            </a:r>
-          </a:p>
-        </p:txBody>
-      </p:sp>
-      <p:sp>
-        <p:nvSpPr>
-          <p:cNvPr id="5" name="TextBox 4"/>
-          <p:cNvSpPr txBox="1"/>
-          <p:nvPr/>
-        </p:nvSpPr>
-        <p:spPr>
-          <a:xfrm>
-            <a:off x="658368" y="1554480"/>
-            <a:ext cx="10881360" cy="4297680"/>
-          </a:xfrm>
-          <a:prstGeom prst="rect">
-            <a:avLst/>
-          </a:prstGeom>
-          <a:noFill/>
-        </p:spPr>
-        <p:txBody>
-          <a:bodyPr wrap="square" anchor="t" lIns="0" rIns="0" tIns="0" bIns="0">
-            <a:spAutoFit/>
-          </a:bodyPr>
-          <a:lstStyle/>
-          <a:p>
-            <a:pPr marL="0" indent="0">
-              <a:lnSpc>
-                <a:spcPct val="105000"/>
-              </a:lnSpc>
-              <a:spcBef>
-                <a:spcPts val="0"/>
-              </a:spcBef>
-              <a:spcAft>
-                <a:spcPts val="1000"/>
-              </a:spcAft>
-            </a:pPr>
-            <a:r>
-              <a:rPr sz="1700" b="1" i="0">
-                <a:solidFill>
-                  <a:srgbClr val="EDAB0C"/>
-                </a:solidFill>
-                <a:latin typeface="Roboto"/>
-              </a:rPr>
-              <a:t>■  </a:t>
-            </a:r>
-            <a:r>
-              <a:rPr sz="1700" b="0" i="0">
-                <a:solidFill>
-                  <a:srgbClr val="2A2929"/>
-                </a:solidFill>
-                <a:latin typeface="Roboto"/>
-              </a:rPr>
-              <a:t>Post a valid event → find the item in the store; post an invalid event → confirm it is rejected.</a:t>
+              <a:t>Set up the metric and the scaling-relevant alarm with a notification, drive it to alarm, and confirm the notification fired.</a:t>
             </a:r>
           </a:p>
         </p:txBody>
@@ -6016,7 +4321,7 @@
         <p:spPr>
           <a:xfrm>
             <a:off x="640080" y="5897880"/>
-            <a:ext cx="7863840" cy="457200"/>
+            <a:ext cx="4023360" cy="457200"/>
           </a:xfrm>
           <a:prstGeom prst="roundRect">
             <a:avLst/>
@@ -6062,7 +4367,7 @@
         <p:spPr>
           <a:xfrm>
             <a:off x="822960" y="5943600"/>
-            <a:ext cx="7498080" cy="365760"/>
+            <a:ext cx="3657600" cy="365760"/>
           </a:xfrm>
           <a:prstGeom prst="rect">
             <a:avLst/>
@@ -6076,13 +4381,13 @@
           <a:lstStyle/>
           <a:p>
             <a:r>
-              <a:rPr sz="1400" b="1" i="0">
+              <a:rPr sz="1500" b="1" i="0">
                 <a:solidFill>
                   <a:srgbClr val="2A2929"/>
                 </a:solidFill>
                 <a:latin typeface="Roboto"/>
               </a:rPr>
-              <a:t>▶  Play the AWS recorded demo (recorded/live demo) — you do this next</a:t>
+              <a:t>⏱  ~25 min</a:t>
             </a:r>
           </a:p>
         </p:txBody>
@@ -6102,7 +4407,7 @@
             <a:avLst/>
           </a:prstGeom>
           <a:solidFill>
-            <a:srgbClr val="205F61"/>
+            <a:srgbClr val="27B5CE"/>
           </a:solidFill>
           <a:ln>
             <a:noFill/>
@@ -6204,7 +4509,7 @@
                 </a:solidFill>
                 <a:latin typeface="Roboto"/>
               </a:rPr>
-              <a:t>8</a:t>
+              <a:t>7</a:t>
             </a:r>
           </a:p>
         </p:txBody>
@@ -6217,1467 +4522,7 @@
 </p:sld>
 </file>
 
-<file path=ppt/slides/slide13.xml><?xml version="1.0" encoding="utf-8"?>
-<p:sld xmlns:a="http://schemas.openxmlformats.org/drawingml/2006/main" xmlns:p="http://schemas.openxmlformats.org/presentationml/2006/main" xmlns:r="http://schemas.openxmlformats.org/officeDocument/2006/relationships">
-  <p:cSld>
-    <p:bg>
-      <p:bgPr>
-        <a:solidFill>
-          <a:srgbClr val="FFFFFF"/>
-        </a:solidFill>
-        <a:effectLst/>
-      </p:bgPr>
-    </p:bg>
-    <p:spTree>
-      <p:nvGrpSpPr>
-        <p:cNvPr id="1" name=""/>
-        <p:cNvGrpSpPr/>
-        <p:nvPr/>
-      </p:nvGrpSpPr>
-      <p:grpSpPr/>
-      <p:sp>
-        <p:nvSpPr>
-          <p:cNvPr id="2" name="Rectangle 1"/>
-          <p:cNvSpPr/>
-          <p:nvPr/>
-        </p:nvSpPr>
-        <p:spPr>
-          <a:xfrm>
-            <a:off x="0" y="0"/>
-            <a:ext cx="12191695" cy="1234440"/>
-          </a:xfrm>
-          <a:prstGeom prst="rect">
-            <a:avLst/>
-          </a:prstGeom>
-          <a:solidFill>
-            <a:srgbClr val="205F61"/>
-          </a:solidFill>
-          <a:ln>
-            <a:noFill/>
-          </a:ln>
-          <a:effectLst/>
-        </p:spPr>
-        <p:style>
-          <a:lnRef idx="1">
-            <a:schemeClr val="accent1"/>
-          </a:lnRef>
-          <a:fillRef idx="3">
-            <a:schemeClr val="accent1"/>
-          </a:fillRef>
-          <a:effectRef idx="2">
-            <a:schemeClr val="accent1"/>
-          </a:effectRef>
-          <a:fontRef idx="minor">
-            <a:schemeClr val="lt1"/>
-          </a:fontRef>
-        </p:style>
-        <p:txBody>
-          <a:bodyPr rtlCol="0" anchor="ctr"/>
-          <a:lstStyle/>
-          <a:p>
-            <a:pPr algn="ctr"/>
-          </a:p>
-        </p:txBody>
-      </p:sp>
-      <p:sp>
-        <p:nvSpPr>
-          <p:cNvPr id="3" name="Rounded Rectangle 2"/>
-          <p:cNvSpPr/>
-          <p:nvPr/>
-        </p:nvSpPr>
-        <p:spPr>
-          <a:xfrm>
-            <a:off x="640080" y="384048"/>
-            <a:ext cx="1691640" cy="457200"/>
-          </a:xfrm>
-          <a:prstGeom prst="roundRect">
-            <a:avLst/>
-          </a:prstGeom>
-          <a:solidFill>
-            <a:srgbClr val="2A2929"/>
-          </a:solidFill>
-          <a:ln>
-            <a:noFill/>
-          </a:ln>
-          <a:effectLst/>
-        </p:spPr>
-        <p:style>
-          <a:lnRef idx="1">
-            <a:schemeClr val="accent1"/>
-          </a:lnRef>
-          <a:fillRef idx="3">
-            <a:schemeClr val="accent1"/>
-          </a:fillRef>
-          <a:effectRef idx="2">
-            <a:schemeClr val="accent1"/>
-          </a:effectRef>
-          <a:fontRef idx="minor">
-            <a:schemeClr val="lt1"/>
-          </a:fontRef>
-        </p:style>
-        <p:txBody>
-          <a:bodyPr rtlCol="0" anchor="ctr"/>
-          <a:lstStyle/>
-          <a:p>
-            <a:pPr algn="ctr"/>
-            <a:r>
-              <a:rPr sz="1400" b="1" i="0">
-                <a:solidFill>
-                  <a:srgbClr val="FBB900"/>
-                </a:solidFill>
-                <a:latin typeface="Roboto"/>
-              </a:rPr>
-              <a:t>ACTIVITY</a:t>
-            </a:r>
-          </a:p>
-        </p:txBody>
-      </p:sp>
-      <p:sp>
-        <p:nvSpPr>
-          <p:cNvPr id="4" name="TextBox 3"/>
-          <p:cNvSpPr txBox="1"/>
-          <p:nvPr/>
-        </p:nvSpPr>
-        <p:spPr>
-          <a:xfrm>
-            <a:off x="2560320" y="310896"/>
-            <a:ext cx="8961120" cy="685800"/>
-          </a:xfrm>
-          <a:prstGeom prst="rect">
-            <a:avLst/>
-          </a:prstGeom>
-          <a:noFill/>
-        </p:spPr>
-        <p:txBody>
-          <a:bodyPr wrap="square" anchor="ctr" lIns="0" rIns="0" tIns="0" bIns="0">
-            <a:spAutoFit/>
-          </a:bodyPr>
-          <a:lstStyle/>
-          <a:p>
-            <a:r>
-              <a:rPr sz="2600" b="1" i="0">
-                <a:solidFill>
-                  <a:srgbClr val="FFFFFF"/>
-                </a:solidFill>
-                <a:latin typeface="Roboto"/>
-              </a:rPr>
-              <a:t>Test &amp; confirm</a:t>
-            </a:r>
-          </a:p>
-        </p:txBody>
-      </p:sp>
-      <p:sp>
-        <p:nvSpPr>
-          <p:cNvPr id="5" name="TextBox 4"/>
-          <p:cNvSpPr txBox="1"/>
-          <p:nvPr/>
-        </p:nvSpPr>
-        <p:spPr>
-          <a:xfrm>
-            <a:off x="658368" y="1554480"/>
-            <a:ext cx="10881360" cy="4297680"/>
-          </a:xfrm>
-          <a:prstGeom prst="rect">
-            <a:avLst/>
-          </a:prstGeom>
-          <a:noFill/>
-        </p:spPr>
-        <p:txBody>
-          <a:bodyPr wrap="square" anchor="t" lIns="0" rIns="0" tIns="0" bIns="0">
-            <a:spAutoFit/>
-          </a:bodyPr>
-          <a:lstStyle/>
-          <a:p>
-            <a:pPr marL="0" indent="0">
-              <a:lnSpc>
-                <a:spcPct val="105000"/>
-              </a:lnSpc>
-              <a:spcBef>
-                <a:spcPts val="0"/>
-              </a:spcBef>
-              <a:spcAft>
-                <a:spcPts val="1000"/>
-              </a:spcAft>
-            </a:pPr>
-            <a:r>
-              <a:rPr sz="1700" b="1" i="0">
-                <a:solidFill>
-                  <a:srgbClr val="EDAB0C"/>
-                </a:solidFill>
-                <a:latin typeface="Roboto"/>
-              </a:rPr>
-              <a:t>■  </a:t>
-            </a:r>
-            <a:r>
-              <a:rPr sz="1700" b="0" i="0">
-                <a:solidFill>
-                  <a:srgbClr val="2A2929"/>
-                </a:solidFill>
-                <a:latin typeface="Roboto"/>
-              </a:rPr>
-              <a:t>On the practice scenario, post sample events and confirm each is recorded exactly once; confirm an invalid event is rejected.</a:t>
-            </a:r>
-          </a:p>
-        </p:txBody>
-      </p:sp>
-      <p:sp>
-        <p:nvSpPr>
-          <p:cNvPr id="6" name="Rounded Rectangle 5"/>
-          <p:cNvSpPr/>
-          <p:nvPr/>
-        </p:nvSpPr>
-        <p:spPr>
-          <a:xfrm>
-            <a:off x="640080" y="5897880"/>
-            <a:ext cx="4023360" cy="457200"/>
-          </a:xfrm>
-          <a:prstGeom prst="roundRect">
-            <a:avLst/>
-          </a:prstGeom>
-          <a:solidFill>
-            <a:srgbClr val="F9F9F9"/>
-          </a:solidFill>
-          <a:ln w="12700">
-            <a:solidFill>
-              <a:srgbClr val="CCCCCC"/>
-            </a:solidFill>
-          </a:ln>
-          <a:effectLst/>
-        </p:spPr>
-        <p:style>
-          <a:lnRef idx="1">
-            <a:schemeClr val="accent1"/>
-          </a:lnRef>
-          <a:fillRef idx="3">
-            <a:schemeClr val="accent1"/>
-          </a:fillRef>
-          <a:effectRef idx="2">
-            <a:schemeClr val="accent1"/>
-          </a:effectRef>
-          <a:fontRef idx="minor">
-            <a:schemeClr val="lt1"/>
-          </a:fontRef>
-        </p:style>
-        <p:txBody>
-          <a:bodyPr rtlCol="0" anchor="ctr"/>
-          <a:lstStyle/>
-          <a:p>
-            <a:pPr algn="ctr"/>
-          </a:p>
-        </p:txBody>
-      </p:sp>
-      <p:sp>
-        <p:nvSpPr>
-          <p:cNvPr id="7" name="TextBox 6"/>
-          <p:cNvSpPr txBox="1"/>
-          <p:nvPr/>
-        </p:nvSpPr>
-        <p:spPr>
-          <a:xfrm>
-            <a:off x="822960" y="5943600"/>
-            <a:ext cx="3657600" cy="365760"/>
-          </a:xfrm>
-          <a:prstGeom prst="rect">
-            <a:avLst/>
-          </a:prstGeom>
-          <a:noFill/>
-        </p:spPr>
-        <p:txBody>
-          <a:bodyPr wrap="square" anchor="ctr" lIns="0" rIns="0" tIns="0" bIns="0">
-            <a:spAutoFit/>
-          </a:bodyPr>
-          <a:lstStyle/>
-          <a:p>
-            <a:r>
-              <a:rPr sz="1500" b="1" i="0">
-                <a:solidFill>
-                  <a:srgbClr val="2A2929"/>
-                </a:solidFill>
-                <a:latin typeface="Roboto"/>
-              </a:rPr>
-              <a:t>⏱  ~20 min</a:t>
-            </a:r>
-          </a:p>
-        </p:txBody>
-      </p:sp>
-      <p:sp>
-        <p:nvSpPr>
-          <p:cNvPr id="8" name="Rectangle 7"/>
-          <p:cNvSpPr/>
-          <p:nvPr/>
-        </p:nvSpPr>
-        <p:spPr>
-          <a:xfrm>
-            <a:off x="0" y="6565392"/>
-            <a:ext cx="12191695" cy="38100"/>
-          </a:xfrm>
-          <a:prstGeom prst="rect">
-            <a:avLst/>
-          </a:prstGeom>
-          <a:solidFill>
-            <a:srgbClr val="205F61"/>
-          </a:solidFill>
-          <a:ln>
-            <a:noFill/>
-          </a:ln>
-          <a:effectLst/>
-        </p:spPr>
-        <p:style>
-          <a:lnRef idx="1">
-            <a:schemeClr val="accent1"/>
-          </a:lnRef>
-          <a:fillRef idx="3">
-            <a:schemeClr val="accent1"/>
-          </a:fillRef>
-          <a:effectRef idx="2">
-            <a:schemeClr val="accent1"/>
-          </a:effectRef>
-          <a:fontRef idx="minor">
-            <a:schemeClr val="lt1"/>
-          </a:fontRef>
-        </p:style>
-        <p:txBody>
-          <a:bodyPr rtlCol="0" anchor="ctr"/>
-          <a:lstStyle/>
-          <a:p>
-            <a:pPr algn="ctr"/>
-          </a:p>
-        </p:txBody>
-      </p:sp>
-      <p:sp>
-        <p:nvSpPr>
-          <p:cNvPr id="9" name="TextBox 8"/>
-          <p:cNvSpPr txBox="1"/>
-          <p:nvPr/>
-        </p:nvSpPr>
-        <p:spPr>
-          <a:xfrm>
-            <a:off x="502920" y="6400800"/>
-            <a:ext cx="5486400" cy="320040"/>
-          </a:xfrm>
-          <a:prstGeom prst="rect">
-            <a:avLst/>
-          </a:prstGeom>
-          <a:noFill/>
-        </p:spPr>
-        <p:txBody>
-          <a:bodyPr wrap="square" anchor="t" lIns="0" rIns="0" tIns="0" bIns="0">
-            <a:spAutoFit/>
-          </a:bodyPr>
-          <a:lstStyle/>
-          <a:p>
-            <a:r>
-              <a:rPr sz="1100" b="1" i="0">
-                <a:solidFill>
-                  <a:srgbClr val="2A2929"/>
-                </a:solidFill>
-                <a:latin typeface="Roboto"/>
-              </a:rPr>
-              <a:t>Kangan </a:t>
-            </a:r>
-            <a:r>
-              <a:rPr sz="1100" b="1" i="0">
-                <a:solidFill>
-                  <a:srgbClr val="D68E10"/>
-                </a:solidFill>
-                <a:latin typeface="Roboto"/>
-              </a:rPr>
-              <a:t>Institute</a:t>
-            </a:r>
-          </a:p>
-        </p:txBody>
-      </p:sp>
-      <p:sp>
-        <p:nvSpPr>
-          <p:cNvPr id="10" name="TextBox 9"/>
-          <p:cNvSpPr txBox="1"/>
-          <p:nvPr/>
-        </p:nvSpPr>
-        <p:spPr>
-          <a:xfrm>
-            <a:off x="10515600" y="6400800"/>
-            <a:ext cx="1188720" cy="320040"/>
-          </a:xfrm>
-          <a:prstGeom prst="rect">
-            <a:avLst/>
-          </a:prstGeom>
-          <a:noFill/>
-        </p:spPr>
-        <p:txBody>
-          <a:bodyPr wrap="square" anchor="t" lIns="0" rIns="0" tIns="0" bIns="0">
-            <a:spAutoFit/>
-          </a:bodyPr>
-          <a:lstStyle/>
-          <a:p>
-            <a:pPr algn="r"/>
-            <a:r>
-              <a:rPr sz="1100" b="0" i="0">
-                <a:solidFill>
-                  <a:srgbClr val="7A7A7A"/>
-                </a:solidFill>
-                <a:latin typeface="Roboto"/>
-              </a:rPr>
-              <a:t>9</a:t>
-            </a:r>
-          </a:p>
-        </p:txBody>
-      </p:sp>
-    </p:spTree>
-  </p:cSld>
-  <p:clrMapOvr>
-    <a:masterClrMapping/>
-  </p:clrMapOvr>
-</p:sld>
-</file>
-
-<file path=ppt/slides/slide14.xml><?xml version="1.0" encoding="utf-8"?>
-<p:sld xmlns:a="http://schemas.openxmlformats.org/drawingml/2006/main" xmlns:p="http://schemas.openxmlformats.org/presentationml/2006/main" xmlns:r="http://schemas.openxmlformats.org/officeDocument/2006/relationships">
-  <p:cSld>
-    <p:bg>
-      <p:bgPr>
-        <a:solidFill>
-          <a:srgbClr val="FFFFFF"/>
-        </a:solidFill>
-        <a:effectLst/>
-      </p:bgPr>
-    </p:bg>
-    <p:spTree>
-      <p:nvGrpSpPr>
-        <p:cNvPr id="1" name=""/>
-        <p:cNvGrpSpPr/>
-        <p:nvPr/>
-      </p:nvGrpSpPr>
-      <p:grpSpPr/>
-      <p:sp>
-        <p:nvSpPr>
-          <p:cNvPr id="2" name="Rectangle 1"/>
-          <p:cNvSpPr/>
-          <p:nvPr/>
-        </p:nvSpPr>
-        <p:spPr>
-          <a:xfrm>
-            <a:off x="0" y="0"/>
-            <a:ext cx="3931920" cy="6858000"/>
-          </a:xfrm>
-          <a:prstGeom prst="rect">
-            <a:avLst/>
-          </a:prstGeom>
-          <a:solidFill>
-            <a:srgbClr val="004488"/>
-          </a:solidFill>
-          <a:ln>
-            <a:noFill/>
-          </a:ln>
-          <a:effectLst/>
-        </p:spPr>
-        <p:style>
-          <a:lnRef idx="1">
-            <a:schemeClr val="accent1"/>
-          </a:lnRef>
-          <a:fillRef idx="3">
-            <a:schemeClr val="accent1"/>
-          </a:fillRef>
-          <a:effectRef idx="2">
-            <a:schemeClr val="accent1"/>
-          </a:effectRef>
-          <a:fontRef idx="minor">
-            <a:schemeClr val="lt1"/>
-          </a:fontRef>
-        </p:style>
-        <p:txBody>
-          <a:bodyPr rtlCol="0" anchor="ctr"/>
-          <a:lstStyle/>
-          <a:p>
-            <a:pPr algn="ctr"/>
-          </a:p>
-        </p:txBody>
-      </p:sp>
-      <p:sp>
-        <p:nvSpPr>
-          <p:cNvPr id="3" name="TextBox 2"/>
-          <p:cNvSpPr txBox="1"/>
-          <p:nvPr/>
-        </p:nvSpPr>
-        <p:spPr>
-          <a:xfrm>
-            <a:off x="365760" y="2103120"/>
-            <a:ext cx="3291840" cy="2194560"/>
-          </a:xfrm>
-          <a:prstGeom prst="rect">
-            <a:avLst/>
-          </a:prstGeom>
-          <a:noFill/>
-        </p:spPr>
-        <p:txBody>
-          <a:bodyPr wrap="square" anchor="t" lIns="0" rIns="0" tIns="0" bIns="0">
-            <a:spAutoFit/>
-          </a:bodyPr>
-          <a:lstStyle/>
-          <a:p>
-            <a:r>
-              <a:rPr sz="13000" b="1" i="0">
-                <a:solidFill>
-                  <a:srgbClr val="FFFFFF"/>
-                </a:solidFill>
-                <a:latin typeface="Roboto"/>
-              </a:rPr>
-              <a:t>04</a:t>
-            </a:r>
-          </a:p>
-        </p:txBody>
-      </p:sp>
-      <p:sp>
-        <p:nvSpPr>
-          <p:cNvPr id="4" name="TextBox 3"/>
-          <p:cNvSpPr txBox="1"/>
-          <p:nvPr/>
-        </p:nvSpPr>
-        <p:spPr>
-          <a:xfrm>
-            <a:off x="4480560" y="2468880"/>
-            <a:ext cx="7132320" cy="2194560"/>
-          </a:xfrm>
-          <a:prstGeom prst="rect">
-            <a:avLst/>
-          </a:prstGeom>
-          <a:noFill/>
-        </p:spPr>
-        <p:txBody>
-          <a:bodyPr wrap="square" anchor="t" lIns="0" rIns="0" tIns="0" bIns="0">
-            <a:spAutoFit/>
-          </a:bodyPr>
-          <a:lstStyle/>
-          <a:p>
-            <a:r>
-              <a:rPr sz="1600" b="1" i="0">
-                <a:solidFill>
-                  <a:srgbClr val="004488"/>
-                </a:solidFill>
-                <a:latin typeface="Roboto"/>
-              </a:rPr>
-              <a:t>SECTION</a:t>
-            </a:r>
-          </a:p>
-          <a:p>
-            <a:pPr>
-              <a:spcBef>
-                <a:spcPts val="600"/>
-              </a:spcBef>
-            </a:pPr>
-            <a:r>
-              <a:rPr sz="3800" b="1" i="0">
-                <a:solidFill>
-                  <a:srgbClr val="2A2929"/>
-                </a:solidFill>
-                <a:latin typeface="Roboto"/>
-              </a:rPr>
-              <a:t>Troubleshoot</a:t>
-            </a:r>
-          </a:p>
-          <a:p>
-            <a:pPr>
-              <a:spcBef>
-                <a:spcPts val="1000"/>
-              </a:spcBef>
-            </a:pPr>
-            <a:r>
-              <a:rPr sz="2000" b="0" i="1">
-                <a:solidFill>
-                  <a:srgbClr val="484848"/>
-                </a:solidFill>
-                <a:latin typeface="Roboto Light"/>
-              </a:rPr>
-              <a:t>the logs tell you why</a:t>
-            </a:r>
-          </a:p>
-        </p:txBody>
-      </p:sp>
-      <p:sp>
-        <p:nvSpPr>
-          <p:cNvPr id="5" name="Rectangle 4"/>
-          <p:cNvSpPr/>
-          <p:nvPr/>
-        </p:nvSpPr>
-        <p:spPr>
-          <a:xfrm>
-            <a:off x="0" y="6565392"/>
-            <a:ext cx="12191695" cy="38100"/>
-          </a:xfrm>
-          <a:prstGeom prst="rect">
-            <a:avLst/>
-          </a:prstGeom>
-          <a:solidFill>
-            <a:srgbClr val="004488"/>
-          </a:solidFill>
-          <a:ln>
-            <a:noFill/>
-          </a:ln>
-          <a:effectLst/>
-        </p:spPr>
-        <p:style>
-          <a:lnRef idx="1">
-            <a:schemeClr val="accent1"/>
-          </a:lnRef>
-          <a:fillRef idx="3">
-            <a:schemeClr val="accent1"/>
-          </a:fillRef>
-          <a:effectRef idx="2">
-            <a:schemeClr val="accent1"/>
-          </a:effectRef>
-          <a:fontRef idx="minor">
-            <a:schemeClr val="lt1"/>
-          </a:fontRef>
-        </p:style>
-        <p:txBody>
-          <a:bodyPr rtlCol="0" anchor="ctr"/>
-          <a:lstStyle/>
-          <a:p>
-            <a:pPr algn="ctr"/>
-          </a:p>
-        </p:txBody>
-      </p:sp>
-      <p:sp>
-        <p:nvSpPr>
-          <p:cNvPr id="6" name="TextBox 5"/>
-          <p:cNvSpPr txBox="1"/>
-          <p:nvPr/>
-        </p:nvSpPr>
-        <p:spPr>
-          <a:xfrm>
-            <a:off x="502920" y="6400800"/>
-            <a:ext cx="5486400" cy="320040"/>
-          </a:xfrm>
-          <a:prstGeom prst="rect">
-            <a:avLst/>
-          </a:prstGeom>
-          <a:noFill/>
-        </p:spPr>
-        <p:txBody>
-          <a:bodyPr wrap="square" anchor="t" lIns="0" rIns="0" tIns="0" bIns="0">
-            <a:spAutoFit/>
-          </a:bodyPr>
-          <a:lstStyle/>
-          <a:p>
-            <a:r>
-              <a:rPr sz="1100" b="1" i="0">
-                <a:solidFill>
-                  <a:srgbClr val="2A2929"/>
-                </a:solidFill>
-                <a:latin typeface="Roboto"/>
-              </a:rPr>
-              <a:t>Kangan </a:t>
-            </a:r>
-            <a:r>
-              <a:rPr sz="1100" b="1" i="0">
-                <a:solidFill>
-                  <a:srgbClr val="D68E10"/>
-                </a:solidFill>
-                <a:latin typeface="Roboto"/>
-              </a:rPr>
-              <a:t>Institute</a:t>
-            </a:r>
-          </a:p>
-        </p:txBody>
-      </p:sp>
-      <p:sp>
-        <p:nvSpPr>
-          <p:cNvPr id="7" name="TextBox 6"/>
-          <p:cNvSpPr txBox="1"/>
-          <p:nvPr/>
-        </p:nvSpPr>
-        <p:spPr>
-          <a:xfrm>
-            <a:off x="10515600" y="6400800"/>
-            <a:ext cx="1188720" cy="320040"/>
-          </a:xfrm>
-          <a:prstGeom prst="rect">
-            <a:avLst/>
-          </a:prstGeom>
-          <a:noFill/>
-        </p:spPr>
-        <p:txBody>
-          <a:bodyPr wrap="square" anchor="t" lIns="0" rIns="0" tIns="0" bIns="0">
-            <a:spAutoFit/>
-          </a:bodyPr>
-          <a:lstStyle/>
-          <a:p>
-            <a:pPr algn="r"/>
-            <a:r>
-              <a:rPr sz="1100" b="0" i="0">
-                <a:solidFill>
-                  <a:srgbClr val="7A7A7A"/>
-                </a:solidFill>
-                <a:latin typeface="Roboto"/>
-              </a:rPr>
-              <a:t/>
-            </a:r>
-          </a:p>
-        </p:txBody>
-      </p:sp>
-    </p:spTree>
-  </p:cSld>
-  <p:clrMapOvr>
-    <a:masterClrMapping/>
-  </p:clrMapOvr>
-</p:sld>
-</file>
-
-<file path=ppt/slides/slide15.xml><?xml version="1.0" encoding="utf-8"?>
-<p:sld xmlns:a="http://schemas.openxmlformats.org/drawingml/2006/main" xmlns:p="http://schemas.openxmlformats.org/presentationml/2006/main" xmlns:r="http://schemas.openxmlformats.org/officeDocument/2006/relationships">
-  <p:cSld>
-    <p:bg>
-      <p:bgPr>
-        <a:solidFill>
-          <a:srgbClr val="FFFFFF"/>
-        </a:solidFill>
-        <a:effectLst/>
-      </p:bgPr>
-    </p:bg>
-    <p:spTree>
-      <p:nvGrpSpPr>
-        <p:cNvPr id="1" name=""/>
-        <p:cNvGrpSpPr/>
-        <p:nvPr/>
-      </p:nvGrpSpPr>
-      <p:grpSpPr/>
-      <p:sp>
-        <p:nvSpPr>
-          <p:cNvPr id="2" name="TextBox 1"/>
-          <p:cNvSpPr txBox="1"/>
-          <p:nvPr/>
-        </p:nvSpPr>
-        <p:spPr>
-          <a:xfrm>
-            <a:off x="640080" y="457200"/>
-            <a:ext cx="10881360" cy="960120"/>
-          </a:xfrm>
-          <a:prstGeom prst="rect">
-            <a:avLst/>
-          </a:prstGeom>
-          <a:noFill/>
-        </p:spPr>
-        <p:txBody>
-          <a:bodyPr wrap="square" anchor="t" lIns="0" rIns="0" tIns="0" bIns="0">
-            <a:spAutoFit/>
-          </a:bodyPr>
-          <a:lstStyle/>
-          <a:p>
-            <a:r>
-              <a:rPr sz="2800" b="1" i="0">
-                <a:solidFill>
-                  <a:srgbClr val="2A2929"/>
-                </a:solidFill>
-                <a:latin typeface="Roboto"/>
-              </a:rPr>
-              <a:t>Diagnose from the logs</a:t>
-            </a:r>
-          </a:p>
-        </p:txBody>
-      </p:sp>
-      <p:sp>
-        <p:nvSpPr>
-          <p:cNvPr id="3" name="Rectangle 2"/>
-          <p:cNvSpPr/>
-          <p:nvPr/>
-        </p:nvSpPr>
-        <p:spPr>
-          <a:xfrm>
-            <a:off x="658368" y="1371600"/>
-            <a:ext cx="1463040" cy="50800"/>
-          </a:xfrm>
-          <a:prstGeom prst="rect">
-            <a:avLst/>
-          </a:prstGeom>
-          <a:solidFill>
-            <a:srgbClr val="004488"/>
-          </a:solidFill>
-          <a:ln>
-            <a:noFill/>
-          </a:ln>
-          <a:effectLst/>
-        </p:spPr>
-        <p:style>
-          <a:lnRef idx="1">
-            <a:schemeClr val="accent1"/>
-          </a:lnRef>
-          <a:fillRef idx="3">
-            <a:schemeClr val="accent1"/>
-          </a:fillRef>
-          <a:effectRef idx="2">
-            <a:schemeClr val="accent1"/>
-          </a:effectRef>
-          <a:fontRef idx="minor">
-            <a:schemeClr val="lt1"/>
-          </a:fontRef>
-        </p:style>
-        <p:txBody>
-          <a:bodyPr rtlCol="0" anchor="ctr"/>
-          <a:lstStyle/>
-          <a:p>
-            <a:pPr algn="ctr"/>
-          </a:p>
-        </p:txBody>
-      </p:sp>
-      <p:sp>
-        <p:nvSpPr>
-          <p:cNvPr id="4" name="TextBox 3"/>
-          <p:cNvSpPr txBox="1"/>
-          <p:nvPr/>
-        </p:nvSpPr>
-        <p:spPr>
-          <a:xfrm>
-            <a:off x="658368" y="1691640"/>
-            <a:ext cx="10881360" cy="4480560"/>
-          </a:xfrm>
-          <a:prstGeom prst="rect">
-            <a:avLst/>
-          </a:prstGeom>
-          <a:noFill/>
-        </p:spPr>
-        <p:txBody>
-          <a:bodyPr wrap="square" anchor="ctr" lIns="0" rIns="0" tIns="0" bIns="0">
-            <a:spAutoFit/>
-          </a:bodyPr>
-          <a:lstStyle/>
-          <a:p>
-            <a:pPr marL="0" indent="0">
-              <a:lnSpc>
-                <a:spcPct val="105000"/>
-              </a:lnSpc>
-              <a:spcBef>
-                <a:spcPts val="0"/>
-              </a:spcBef>
-              <a:spcAft>
-                <a:spcPts val="1000"/>
-              </a:spcAft>
-            </a:pPr>
-            <a:r>
-              <a:rPr sz="2400" b="1" i="0">
-                <a:solidFill>
-                  <a:srgbClr val="EDAB0C"/>
-                </a:solidFill>
-                <a:latin typeface="Roboto"/>
-              </a:rPr>
-              <a:t>■  </a:t>
-            </a:r>
-            <a:r>
-              <a:rPr sz="2400" b="0" i="0">
-                <a:solidFill>
-                  <a:srgbClr val="2A2929"/>
-                </a:solidFill>
-                <a:latin typeface="Roboto"/>
-              </a:rPr>
-              <a:t>Troubleshoot and fix microservice errors: a permission error, a payload-validation bug, a mis-wired event source.</a:t>
-            </a:r>
-          </a:p>
-          <a:p>
-            <a:pPr marL="0" indent="0">
-              <a:lnSpc>
-                <a:spcPct val="105000"/>
-              </a:lnSpc>
-              <a:spcBef>
-                <a:spcPts val="0"/>
-              </a:spcBef>
-              <a:spcAft>
-                <a:spcPts val="1000"/>
-              </a:spcAft>
-            </a:pPr>
-            <a:r>
-              <a:rPr sz="2400" b="1" i="0">
-                <a:solidFill>
-                  <a:srgbClr val="EDAB0C"/>
-                </a:solidFill>
-                <a:latin typeface="Roboto"/>
-              </a:rPr>
-              <a:t>■  </a:t>
-            </a:r>
-            <a:r>
-              <a:rPr sz="2400" b="0" i="0">
-                <a:solidFill>
-                  <a:srgbClr val="2A2929"/>
-                </a:solidFill>
-                <a:latin typeface="Roboto"/>
-              </a:rPr>
-              <a:t>Read the function logs and the queue/dead-letter behaviour — the failure is recorded, find it (KE 5).</a:t>
-            </a:r>
-          </a:p>
-          <a:p>
-            <a:pPr marL="0" indent="0">
-              <a:lnSpc>
-                <a:spcPct val="105000"/>
-              </a:lnSpc>
-              <a:spcBef>
-                <a:spcPts val="0"/>
-              </a:spcBef>
-              <a:spcAft>
-                <a:spcPts val="1000"/>
-              </a:spcAft>
-            </a:pPr>
-            <a:r>
-              <a:rPr sz="2400" b="1" i="0">
-                <a:solidFill>
-                  <a:srgbClr val="EDAB0C"/>
-                </a:solidFill>
-                <a:latin typeface="Roboto"/>
-              </a:rPr>
-              <a:t>■  </a:t>
-            </a:r>
-            <a:r>
-              <a:rPr sz="2400" b="0" i="0">
-                <a:solidFill>
-                  <a:srgbClr val="2A2929"/>
-                </a:solidFill>
-                <a:latin typeface="Roboto"/>
-              </a:rPr>
-              <a:t>Fix, redeploy, re-test — confirm the record now writes.</a:t>
-            </a:r>
-          </a:p>
-        </p:txBody>
-      </p:sp>
-      <p:sp>
-        <p:nvSpPr>
-          <p:cNvPr id="5" name="Rectangle 4"/>
-          <p:cNvSpPr/>
-          <p:nvPr/>
-        </p:nvSpPr>
-        <p:spPr>
-          <a:xfrm>
-            <a:off x="0" y="6565392"/>
-            <a:ext cx="12191695" cy="38100"/>
-          </a:xfrm>
-          <a:prstGeom prst="rect">
-            <a:avLst/>
-          </a:prstGeom>
-          <a:solidFill>
-            <a:srgbClr val="004488"/>
-          </a:solidFill>
-          <a:ln>
-            <a:noFill/>
-          </a:ln>
-          <a:effectLst/>
-        </p:spPr>
-        <p:style>
-          <a:lnRef idx="1">
-            <a:schemeClr val="accent1"/>
-          </a:lnRef>
-          <a:fillRef idx="3">
-            <a:schemeClr val="accent1"/>
-          </a:fillRef>
-          <a:effectRef idx="2">
-            <a:schemeClr val="accent1"/>
-          </a:effectRef>
-          <a:fontRef idx="minor">
-            <a:schemeClr val="lt1"/>
-          </a:fontRef>
-        </p:style>
-        <p:txBody>
-          <a:bodyPr rtlCol="0" anchor="ctr"/>
-          <a:lstStyle/>
-          <a:p>
-            <a:pPr algn="ctr"/>
-          </a:p>
-        </p:txBody>
-      </p:sp>
-      <p:sp>
-        <p:nvSpPr>
-          <p:cNvPr id="6" name="TextBox 5"/>
-          <p:cNvSpPr txBox="1"/>
-          <p:nvPr/>
-        </p:nvSpPr>
-        <p:spPr>
-          <a:xfrm>
-            <a:off x="502920" y="6400800"/>
-            <a:ext cx="5486400" cy="320040"/>
-          </a:xfrm>
-          <a:prstGeom prst="rect">
-            <a:avLst/>
-          </a:prstGeom>
-          <a:noFill/>
-        </p:spPr>
-        <p:txBody>
-          <a:bodyPr wrap="square" anchor="t" lIns="0" rIns="0" tIns="0" bIns="0">
-            <a:spAutoFit/>
-          </a:bodyPr>
-          <a:lstStyle/>
-          <a:p>
-            <a:r>
-              <a:rPr sz="1100" b="1" i="0">
-                <a:solidFill>
-                  <a:srgbClr val="2A2929"/>
-                </a:solidFill>
-                <a:latin typeface="Roboto"/>
-              </a:rPr>
-              <a:t>Kangan </a:t>
-            </a:r>
-            <a:r>
-              <a:rPr sz="1100" b="1" i="0">
-                <a:solidFill>
-                  <a:srgbClr val="D68E10"/>
-                </a:solidFill>
-                <a:latin typeface="Roboto"/>
-              </a:rPr>
-              <a:t>Institute</a:t>
-            </a:r>
-          </a:p>
-        </p:txBody>
-      </p:sp>
-      <p:sp>
-        <p:nvSpPr>
-          <p:cNvPr id="7" name="TextBox 6"/>
-          <p:cNvSpPr txBox="1"/>
-          <p:nvPr/>
-        </p:nvSpPr>
-        <p:spPr>
-          <a:xfrm>
-            <a:off x="10515600" y="6400800"/>
-            <a:ext cx="1188720" cy="320040"/>
-          </a:xfrm>
-          <a:prstGeom prst="rect">
-            <a:avLst/>
-          </a:prstGeom>
-          <a:noFill/>
-        </p:spPr>
-        <p:txBody>
-          <a:bodyPr wrap="square" anchor="t" lIns="0" rIns="0" tIns="0" bIns="0">
-            <a:spAutoFit/>
-          </a:bodyPr>
-          <a:lstStyle/>
-          <a:p>
-            <a:pPr algn="r"/>
-            <a:r>
-              <a:rPr sz="1100" b="0" i="0">
-                <a:solidFill>
-                  <a:srgbClr val="7A7A7A"/>
-                </a:solidFill>
-                <a:latin typeface="Roboto"/>
-              </a:rPr>
-              <a:t>10</a:t>
-            </a:r>
-          </a:p>
-        </p:txBody>
-      </p:sp>
-    </p:spTree>
-  </p:cSld>
-  <p:clrMapOvr>
-    <a:masterClrMapping/>
-  </p:clrMapOvr>
-</p:sld>
-</file>
-
-<file path=ppt/slides/slide16.xml><?xml version="1.0" encoding="utf-8"?>
-<p:sld xmlns:a="http://schemas.openxmlformats.org/drawingml/2006/main" xmlns:p="http://schemas.openxmlformats.org/presentationml/2006/main" xmlns:r="http://schemas.openxmlformats.org/officeDocument/2006/relationships">
-  <p:cSld>
-    <p:bg>
-      <p:bgPr>
-        <a:solidFill>
-          <a:srgbClr val="FFFFFF"/>
-        </a:solidFill>
-        <a:effectLst/>
-      </p:bgPr>
-    </p:bg>
-    <p:spTree>
-      <p:nvGrpSpPr>
-        <p:cNvPr id="1" name=""/>
-        <p:cNvGrpSpPr/>
-        <p:nvPr/>
-      </p:nvGrpSpPr>
-      <p:grpSpPr/>
-      <p:sp>
-        <p:nvSpPr>
-          <p:cNvPr id="2" name="Rectangle 1"/>
-          <p:cNvSpPr/>
-          <p:nvPr/>
-        </p:nvSpPr>
-        <p:spPr>
-          <a:xfrm>
-            <a:off x="0" y="0"/>
-            <a:ext cx="12191695" cy="1234440"/>
-          </a:xfrm>
-          <a:prstGeom prst="rect">
-            <a:avLst/>
-          </a:prstGeom>
-          <a:solidFill>
-            <a:srgbClr val="004488"/>
-          </a:solidFill>
-          <a:ln>
-            <a:noFill/>
-          </a:ln>
-          <a:effectLst/>
-        </p:spPr>
-        <p:style>
-          <a:lnRef idx="1">
-            <a:schemeClr val="accent1"/>
-          </a:lnRef>
-          <a:fillRef idx="3">
-            <a:schemeClr val="accent1"/>
-          </a:fillRef>
-          <a:effectRef idx="2">
-            <a:schemeClr val="accent1"/>
-          </a:effectRef>
-          <a:fontRef idx="minor">
-            <a:schemeClr val="lt1"/>
-          </a:fontRef>
-        </p:style>
-        <p:txBody>
-          <a:bodyPr rtlCol="0" anchor="ctr"/>
-          <a:lstStyle/>
-          <a:p>
-            <a:pPr algn="ctr"/>
-          </a:p>
-        </p:txBody>
-      </p:sp>
-      <p:sp>
-        <p:nvSpPr>
-          <p:cNvPr id="3" name="Rounded Rectangle 2"/>
-          <p:cNvSpPr/>
-          <p:nvPr/>
-        </p:nvSpPr>
-        <p:spPr>
-          <a:xfrm>
-            <a:off x="640080" y="384048"/>
-            <a:ext cx="1691640" cy="457200"/>
-          </a:xfrm>
-          <a:prstGeom prst="roundRect">
-            <a:avLst/>
-          </a:prstGeom>
-          <a:solidFill>
-            <a:srgbClr val="2A2929"/>
-          </a:solidFill>
-          <a:ln>
-            <a:noFill/>
-          </a:ln>
-          <a:effectLst/>
-        </p:spPr>
-        <p:style>
-          <a:lnRef idx="1">
-            <a:schemeClr val="accent1"/>
-          </a:lnRef>
-          <a:fillRef idx="3">
-            <a:schemeClr val="accent1"/>
-          </a:fillRef>
-          <a:effectRef idx="2">
-            <a:schemeClr val="accent1"/>
-          </a:effectRef>
-          <a:fontRef idx="minor">
-            <a:schemeClr val="lt1"/>
-          </a:fontRef>
-        </p:style>
-        <p:txBody>
-          <a:bodyPr rtlCol="0" anchor="ctr"/>
-          <a:lstStyle/>
-          <a:p>
-            <a:pPr algn="ctr"/>
-            <a:r>
-              <a:rPr sz="1400" b="1" i="0">
-                <a:solidFill>
-                  <a:srgbClr val="FBB900"/>
-                </a:solidFill>
-                <a:latin typeface="Roboto"/>
-              </a:rPr>
-              <a:t>ACTIVITY</a:t>
-            </a:r>
-          </a:p>
-        </p:txBody>
-      </p:sp>
-      <p:sp>
-        <p:nvSpPr>
-          <p:cNvPr id="4" name="TextBox 3"/>
-          <p:cNvSpPr txBox="1"/>
-          <p:nvPr/>
-        </p:nvSpPr>
-        <p:spPr>
-          <a:xfrm>
-            <a:off x="2560320" y="310896"/>
-            <a:ext cx="8961120" cy="685800"/>
-          </a:xfrm>
-          <a:prstGeom prst="rect">
-            <a:avLst/>
-          </a:prstGeom>
-          <a:noFill/>
-        </p:spPr>
-        <p:txBody>
-          <a:bodyPr wrap="square" anchor="ctr" lIns="0" rIns="0" tIns="0" bIns="0">
-            <a:spAutoFit/>
-          </a:bodyPr>
-          <a:lstStyle/>
-          <a:p>
-            <a:r>
-              <a:rPr sz="2600" b="1" i="0">
-                <a:solidFill>
-                  <a:srgbClr val="FFFFFF"/>
-                </a:solidFill>
-                <a:latin typeface="Roboto"/>
-              </a:rPr>
-              <a:t>Troubleshoot the microservice</a:t>
-            </a:r>
-          </a:p>
-        </p:txBody>
-      </p:sp>
-      <p:sp>
-        <p:nvSpPr>
-          <p:cNvPr id="5" name="TextBox 4"/>
-          <p:cNvSpPr txBox="1"/>
-          <p:nvPr/>
-        </p:nvSpPr>
-        <p:spPr>
-          <a:xfrm>
-            <a:off x="658368" y="1554480"/>
-            <a:ext cx="10881360" cy="4297680"/>
-          </a:xfrm>
-          <a:prstGeom prst="rect">
-            <a:avLst/>
-          </a:prstGeom>
-          <a:noFill/>
-        </p:spPr>
-        <p:txBody>
-          <a:bodyPr wrap="square" anchor="t" lIns="0" rIns="0" tIns="0" bIns="0">
-            <a:spAutoFit/>
-          </a:bodyPr>
-          <a:lstStyle/>
-          <a:p>
-            <a:pPr marL="0" indent="0">
-              <a:lnSpc>
-                <a:spcPct val="105000"/>
-              </a:lnSpc>
-              <a:spcBef>
-                <a:spcPts val="0"/>
-              </a:spcBef>
-              <a:spcAft>
-                <a:spcPts val="1000"/>
-              </a:spcAft>
-            </a:pPr>
-            <a:r>
-              <a:rPr sz="1700" b="1" i="0">
-                <a:solidFill>
-                  <a:srgbClr val="EDAB0C"/>
-                </a:solidFill>
-                <a:latin typeface="Roboto"/>
-              </a:rPr>
-              <a:t>■  </a:t>
-            </a:r>
-            <a:r>
-              <a:rPr sz="1700" b="0" i="0">
-                <a:solidFill>
-                  <a:srgbClr val="2A2929"/>
-                </a:solidFill>
-                <a:latin typeface="Roboto"/>
-              </a:rPr>
-              <a:t>On the practice scenario, diagnose a seeded fault from the logs, fix it, redeploy, and confirm the event records.</a:t>
-            </a:r>
-          </a:p>
-        </p:txBody>
-      </p:sp>
-      <p:sp>
-        <p:nvSpPr>
-          <p:cNvPr id="6" name="Rounded Rectangle 5"/>
-          <p:cNvSpPr/>
-          <p:nvPr/>
-        </p:nvSpPr>
-        <p:spPr>
-          <a:xfrm>
-            <a:off x="640080" y="5897880"/>
-            <a:ext cx="4023360" cy="457200"/>
-          </a:xfrm>
-          <a:prstGeom prst="roundRect">
-            <a:avLst/>
-          </a:prstGeom>
-          <a:solidFill>
-            <a:srgbClr val="F9F9F9"/>
-          </a:solidFill>
-          <a:ln w="12700">
-            <a:solidFill>
-              <a:srgbClr val="CCCCCC"/>
-            </a:solidFill>
-          </a:ln>
-          <a:effectLst/>
-        </p:spPr>
-        <p:style>
-          <a:lnRef idx="1">
-            <a:schemeClr val="accent1"/>
-          </a:lnRef>
-          <a:fillRef idx="3">
-            <a:schemeClr val="accent1"/>
-          </a:fillRef>
-          <a:effectRef idx="2">
-            <a:schemeClr val="accent1"/>
-          </a:effectRef>
-          <a:fontRef idx="minor">
-            <a:schemeClr val="lt1"/>
-          </a:fontRef>
-        </p:style>
-        <p:txBody>
-          <a:bodyPr rtlCol="0" anchor="ctr"/>
-          <a:lstStyle/>
-          <a:p>
-            <a:pPr algn="ctr"/>
-          </a:p>
-        </p:txBody>
-      </p:sp>
-      <p:sp>
-        <p:nvSpPr>
-          <p:cNvPr id="7" name="TextBox 6"/>
-          <p:cNvSpPr txBox="1"/>
-          <p:nvPr/>
-        </p:nvSpPr>
-        <p:spPr>
-          <a:xfrm>
-            <a:off x="822960" y="5943600"/>
-            <a:ext cx="3657600" cy="365760"/>
-          </a:xfrm>
-          <a:prstGeom prst="rect">
-            <a:avLst/>
-          </a:prstGeom>
-          <a:noFill/>
-        </p:spPr>
-        <p:txBody>
-          <a:bodyPr wrap="square" anchor="ctr" lIns="0" rIns="0" tIns="0" bIns="0">
-            <a:spAutoFit/>
-          </a:bodyPr>
-          <a:lstStyle/>
-          <a:p>
-            <a:r>
-              <a:rPr sz="1500" b="1" i="0">
-                <a:solidFill>
-                  <a:srgbClr val="2A2929"/>
-                </a:solidFill>
-                <a:latin typeface="Roboto"/>
-              </a:rPr>
-              <a:t>⏱  ~20 min</a:t>
-            </a:r>
-          </a:p>
-        </p:txBody>
-      </p:sp>
-      <p:sp>
-        <p:nvSpPr>
-          <p:cNvPr id="8" name="Rectangle 7"/>
-          <p:cNvSpPr/>
-          <p:nvPr/>
-        </p:nvSpPr>
-        <p:spPr>
-          <a:xfrm>
-            <a:off x="0" y="6565392"/>
-            <a:ext cx="12191695" cy="38100"/>
-          </a:xfrm>
-          <a:prstGeom prst="rect">
-            <a:avLst/>
-          </a:prstGeom>
-          <a:solidFill>
-            <a:srgbClr val="004488"/>
-          </a:solidFill>
-          <a:ln>
-            <a:noFill/>
-          </a:ln>
-          <a:effectLst/>
-        </p:spPr>
-        <p:style>
-          <a:lnRef idx="1">
-            <a:schemeClr val="accent1"/>
-          </a:lnRef>
-          <a:fillRef idx="3">
-            <a:schemeClr val="accent1"/>
-          </a:fillRef>
-          <a:effectRef idx="2">
-            <a:schemeClr val="accent1"/>
-          </a:effectRef>
-          <a:fontRef idx="minor">
-            <a:schemeClr val="lt1"/>
-          </a:fontRef>
-        </p:style>
-        <p:txBody>
-          <a:bodyPr rtlCol="0" anchor="ctr"/>
-          <a:lstStyle/>
-          <a:p>
-            <a:pPr algn="ctr"/>
-          </a:p>
-        </p:txBody>
-      </p:sp>
-      <p:sp>
-        <p:nvSpPr>
-          <p:cNvPr id="9" name="TextBox 8"/>
-          <p:cNvSpPr txBox="1"/>
-          <p:nvPr/>
-        </p:nvSpPr>
-        <p:spPr>
-          <a:xfrm>
-            <a:off x="502920" y="6400800"/>
-            <a:ext cx="5486400" cy="320040"/>
-          </a:xfrm>
-          <a:prstGeom prst="rect">
-            <a:avLst/>
-          </a:prstGeom>
-          <a:noFill/>
-        </p:spPr>
-        <p:txBody>
-          <a:bodyPr wrap="square" anchor="t" lIns="0" rIns="0" tIns="0" bIns="0">
-            <a:spAutoFit/>
-          </a:bodyPr>
-          <a:lstStyle/>
-          <a:p>
-            <a:r>
-              <a:rPr sz="1100" b="1" i="0">
-                <a:solidFill>
-                  <a:srgbClr val="2A2929"/>
-                </a:solidFill>
-                <a:latin typeface="Roboto"/>
-              </a:rPr>
-              <a:t>Kangan </a:t>
-            </a:r>
-            <a:r>
-              <a:rPr sz="1100" b="1" i="0">
-                <a:solidFill>
-                  <a:srgbClr val="D68E10"/>
-                </a:solidFill>
-                <a:latin typeface="Roboto"/>
-              </a:rPr>
-              <a:t>Institute</a:t>
-            </a:r>
-          </a:p>
-        </p:txBody>
-      </p:sp>
-      <p:sp>
-        <p:nvSpPr>
-          <p:cNvPr id="10" name="TextBox 9"/>
-          <p:cNvSpPr txBox="1"/>
-          <p:nvPr/>
-        </p:nvSpPr>
-        <p:spPr>
-          <a:xfrm>
-            <a:off x="10515600" y="6400800"/>
-            <a:ext cx="1188720" cy="320040"/>
-          </a:xfrm>
-          <a:prstGeom prst="rect">
-            <a:avLst/>
-          </a:prstGeom>
-          <a:noFill/>
-        </p:spPr>
-        <p:txBody>
-          <a:bodyPr wrap="square" anchor="t" lIns="0" rIns="0" tIns="0" bIns="0">
-            <a:spAutoFit/>
-          </a:bodyPr>
-          <a:lstStyle/>
-          <a:p>
-            <a:pPr algn="r"/>
-            <a:r>
-              <a:rPr sz="1100" b="0" i="0">
-                <a:solidFill>
-                  <a:srgbClr val="7A7A7A"/>
-                </a:solidFill>
-                <a:latin typeface="Roboto"/>
-              </a:rPr>
-              <a:t>11</a:t>
-            </a:r>
-          </a:p>
-        </p:txBody>
-      </p:sp>
-    </p:spTree>
-  </p:cSld>
-  <p:clrMapOvr>
-    <a:masterClrMapping/>
-  </p:clrMapOvr>
-</p:sld>
-</file>
-
-<file path=ppt/slides/slide17.xml><?xml version="1.0" encoding="utf-8"?>
+<file path=ppt/slides/slide11.xml><?xml version="1.0" encoding="utf-8"?>
 <p:sld xmlns:a="http://schemas.openxmlformats.org/drawingml/2006/main" xmlns:p="http://schemas.openxmlformats.org/presentationml/2006/main" xmlns:r="http://schemas.openxmlformats.org/officeDocument/2006/relationships">
   <p:cSld>
     <p:bg>
@@ -7736,7 +4581,7 @@
             <a:r>
               <a:rPr sz="1800" b="1" i="0">
                 <a:solidFill>
-                  <a:srgbClr val="004488"/>
+                  <a:srgbClr val="27B5CE"/>
                 </a:solidFill>
                 <a:latin typeface="Roboto"/>
               </a:rPr>
@@ -7760,7 +4605,7 @@
             <a:avLst/>
           </a:prstGeom>
           <a:solidFill>
-            <a:srgbClr val="004488"/>
+            <a:srgbClr val="27B5CE"/>
           </a:solidFill>
           <a:ln>
             <a:noFill/>
@@ -7850,7 +4695,7 @@
             <a:avLst/>
           </a:prstGeom>
           <a:solidFill>
-            <a:srgbClr val="004488"/>
+            <a:srgbClr val="27B5CE"/>
           </a:solidFill>
           <a:ln>
             <a:noFill/>
@@ -7913,7 +4758,7 @@
                 </a:solidFill>
                 <a:latin typeface="Roboto"/>
               </a:rPr>
-              <a:t>Deployment assembles a design: review the design + supplied code before you build.</a:t>
+              <a:t>Monitor the signals that predict trouble on a serverless service.</a:t>
             </a:r>
           </a:p>
         </p:txBody>
@@ -7979,7 +4824,7 @@
             <a:avLst/>
           </a:prstGeom>
           <a:solidFill>
-            <a:srgbClr val="004488"/>
+            <a:srgbClr val="27B5CE"/>
           </a:solidFill>
           <a:ln>
             <a:noFill/>
@@ -8042,7 +4887,7 @@
                 </a:solidFill>
                 <a:latin typeface="Roboto"/>
               </a:rPr>
-              <a:t>Wire API → queue (event source) → function → store; LabRole is the execution role.</a:t>
+              <a:t>Threshold from the spec, notification attached.</a:t>
             </a:r>
           </a:p>
         </p:txBody>
@@ -8108,7 +4953,7 @@
             <a:avLst/>
           </a:prstGeom>
           <a:solidFill>
-            <a:srgbClr val="004488"/>
+            <a:srgbClr val="27B5CE"/>
           </a:solidFill>
           <a:ln>
             <a:noFill/>
@@ -8171,7 +5016,7 @@
                 </a:solidFill>
                 <a:latin typeface="Roboto"/>
               </a:rPr>
-              <a:t>Test by the observable outcome — the record is written exactly once; invalid events are rejected.</a:t>
+              <a:t>An untested alarm is not an alarm — fire it and prove it.</a:t>
             </a:r>
           </a:p>
         </p:txBody>
@@ -8184,19 +5029,17 @@
         </p:nvSpPr>
         <p:spPr>
           <a:xfrm>
-            <a:off x="640080" y="4818888"/>
-            <a:ext cx="10927080" cy="841248"/>
+            <a:off x="0" y="6565392"/>
+            <a:ext cx="12191695" cy="38100"/>
           </a:xfrm>
           <a:prstGeom prst="rect">
             <a:avLst/>
           </a:prstGeom>
           <a:solidFill>
-            <a:srgbClr val="FFFFFF"/>
+            <a:srgbClr val="27B5CE"/>
           </a:solidFill>
-          <a:ln w="12700">
-            <a:solidFill>
-              <a:srgbClr val="CCCCCC"/>
-            </a:solidFill>
+          <a:ln>
+            <a:noFill/>
           </a:ln>
           <a:effectLst/>
         </p:spPr>
@@ -8224,45 +5067,44 @@
       </p:sp>
       <p:sp>
         <p:nvSpPr>
-          <p:cNvPr id="14" name="Rectangle 13"/>
-          <p:cNvSpPr/>
+          <p:cNvPr id="14" name="TextBox 13"/>
+          <p:cNvSpPr txBox="1"/>
           <p:nvPr/>
         </p:nvSpPr>
         <p:spPr>
           <a:xfrm>
-            <a:off x="640080" y="4818888"/>
-            <a:ext cx="109728" cy="841248"/>
-          </a:xfrm>
-          <a:prstGeom prst="rect">
-            <a:avLst/>
-          </a:prstGeom>
-          <a:solidFill>
-            <a:srgbClr val="004488"/>
-          </a:solidFill>
-          <a:ln>
-            <a:noFill/>
-          </a:ln>
-          <a:effectLst/>
-        </p:spPr>
-        <p:style>
-          <a:lnRef idx="1">
-            <a:schemeClr val="accent1"/>
-          </a:lnRef>
-          <a:fillRef idx="3">
-            <a:schemeClr val="accent1"/>
-          </a:fillRef>
-          <a:effectRef idx="2">
-            <a:schemeClr val="accent1"/>
-          </a:effectRef>
-          <a:fontRef idx="minor">
-            <a:schemeClr val="lt1"/>
-          </a:fontRef>
-        </p:style>
-        <p:txBody>
-          <a:bodyPr rtlCol="0" anchor="ctr"/>
-          <a:lstStyle/>
-          <a:p>
-            <a:pPr algn="ctr"/>
+            <a:off x="502920" y="6400800"/>
+            <a:ext cx="5486400" cy="320040"/>
+          </a:xfrm>
+          <a:prstGeom prst="rect">
+            <a:avLst/>
+          </a:prstGeom>
+          <a:noFill/>
+        </p:spPr>
+        <p:txBody>
+          <a:bodyPr wrap="square" anchor="t" lIns="0" rIns="0" tIns="0" bIns="0">
+            <a:spAutoFit/>
+          </a:bodyPr>
+          <a:lstStyle/>
+          <a:p>
+            <a:r>
+              <a:rPr sz="1100" b="1" i="0">
+                <a:solidFill>
+                  <a:srgbClr val="2A2929"/>
+                </a:solidFill>
+                <a:latin typeface="Roboto"/>
+              </a:rPr>
+              <a:t>Kangan </a:t>
+            </a:r>
+            <a:r>
+              <a:rPr sz="1100" b="1" i="0">
+                <a:solidFill>
+                  <a:srgbClr val="D68E10"/>
+                </a:solidFill>
+                <a:latin typeface="Roboto"/>
+              </a:rPr>
+              <a:t>Institute</a:t>
+            </a:r>
           </a:p>
         </p:txBody>
       </p:sp>
@@ -8274,91 +5116,8 @@
         </p:nvSpPr>
         <p:spPr>
           <a:xfrm>
-            <a:off x="960120" y="4818888"/>
-            <a:ext cx="10424160" cy="841248"/>
-          </a:xfrm>
-          <a:prstGeom prst="rect">
-            <a:avLst/>
-          </a:prstGeom>
-          <a:noFill/>
-        </p:spPr>
-        <p:txBody>
-          <a:bodyPr wrap="square" anchor="ctr" lIns="0" rIns="0" tIns="0" bIns="0">
-            <a:spAutoFit/>
-          </a:bodyPr>
-          <a:lstStyle/>
-          <a:p>
-            <a:pPr>
-              <a:lnSpc>
-                <a:spcPct val="100000"/>
-              </a:lnSpc>
-            </a:pPr>
-            <a:r>
-              <a:rPr sz="1700" b="0" i="0">
-                <a:solidFill>
-                  <a:srgbClr val="2A2929"/>
-                </a:solidFill>
-                <a:latin typeface="Roboto"/>
-              </a:rPr>
-              <a:t>Troubleshoot from the logs: read, diagnose, fix, redeploy, re-test.</a:t>
-            </a:r>
-          </a:p>
-        </p:txBody>
-      </p:sp>
-      <p:sp>
-        <p:nvSpPr>
-          <p:cNvPr id="16" name="Rectangle 15"/>
-          <p:cNvSpPr/>
-          <p:nvPr/>
-        </p:nvSpPr>
-        <p:spPr>
-          <a:xfrm>
-            <a:off x="0" y="6565392"/>
-            <a:ext cx="12191695" cy="38100"/>
-          </a:xfrm>
-          <a:prstGeom prst="rect">
-            <a:avLst/>
-          </a:prstGeom>
-          <a:solidFill>
-            <a:srgbClr val="004488"/>
-          </a:solidFill>
-          <a:ln>
-            <a:noFill/>
-          </a:ln>
-          <a:effectLst/>
-        </p:spPr>
-        <p:style>
-          <a:lnRef idx="1">
-            <a:schemeClr val="accent1"/>
-          </a:lnRef>
-          <a:fillRef idx="3">
-            <a:schemeClr val="accent1"/>
-          </a:fillRef>
-          <a:effectRef idx="2">
-            <a:schemeClr val="accent1"/>
-          </a:effectRef>
-          <a:fontRef idx="minor">
-            <a:schemeClr val="lt1"/>
-          </a:fontRef>
-        </p:style>
-        <p:txBody>
-          <a:bodyPr rtlCol="0" anchor="ctr"/>
-          <a:lstStyle/>
-          <a:p>
-            <a:pPr algn="ctr"/>
-          </a:p>
-        </p:txBody>
-      </p:sp>
-      <p:sp>
-        <p:nvSpPr>
-          <p:cNvPr id="17" name="TextBox 16"/>
-          <p:cNvSpPr txBox="1"/>
-          <p:nvPr/>
-        </p:nvSpPr>
-        <p:spPr>
-          <a:xfrm>
-            <a:off x="502920" y="6400800"/>
-            <a:ext cx="5486400" cy="320040"/>
+            <a:off x="10515600" y="6400800"/>
+            <a:ext cx="1188720" cy="320040"/>
           </a:xfrm>
           <a:prstGeom prst="rect">
             <a:avLst/>
@@ -8371,49 +5130,6 @@
           </a:bodyPr>
           <a:lstStyle/>
           <a:p>
-            <a:r>
-              <a:rPr sz="1100" b="1" i="0">
-                <a:solidFill>
-                  <a:srgbClr val="2A2929"/>
-                </a:solidFill>
-                <a:latin typeface="Roboto"/>
-              </a:rPr>
-              <a:t>Kangan </a:t>
-            </a:r>
-            <a:r>
-              <a:rPr sz="1100" b="1" i="0">
-                <a:solidFill>
-                  <a:srgbClr val="D68E10"/>
-                </a:solidFill>
-                <a:latin typeface="Roboto"/>
-              </a:rPr>
-              <a:t>Institute</a:t>
-            </a:r>
-          </a:p>
-        </p:txBody>
-      </p:sp>
-      <p:sp>
-        <p:nvSpPr>
-          <p:cNvPr id="18" name="TextBox 17"/>
-          <p:cNvSpPr txBox="1"/>
-          <p:nvPr/>
-        </p:nvSpPr>
-        <p:spPr>
-          <a:xfrm>
-            <a:off x="10515600" y="6400800"/>
-            <a:ext cx="1188720" cy="320040"/>
-          </a:xfrm>
-          <a:prstGeom prst="rect">
-            <a:avLst/>
-          </a:prstGeom>
-          <a:noFill/>
-        </p:spPr>
-        <p:txBody>
-          <a:bodyPr wrap="square" anchor="t" lIns="0" rIns="0" tIns="0" bIns="0">
-            <a:spAutoFit/>
-          </a:bodyPr>
-          <a:lstStyle/>
-          <a:p>
             <a:pPr algn="r"/>
             <a:r>
               <a:rPr sz="1100" b="0" i="0">
@@ -8422,7 +5138,7 @@
                 </a:solidFill>
                 <a:latin typeface="Roboto"/>
               </a:rPr>
-              <a:t>12</a:t>
+              <a:t>8</a:t>
             </a:r>
           </a:p>
         </p:txBody>
@@ -8435,7 +5151,7 @@
 </p:sld>
 </file>
 
-<file path=ppt/slides/slide18.xml><?xml version="1.0" encoding="utf-8"?>
+<file path=ppt/slides/slide12.xml><?xml version="1.0" encoding="utf-8"?>
 <p:sld xmlns:a="http://schemas.openxmlformats.org/drawingml/2006/main" xmlns:p="http://schemas.openxmlformats.org/presentationml/2006/main" xmlns:r="http://schemas.openxmlformats.org/officeDocument/2006/relationships">
   <p:cSld>
     <p:bg>
@@ -8526,7 +5242,7 @@
                 </a:solidFill>
                 <a:latin typeface="Roboto"/>
               </a:rPr>
-              <a:t>Next: Topic 9 — monitoring</a:t>
+              <a:t>Next: Topic 9 — close out the build</a:t>
             </a:r>
           </a:p>
           <a:p>
@@ -8545,7 +5261,7 @@
                 </a:solidFill>
                 <a:latin typeface="Roboto Light"/>
               </a:rPr>
-              <a:t>The microservice and the web-scale build are running; next you make them observable.</a:t>
+              <a:t>The build is complete and observable.</a:t>
             </a:r>
           </a:p>
           <a:p>
@@ -8564,7 +5280,7 @@
                 </a:solidFill>
                 <a:latin typeface="Roboto Light"/>
               </a:rPr>
-              <a:t>You add the monitoring that sits behind the DR plan's detection step.</a:t>
+              <a:t>Next you document it for the people who inherit it, take it down cleanly, and get it signed off.</a:t>
             </a:r>
           </a:p>
         </p:txBody>
@@ -8624,7 +5340,7 @@
                 </a:solidFill>
                 <a:latin typeface="Roboto"/>
               </a:rPr>
-              <a:t>Build the microservice</a:t>
+              <a:t>Make it observable</a:t>
             </a:r>
           </a:p>
         </p:txBody>
@@ -8722,7 +5438,7 @@
                 </a:solidFill>
                 <a:latin typeface="Roboto"/>
               </a:rPr>
-              <a:t>This Topic converges the strands: your template (Topic 7) provisions the microservice, from the provided code, writing to the provided store (Topic 6).</a:t>
+              <a:t>The microservice runs; now you make it observable so you can see trouble coming.</a:t>
             </a:r>
           </a:p>
           <a:p>
@@ -8753,7 +5469,7 @@
                 </a:solidFill>
                 <a:latin typeface="Roboto"/>
               </a:rPr>
-              <a:t>It realises the AT1 microservice design (Topic 2): API gateway → queue → function → NoSQL store.</a:t>
+              <a:t>This is the practical form of the DR plan's detection step from Topic 4 — the paper promise becomes real configuration.</a:t>
             </a:r>
           </a:p>
           <a:p>
@@ -8784,45 +5500,14 @@
                 </a:solidFill>
                 <a:latin typeface="Roboto"/>
               </a:rPr>
-              <a:t>The design places the store in India (ap-south-1); in the lab you deploy to us-east-1 — [scenario: ap-south-1 (India) | deploy: us-east-1].</a:t>
-            </a:r>
-          </a:p>
-          <a:p>
-            <a:pPr marL="0" indent="0">
-              <a:lnSpc>
-                <a:spcPct val="105000"/>
-              </a:lnSpc>
-              <a:spcBef>
-                <a:spcPts val="0"/>
-              </a:spcBef>
-              <a:spcAft>
-                <a:spcPts val="1000"/>
-              </a:spcAft>
-            </a:pPr>
-            <a:r>
-              <a:rPr sz="1700" b="1" i="0">
-                <a:solidFill>
-                  <a:srgbClr val="EDAB0C"/>
-                </a:solidFill>
-                <a:latin typeface="Roboto"/>
-              </a:rPr>
-              <a:t>■  </a:t>
-            </a:r>
-            <a:r>
-              <a:rPr sz="1700" b="0" i="0">
-                <a:solidFill>
-                  <a:srgbClr val="2A2929"/>
-                </a:solidFill>
-                <a:latin typeface="Roboto"/>
-              </a:rPr>
-              <a:t>The lab's LabRole serves as both the function's execution role and the API-GW→queue credentials.</a:t>
+              <a:t>One workbook task today, done properly: a metric that means something, and an alarm that provably fires.</a:t>
             </a:r>
           </a:p>
         </p:txBody>
       </p:sp>
       <p:pic>
         <p:nvPicPr>
-          <p:cNvPr id="5" name="Picture 4" descr="gen-47455fd8.png"/>
+          <p:cNvPr id="5" name="Picture 4" descr="gen-eba8bb9e.png"/>
           <p:cNvPicPr>
             <a:picLocks noChangeAspect="1"/>
           </p:cNvPicPr>
@@ -9115,7 +5800,7 @@
                 </a:solidFill>
                 <a:latin typeface="Roboto"/>
               </a:rPr>
-              <a:t>Review the design &amp; code</a:t>
+              <a:t>Metrics, and what to watch</a:t>
             </a:r>
           </a:p>
           <a:p>
@@ -9131,7 +5816,7 @@
                 </a:solidFill>
                 <a:latin typeface="Roboto Light"/>
               </a:rPr>
-              <a:t>read before you deploy</a:t>
+              <a:t>watch the right signals</a:t>
             </a:r>
           </a:p>
         </p:txBody>
@@ -9313,7 +5998,7 @@
                 </a:solidFill>
                 <a:latin typeface="Roboto"/>
               </a:rPr>
-              <a:t>Review the design &amp; supplied code</a:t>
+              <a:t>Cloud metrics</a:t>
             </a:r>
           </a:p>
         </p:txBody>
@@ -9411,7 +6096,7 @@
                 </a:solidFill>
                 <a:latin typeface="Roboto"/>
               </a:rPr>
-              <a:t>Review the microservice design from AT1 (services chosen, the flow, the contract).</a:t>
+              <a:t>A metric is a time-series number the platform emits about a resource.</a:t>
             </a:r>
           </a:p>
           <a:p>
@@ -9442,7 +6127,7 @@
                 </a:solidFill>
                 <a:latin typeface="Roboto"/>
               </a:rPr>
-              <a:t>Review the supplied code components and the webhook contract they implement before deployment.</a:t>
+              <a:t>Monitoring watches the metrics that predict trouble, before users feel it.</a:t>
             </a:r>
           </a:p>
           <a:p>
@@ -9473,7 +6158,7 @@
                 </a:solidFill>
                 <a:latin typeface="Roboto"/>
               </a:rPr>
-              <a:t>Know what each piece does and how it wires up — deployment is assembling, not inventing.</a:t>
+              <a:t>You cannot manage what you do not measure.</a:t>
             </a:r>
           </a:p>
         </p:txBody>
@@ -9628,20 +6313,54 @@
       <p:grpSpPr/>
       <p:sp>
         <p:nvSpPr>
-          <p:cNvPr id="2" name="Rectangle 1"/>
+          <p:cNvPr id="2" name="TextBox 1"/>
+          <p:cNvSpPr txBox="1"/>
+          <p:nvPr/>
+        </p:nvSpPr>
+        <p:spPr>
+          <a:xfrm>
+            <a:off x="640080" y="457200"/>
+            <a:ext cx="10881360" cy="960120"/>
+          </a:xfrm>
+          <a:prstGeom prst="rect">
+            <a:avLst/>
+          </a:prstGeom>
+          <a:noFill/>
+        </p:spPr>
+        <p:txBody>
+          <a:bodyPr wrap="square" anchor="t" lIns="0" rIns="0" tIns="0" bIns="0">
+            <a:spAutoFit/>
+          </a:bodyPr>
+          <a:lstStyle/>
+          <a:p>
+            <a:r>
+              <a:rPr sz="2800" b="1" i="0">
+                <a:solidFill>
+                  <a:srgbClr val="2A2929"/>
+                </a:solidFill>
+                <a:latin typeface="Roboto"/>
+              </a:rPr>
+              <a:t>What to watch on the microservice</a:t>
+            </a:r>
+          </a:p>
+        </p:txBody>
+      </p:sp>
+      <p:sp>
+        <p:nvSpPr>
+          <p:cNvPr id="3" name="Rectangle 2"/>
           <p:cNvSpPr/>
           <p:nvPr/>
         </p:nvSpPr>
         <p:spPr>
           <a:xfrm>
-            <a:off x="0" y="0"/>
-            <a:ext cx="3931920" cy="6858000"/>
+            <a:off x="658368" y="1371600"/>
+            <a:ext cx="1463040" cy="50800"/>
           </a:xfrm>
           <a:prstGeom prst="rect">
             <a:avLst/>
           </a:prstGeom>
           <a:solidFill>
-            <a:srgbClr val="27B5CE"/>
+            <a:srgbClr val="92268F"/>
           </a:solidFill>
           <a:ln>
             <a:noFill/>
@@ -9672,48 +6391,14 @@
       </p:sp>
       <p:sp>
         <p:nvSpPr>
-          <p:cNvPr id="3" name="TextBox 2"/>
-          <p:cNvSpPr txBox="1"/>
-          <p:nvPr/>
-        </p:nvSpPr>
-        <p:spPr>
-          <a:xfrm>
-            <a:off x="365760" y="2103120"/>
-            <a:ext cx="3291840" cy="2194560"/>
-          </a:xfrm>
-          <a:prstGeom prst="rect">
-            <a:avLst/>
-          </a:prstGeom>
-          <a:noFill/>
-        </p:spPr>
-        <p:txBody>
-          <a:bodyPr wrap="square" anchor="t" lIns="0" rIns="0" tIns="0" bIns="0">
-            <a:spAutoFit/>
-          </a:bodyPr>
-          <a:lstStyle/>
-          <a:p>
-            <a:r>
-              <a:rPr sz="13000" b="1" i="0">
-                <a:solidFill>
-                  <a:srgbClr val="FFFFFF"/>
-                </a:solidFill>
-                <a:latin typeface="Roboto"/>
-              </a:rPr>
-              <a:t>02</a:t>
-            </a:r>
-          </a:p>
-        </p:txBody>
-      </p:sp>
-      <p:sp>
-        <p:nvSpPr>
           <p:cNvPr id="4" name="TextBox 3"/>
           <p:cNvSpPr txBox="1"/>
           <p:nvPr/>
         </p:nvSpPr>
         <p:spPr>
           <a:xfrm>
-            <a:off x="4480560" y="2468880"/>
-            <a:ext cx="7132320" cy="2194560"/>
+            <a:off x="658368" y="1691640"/>
+            <a:ext cx="10881360" cy="4480560"/>
           </a:xfrm>
           <a:prstGeom prst="rect">
             <a:avLst/>
@@ -9721,51 +6406,101 @@
           <a:noFill/>
         </p:spPr>
         <p:txBody>
-          <a:bodyPr wrap="square" anchor="t" lIns="0" rIns="0" tIns="0" bIns="0">
+          <a:bodyPr wrap="square" anchor="ctr" lIns="0" rIns="0" tIns="0" bIns="0">
             <a:spAutoFit/>
           </a:bodyPr>
           <a:lstStyle/>
           <a:p>
-            <a:r>
-              <a:rPr sz="1600" b="1" i="0">
-                <a:solidFill>
-                  <a:srgbClr val="27B5CE"/>
-                </a:solidFill>
-                <a:latin typeface="Roboto"/>
-              </a:rPr>
-              <a:t>SECTION</a:t>
-            </a:r>
-          </a:p>
-          <a:p>
-            <a:pPr>
+            <a:pPr marL="0" indent="0">
+              <a:lnSpc>
+                <a:spcPct val="105000"/>
+              </a:lnSpc>
               <a:spcBef>
-                <a:spcPts val="600"/>
+                <a:spcPts val="0"/>
               </a:spcBef>
+              <a:spcAft>
+                <a:spcPts val="1000"/>
+              </a:spcAft>
             </a:pPr>
             <a:r>
-              <a:rPr sz="3800" b="1" i="0">
+              <a:rPr sz="2400" b="1" i="0">
+                <a:solidFill>
+                  <a:srgbClr val="EDAB0C"/>
+                </a:solidFill>
+                <a:latin typeface="Roboto"/>
+              </a:rPr>
+              <a:t>■  </a:t>
+            </a:r>
+            <a:r>
+              <a:rPr sz="2400" b="0" i="0">
                 <a:solidFill>
                   <a:srgbClr val="2A2929"/>
                 </a:solidFill>
                 <a:latin typeface="Roboto"/>
               </a:rPr>
-              <a:t>Deploy &amp; configure</a:t>
-            </a:r>
-          </a:p>
-          <a:p>
-            <a:pPr>
+              <a:t>Queue depth: the scaling signal for a queue-driven function — a rising backlog means the consumer can't keep up.</a:t>
+            </a:r>
+          </a:p>
+          <a:p>
+            <a:pPr marL="0" indent="0">
+              <a:lnSpc>
+                <a:spcPct val="105000"/>
+              </a:lnSpc>
               <a:spcBef>
+                <a:spcPts val="0"/>
+              </a:spcBef>
+              <a:spcAft>
                 <a:spcPts val="1000"/>
+              </a:spcAft>
+            </a:pPr>
+            <a:r>
+              <a:rPr sz="2400" b="1" i="0">
+                <a:solidFill>
+                  <a:srgbClr val="EDAB0C"/>
+                </a:solidFill>
+                <a:latin typeface="Roboto"/>
+              </a:rPr>
+              <a:t>■  </a:t>
+            </a:r>
+            <a:r>
+              <a:rPr sz="2400" b="0" i="0">
+                <a:solidFill>
+                  <a:srgbClr val="2A2929"/>
+                </a:solidFill>
+                <a:latin typeface="Roboto"/>
+              </a:rPr>
+              <a:t>Function errors and throttles: the code failing, or the platform limiting concurrency.</a:t>
+            </a:r>
+          </a:p>
+          <a:p>
+            <a:pPr marL="0" indent="0">
+              <a:lnSpc>
+                <a:spcPct val="105000"/>
+              </a:lnSpc>
+              <a:spcBef>
+                <a:spcPts val="0"/>
               </a:spcBef>
+              <a:spcAft>
+                <a:spcPts val="1000"/>
+              </a:spcAft>
             </a:pPr>
             <a:r>
-              <a:rPr sz="2000" b="0" i="1">
-                <a:solidFill>
-                  <a:srgbClr val="484848"/>
-                </a:solidFill>
-                <a:latin typeface="Roboto Light"/>
-              </a:rPr>
-              <a:t>wire the pipeline end to end</a:t>
+              <a:rPr sz="2400" b="1" i="0">
+                <a:solidFill>
+                  <a:srgbClr val="EDAB0C"/>
+                </a:solidFill>
+                <a:latin typeface="Roboto"/>
+              </a:rPr>
+              <a:t>■  </a:t>
+            </a:r>
+            <a:r>
+              <a:rPr sz="2400" b="0" i="0">
+                <a:solidFill>
+                  <a:srgbClr val="2A2929"/>
+                </a:solidFill>
+                <a:latin typeface="Roboto"/>
+              </a:rPr>
+              <a:t>Store throttles: the datastore pushing back under load.</a:t>
             </a:r>
           </a:p>
         </p:txBody>
@@ -9785,7 +6520,7 @@
             <a:avLst/>
           </a:prstGeom>
           <a:solidFill>
-            <a:srgbClr val="27B5CE"/>
+            <a:srgbClr val="92268F"/>
           </a:solidFill>
           <a:ln>
             <a:noFill/>
@@ -9887,7 +6622,7 @@
                 </a:solidFill>
                 <a:latin typeface="Roboto"/>
               </a:rPr>
-              <a:t/>
+              <a:t>3</a:t>
             </a:r>
           </a:p>
         </p:txBody>
@@ -9906,7 +6641,7 @@
     <p:bg>
       <p:bgPr>
         <a:solidFill>
-          <a:srgbClr val="FFFFFF"/>
+          <a:srgbClr val="F9F9F9"/>
         </a:solidFill>
         <a:effectLst/>
       </p:bgPr>
@@ -9926,8 +6661,8 @@
         </p:nvSpPr>
         <p:spPr>
           <a:xfrm>
-            <a:off x="640080" y="457200"/>
-            <a:ext cx="10881360" cy="960120"/>
+            <a:off x="640080" y="548640"/>
+            <a:ext cx="10881360" cy="1097280"/>
           </a:xfrm>
           <a:prstGeom prst="rect">
             <a:avLst/>
@@ -9941,13 +6676,29 @@
           <a:lstStyle/>
           <a:p>
             <a:r>
-              <a:rPr sz="2800" b="1" i="0">
+              <a:rPr sz="3200" b="1" i="0">
                 <a:solidFill>
                   <a:srgbClr val="2A2929"/>
                 </a:solidFill>
                 <a:latin typeface="Roboto"/>
               </a:rPr>
-              <a:t>The serverless wiring</a:t>
+              <a:t>Key takeaways</a:t>
+            </a:r>
+          </a:p>
+          <a:p>
+            <a:pPr>
+              <a:spcBef>
+                <a:spcPts val="200"/>
+              </a:spcBef>
+            </a:pPr>
+            <a:r>
+              <a:rPr sz="1800" b="1" i="0">
+                <a:solidFill>
+                  <a:srgbClr val="92268F"/>
+                </a:solidFill>
+                <a:latin typeface="Roboto"/>
+              </a:rPr>
+              <a:t>Section 1 · The signals</a:t>
             </a:r>
           </a:p>
         </p:txBody>
@@ -9960,14 +6711,14 @@
         </p:nvSpPr>
         <p:spPr>
           <a:xfrm>
-            <a:off x="658368" y="1371600"/>
+            <a:off x="658368" y="1600200"/>
             <a:ext cx="1463040" cy="50800"/>
           </a:xfrm>
           <a:prstGeom prst="rect">
             <a:avLst/>
           </a:prstGeom>
           <a:solidFill>
-            <a:srgbClr val="27B5CE"/>
+            <a:srgbClr val="92268F"/>
           </a:solidFill>
           <a:ln>
             <a:noFill/>
@@ -9998,117 +6749,47 @@
       </p:sp>
       <p:sp>
         <p:nvSpPr>
-          <p:cNvPr id="4" name="TextBox 3"/>
-          <p:cNvSpPr txBox="1"/>
+          <p:cNvPr id="4" name="Rectangle 3"/>
+          <p:cNvSpPr/>
           <p:nvPr/>
         </p:nvSpPr>
         <p:spPr>
           <a:xfrm>
-            <a:off x="658368" y="1691640"/>
-            <a:ext cx="10881360" cy="4480560"/>
-          </a:xfrm>
-          <a:prstGeom prst="rect">
-            <a:avLst/>
-          </a:prstGeom>
-          <a:noFill/>
-        </p:spPr>
-        <p:txBody>
-          <a:bodyPr wrap="square" anchor="ctr" lIns="0" rIns="0" tIns="0" bIns="0">
-            <a:spAutoFit/>
-          </a:bodyPr>
-          <a:lstStyle/>
-          <a:p>
-            <a:pPr marL="0" indent="0">
-              <a:lnSpc>
-                <a:spcPct val="105000"/>
-              </a:lnSpc>
-              <a:spcBef>
-                <a:spcPts val="0"/>
-              </a:spcBef>
-              <a:spcAft>
-                <a:spcPts val="1000"/>
-              </a:spcAft>
-            </a:pPr>
-            <a:r>
-              <a:rPr sz="2400" b="1" i="0">
-                <a:solidFill>
-                  <a:srgbClr val="EDAB0C"/>
-                </a:solidFill>
-                <a:latin typeface="Roboto"/>
-              </a:rPr>
-              <a:t>■  </a:t>
-            </a:r>
-            <a:r>
-              <a:rPr sz="2400" b="0" i="0">
-                <a:solidFill>
-                  <a:srgbClr val="2A2929"/>
-                </a:solidFill>
-                <a:latin typeface="Roboto"/>
-              </a:rPr>
-              <a:t>API route: the gateway receives the webhook and hands it on.</a:t>
-            </a:r>
-          </a:p>
-          <a:p>
-            <a:pPr marL="0" indent="0">
-              <a:lnSpc>
-                <a:spcPct val="105000"/>
-              </a:lnSpc>
-              <a:spcBef>
-                <a:spcPts val="0"/>
-              </a:spcBef>
-              <a:spcAft>
-                <a:spcPts val="1000"/>
-              </a:spcAft>
-            </a:pPr>
-            <a:r>
-              <a:rPr sz="2400" b="1" i="0">
-                <a:solidFill>
-                  <a:srgbClr val="EDAB0C"/>
-                </a:solidFill>
-                <a:latin typeface="Roboto"/>
-              </a:rPr>
-              <a:t>■  </a:t>
-            </a:r>
-            <a:r>
-              <a:rPr sz="2400" b="0" i="0">
-                <a:solidFill>
-                  <a:srgbClr val="2A2929"/>
-                </a:solidFill>
-                <a:latin typeface="Roboto"/>
-              </a:rPr>
-              <a:t>The queue is the function's event source — it triggers the function as events arrive.</a:t>
-            </a:r>
-          </a:p>
-          <a:p>
-            <a:pPr marL="0" indent="0">
-              <a:lnSpc>
-                <a:spcPct val="105000"/>
-              </a:lnSpc>
-              <a:spcBef>
-                <a:spcPts val="0"/>
-              </a:spcBef>
-              <a:spcAft>
-                <a:spcPts val="1000"/>
-              </a:spcAft>
-            </a:pPr>
-            <a:r>
-              <a:rPr sz="2400" b="1" i="0">
-                <a:solidFill>
-                  <a:srgbClr val="EDAB0C"/>
-                </a:solidFill>
-                <a:latin typeface="Roboto"/>
-              </a:rPr>
-              <a:t>■  </a:t>
-            </a:r>
-            <a:r>
-              <a:rPr sz="2400" b="0" i="0">
-                <a:solidFill>
-                  <a:srgbClr val="2A2929"/>
-                </a:solidFill>
-                <a:latin typeface="Roboto"/>
-              </a:rPr>
-              <a:t>The function writes to the provided store; the store's table name is supplied to the function as config.</a:t>
-            </a:r>
+            <a:off x="640080" y="1965960"/>
+            <a:ext cx="10927080" cy="841248"/>
+          </a:xfrm>
+          <a:prstGeom prst="rect">
+            <a:avLst/>
+          </a:prstGeom>
+          <a:solidFill>
+            <a:srgbClr val="FFFFFF"/>
+          </a:solidFill>
+          <a:ln w="12700">
+            <a:solidFill>
+              <a:srgbClr val="CCCCCC"/>
+            </a:solidFill>
+          </a:ln>
+          <a:effectLst/>
+        </p:spPr>
+        <p:style>
+          <a:lnRef idx="1">
+            <a:schemeClr val="accent1"/>
+          </a:lnRef>
+          <a:fillRef idx="3">
+            <a:schemeClr val="accent1"/>
+          </a:fillRef>
+          <a:effectRef idx="2">
+            <a:schemeClr val="accent1"/>
+          </a:effectRef>
+          <a:fontRef idx="minor">
+            <a:schemeClr val="lt1"/>
+          </a:fontRef>
+        </p:style>
+        <p:txBody>
+          <a:bodyPr rtlCol="0" anchor="ctr"/>
+          <a:lstStyle/>
+          <a:p>
+            <a:pPr algn="ctr"/>
           </a:p>
         </p:txBody>
       </p:sp>
@@ -10120,14 +6801,14 @@
         </p:nvSpPr>
         <p:spPr>
           <a:xfrm>
-            <a:off x="0" y="6565392"/>
-            <a:ext cx="12191695" cy="38100"/>
+            <a:off x="640080" y="1965960"/>
+            <a:ext cx="109728" cy="841248"/>
           </a:xfrm>
           <a:prstGeom prst="rect">
             <a:avLst/>
           </a:prstGeom>
           <a:solidFill>
-            <a:srgbClr val="27B5CE"/>
+            <a:srgbClr val="92268F"/>
           </a:solidFill>
           <a:ln>
             <a:noFill/>
@@ -10164,6 +6845,218 @@
         </p:nvSpPr>
         <p:spPr>
           <a:xfrm>
+            <a:off x="960120" y="1965960"/>
+            <a:ext cx="10424160" cy="841248"/>
+          </a:xfrm>
+          <a:prstGeom prst="rect">
+            <a:avLst/>
+          </a:prstGeom>
+          <a:noFill/>
+        </p:spPr>
+        <p:txBody>
+          <a:bodyPr wrap="square" anchor="ctr" lIns="0" rIns="0" tIns="0" bIns="0">
+            <a:spAutoFit/>
+          </a:bodyPr>
+          <a:lstStyle/>
+          <a:p>
+            <a:pPr>
+              <a:lnSpc>
+                <a:spcPct val="100000"/>
+              </a:lnSpc>
+            </a:pPr>
+            <a:r>
+              <a:rPr sz="1700" b="0" i="0">
+                <a:solidFill>
+                  <a:srgbClr val="2A2929"/>
+                </a:solidFill>
+                <a:latin typeface="Roboto"/>
+              </a:rPr>
+              <a:t>Metrics are time-series signals; pick the leading ones.</a:t>
+            </a:r>
+          </a:p>
+        </p:txBody>
+      </p:sp>
+      <p:sp>
+        <p:nvSpPr>
+          <p:cNvPr id="7" name="Rectangle 6"/>
+          <p:cNvSpPr/>
+          <p:nvPr/>
+        </p:nvSpPr>
+        <p:spPr>
+          <a:xfrm>
+            <a:off x="640080" y="2916936"/>
+            <a:ext cx="10927080" cy="841248"/>
+          </a:xfrm>
+          <a:prstGeom prst="rect">
+            <a:avLst/>
+          </a:prstGeom>
+          <a:solidFill>
+            <a:srgbClr val="FFFFFF"/>
+          </a:solidFill>
+          <a:ln w="12700">
+            <a:solidFill>
+              <a:srgbClr val="CCCCCC"/>
+            </a:solidFill>
+          </a:ln>
+          <a:effectLst/>
+        </p:spPr>
+        <p:style>
+          <a:lnRef idx="1">
+            <a:schemeClr val="accent1"/>
+          </a:lnRef>
+          <a:fillRef idx="3">
+            <a:schemeClr val="accent1"/>
+          </a:fillRef>
+          <a:effectRef idx="2">
+            <a:schemeClr val="accent1"/>
+          </a:effectRef>
+          <a:fontRef idx="minor">
+            <a:schemeClr val="lt1"/>
+          </a:fontRef>
+        </p:style>
+        <p:txBody>
+          <a:bodyPr rtlCol="0" anchor="ctr"/>
+          <a:lstStyle/>
+          <a:p>
+            <a:pPr algn="ctr"/>
+          </a:p>
+        </p:txBody>
+      </p:sp>
+      <p:sp>
+        <p:nvSpPr>
+          <p:cNvPr id="8" name="Rectangle 7"/>
+          <p:cNvSpPr/>
+          <p:nvPr/>
+        </p:nvSpPr>
+        <p:spPr>
+          <a:xfrm>
+            <a:off x="640080" y="2916936"/>
+            <a:ext cx="109728" cy="841248"/>
+          </a:xfrm>
+          <a:prstGeom prst="rect">
+            <a:avLst/>
+          </a:prstGeom>
+          <a:solidFill>
+            <a:srgbClr val="92268F"/>
+          </a:solidFill>
+          <a:ln>
+            <a:noFill/>
+          </a:ln>
+          <a:effectLst/>
+        </p:spPr>
+        <p:style>
+          <a:lnRef idx="1">
+            <a:schemeClr val="accent1"/>
+          </a:lnRef>
+          <a:fillRef idx="3">
+            <a:schemeClr val="accent1"/>
+          </a:fillRef>
+          <a:effectRef idx="2">
+            <a:schemeClr val="accent1"/>
+          </a:effectRef>
+          <a:fontRef idx="minor">
+            <a:schemeClr val="lt1"/>
+          </a:fontRef>
+        </p:style>
+        <p:txBody>
+          <a:bodyPr rtlCol="0" anchor="ctr"/>
+          <a:lstStyle/>
+          <a:p>
+            <a:pPr algn="ctr"/>
+          </a:p>
+        </p:txBody>
+      </p:sp>
+      <p:sp>
+        <p:nvSpPr>
+          <p:cNvPr id="9" name="TextBox 8"/>
+          <p:cNvSpPr txBox="1"/>
+          <p:nvPr/>
+        </p:nvSpPr>
+        <p:spPr>
+          <a:xfrm>
+            <a:off x="960120" y="2916936"/>
+            <a:ext cx="10424160" cy="841248"/>
+          </a:xfrm>
+          <a:prstGeom prst="rect">
+            <a:avLst/>
+          </a:prstGeom>
+          <a:noFill/>
+        </p:spPr>
+        <p:txBody>
+          <a:bodyPr wrap="square" anchor="ctr" lIns="0" rIns="0" tIns="0" bIns="0">
+            <a:spAutoFit/>
+          </a:bodyPr>
+          <a:lstStyle/>
+          <a:p>
+            <a:pPr>
+              <a:lnSpc>
+                <a:spcPct val="100000"/>
+              </a:lnSpc>
+            </a:pPr>
+            <a:r>
+              <a:rPr sz="1700" b="0" i="0">
+                <a:solidFill>
+                  <a:srgbClr val="2A2929"/>
+                </a:solidFill>
+                <a:latin typeface="Roboto"/>
+              </a:rPr>
+              <a:t>Queue depth, function errors and throttles, store throttles.</a:t>
+            </a:r>
+          </a:p>
+        </p:txBody>
+      </p:sp>
+      <p:sp>
+        <p:nvSpPr>
+          <p:cNvPr id="10" name="Rectangle 9"/>
+          <p:cNvSpPr/>
+          <p:nvPr/>
+        </p:nvSpPr>
+        <p:spPr>
+          <a:xfrm>
+            <a:off x="0" y="6565392"/>
+            <a:ext cx="12191695" cy="38100"/>
+          </a:xfrm>
+          <a:prstGeom prst="rect">
+            <a:avLst/>
+          </a:prstGeom>
+          <a:solidFill>
+            <a:srgbClr val="92268F"/>
+          </a:solidFill>
+          <a:ln>
+            <a:noFill/>
+          </a:ln>
+          <a:effectLst/>
+        </p:spPr>
+        <p:style>
+          <a:lnRef idx="1">
+            <a:schemeClr val="accent1"/>
+          </a:lnRef>
+          <a:fillRef idx="3">
+            <a:schemeClr val="accent1"/>
+          </a:fillRef>
+          <a:effectRef idx="2">
+            <a:schemeClr val="accent1"/>
+          </a:effectRef>
+          <a:fontRef idx="minor">
+            <a:schemeClr val="lt1"/>
+          </a:fontRef>
+        </p:style>
+        <p:txBody>
+          <a:bodyPr rtlCol="0" anchor="ctr"/>
+          <a:lstStyle/>
+          <a:p>
+            <a:pPr algn="ctr"/>
+          </a:p>
+        </p:txBody>
+      </p:sp>
+      <p:sp>
+        <p:nvSpPr>
+          <p:cNvPr id="11" name="TextBox 10"/>
+          <p:cNvSpPr txBox="1"/>
+          <p:nvPr/>
+        </p:nvSpPr>
+        <p:spPr>
+          <a:xfrm>
             <a:off x="502920" y="6400800"/>
             <a:ext cx="5486400" cy="320040"/>
           </a:xfrm>
@@ -10201,7 +7094,7 @@
       </p:sp>
       <p:sp>
         <p:nvSpPr>
-          <p:cNvPr id="7" name="TextBox 6"/>
+          <p:cNvPr id="12" name="TextBox 11"/>
           <p:cNvSpPr txBox="1"/>
           <p:nvPr/>
         </p:nvSpPr>
@@ -10229,7 +7122,7 @@
                 </a:solidFill>
                 <a:latin typeface="Roboto"/>
               </a:rPr>
-              <a:t>3</a:t>
+              <a:t>4</a:t>
             </a:r>
           </a:p>
         </p:txBody>
@@ -10262,48 +7155,14 @@
       <p:grpSpPr/>
       <p:sp>
         <p:nvSpPr>
-          <p:cNvPr id="2" name="TextBox 1"/>
-          <p:cNvSpPr txBox="1"/>
-          <p:nvPr/>
-        </p:nvSpPr>
-        <p:spPr>
-          <a:xfrm>
-            <a:off x="640080" y="457200"/>
-            <a:ext cx="10881360" cy="960120"/>
-          </a:xfrm>
-          <a:prstGeom prst="rect">
-            <a:avLst/>
-          </a:prstGeom>
-          <a:noFill/>
-        </p:spPr>
-        <p:txBody>
-          <a:bodyPr wrap="square" anchor="t" lIns="0" rIns="0" tIns="0" bIns="0">
-            <a:spAutoFit/>
-          </a:bodyPr>
-          <a:lstStyle/>
-          <a:p>
-            <a:r>
-              <a:rPr sz="2800" b="1" i="0">
-                <a:solidFill>
-                  <a:srgbClr val="2A2929"/>
-                </a:solidFill>
-                <a:latin typeface="Roboto"/>
-              </a:rPr>
-              <a:t>Deploy &amp; configure the services</a:t>
-            </a:r>
-          </a:p>
-        </p:txBody>
-      </p:sp>
-      <p:sp>
-        <p:nvSpPr>
-          <p:cNvPr id="3" name="Rectangle 2"/>
+          <p:cNvPr id="2" name="Rectangle 1"/>
           <p:cNvSpPr/>
           <p:nvPr/>
         </p:nvSpPr>
         <p:spPr>
           <a:xfrm>
-            <a:off x="658368" y="1371600"/>
-            <a:ext cx="1463040" cy="50800"/>
+            <a:off x="0" y="0"/>
+            <a:ext cx="3931920" cy="6858000"/>
           </a:xfrm>
           <a:prstGeom prst="rect">
             <a:avLst/>
@@ -10340,14 +7199,48 @@
       </p:sp>
       <p:sp>
         <p:nvSpPr>
+          <p:cNvPr id="3" name="TextBox 2"/>
+          <p:cNvSpPr txBox="1"/>
+          <p:nvPr/>
+        </p:nvSpPr>
+        <p:spPr>
+          <a:xfrm>
+            <a:off x="365760" y="2103120"/>
+            <a:ext cx="3291840" cy="2194560"/>
+          </a:xfrm>
+          <a:prstGeom prst="rect">
+            <a:avLst/>
+          </a:prstGeom>
+          <a:noFill/>
+        </p:spPr>
+        <p:txBody>
+          <a:bodyPr wrap="square" anchor="t" lIns="0" rIns="0" tIns="0" bIns="0">
+            <a:spAutoFit/>
+          </a:bodyPr>
+          <a:lstStyle/>
+          <a:p>
+            <a:r>
+              <a:rPr sz="13000" b="1" i="0">
+                <a:solidFill>
+                  <a:srgbClr val="FFFFFF"/>
+                </a:solidFill>
+                <a:latin typeface="Roboto"/>
+              </a:rPr>
+              <a:t>02</a:t>
+            </a:r>
+          </a:p>
+        </p:txBody>
+      </p:sp>
+      <p:sp>
+        <p:nvSpPr>
           <p:cNvPr id="4" name="TextBox 3"/>
           <p:cNvSpPr txBox="1"/>
           <p:nvPr/>
         </p:nvSpPr>
         <p:spPr>
           <a:xfrm>
-            <a:off x="658368" y="1737360"/>
-            <a:ext cx="5486400" cy="4297680"/>
+            <a:off x="4480560" y="2468880"/>
+            <a:ext cx="7132320" cy="2194560"/>
           </a:xfrm>
           <a:prstGeom prst="rect">
             <a:avLst/>
@@ -10360,127 +7253,53 @@
           </a:bodyPr>
           <a:lstStyle/>
           <a:p>
-            <a:pPr marL="0" indent="0">
-              <a:lnSpc>
-                <a:spcPct val="105000"/>
-              </a:lnSpc>
+            <a:r>
+              <a:rPr sz="1600" b="1" i="0">
+                <a:solidFill>
+                  <a:srgbClr val="27B5CE"/>
+                </a:solidFill>
+                <a:latin typeface="Roboto"/>
+              </a:rPr>
+              <a:t>SECTION</a:t>
+            </a:r>
+          </a:p>
+          <a:p>
+            <a:pPr>
               <a:spcBef>
-                <a:spcPts val="0"/>
+                <a:spcPts val="600"/>
               </a:spcBef>
-              <a:spcAft>
+            </a:pPr>
+            <a:r>
+              <a:rPr sz="3800" b="1" i="0">
+                <a:solidFill>
+                  <a:srgbClr val="2A2929"/>
+                </a:solidFill>
+                <a:latin typeface="Roboto"/>
+              </a:rPr>
+              <a:t>The alarm, set and proven</a:t>
+            </a:r>
+          </a:p>
+          <a:p>
+            <a:pPr>
+              <a:spcBef>
                 <a:spcPts val="1000"/>
-              </a:spcAft>
+              </a:spcBef>
             </a:pPr>
             <a:r>
-              <a:rPr sz="1700" b="1" i="0">
-                <a:solidFill>
-                  <a:srgbClr val="EDAB0C"/>
-                </a:solidFill>
-                <a:latin typeface="Roboto"/>
-              </a:rPr>
-              <a:t>■  </a:t>
-            </a:r>
-            <a:r>
-              <a:rPr sz="1700" b="0" i="0">
-                <a:solidFill>
-                  <a:srgbClr val="2A2929"/>
-                </a:solidFill>
-                <a:latin typeface="Roboto"/>
-              </a:rPr>
-              <a:t>Deploy and configure the serverless services to implement the application, from the provided code.</a:t>
-            </a:r>
-          </a:p>
-          <a:p>
-            <a:pPr marL="0" indent="0">
-              <a:lnSpc>
-                <a:spcPct val="105000"/>
-              </a:lnSpc>
-              <a:spcBef>
-                <a:spcPts val="0"/>
-              </a:spcBef>
-              <a:spcAft>
-                <a:spcPts val="1000"/>
-              </a:spcAft>
-            </a:pPr>
-            <a:r>
-              <a:rPr sz="1700" b="1" i="0">
-                <a:solidFill>
-                  <a:srgbClr val="EDAB0C"/>
-                </a:solidFill>
-                <a:latin typeface="Roboto"/>
-              </a:rPr>
-              <a:t>■  </a:t>
-            </a:r>
-            <a:r>
-              <a:rPr sz="1700" b="0" i="0">
-                <a:solidFill>
-                  <a:srgbClr val="2A2929"/>
-                </a:solidFill>
-                <a:latin typeface="Roboto"/>
-              </a:rPr>
-              <a:t>Pass LabRole as the execution role; wire the API → queue → function → store.</a:t>
-            </a:r>
-          </a:p>
-          <a:p>
-            <a:pPr marL="0" indent="0">
-              <a:lnSpc>
-                <a:spcPct val="105000"/>
-              </a:lnSpc>
-              <a:spcBef>
-                <a:spcPts val="0"/>
-              </a:spcBef>
-              <a:spcAft>
-                <a:spcPts val="1000"/>
-              </a:spcAft>
-            </a:pPr>
-            <a:r>
-              <a:rPr sz="1700" b="1" i="0">
-                <a:solidFill>
-                  <a:srgbClr val="EDAB0C"/>
-                </a:solidFill>
-                <a:latin typeface="Roboto"/>
-              </a:rPr>
-              <a:t>■  </a:t>
-            </a:r>
-            <a:r>
-              <a:rPr sz="1700" b="0" i="0">
-                <a:solidFill>
-                  <a:srgbClr val="2A2929"/>
-                </a:solidFill>
-                <a:latin typeface="Roboto"/>
-              </a:rPr>
-              <a:t>Use the console, CLI or SDK to deploy and confirm (PE 4).</a:t>
-            </a:r>
-          </a:p>
-        </p:txBody>
-      </p:sp>
-      <p:pic>
-        <p:nvPicPr>
-          <p:cNvPr id="5" name="Picture 4" descr="microservice-deploy.png"/>
-          <p:cNvPicPr>
-            <a:picLocks noChangeAspect="1"/>
-          </p:cNvPicPr>
-          <p:nvPr/>
-        </p:nvPicPr>
-        <p:blipFill>
-          <a:blip r:embed="rId2"/>
-          <a:stretch>
-            <a:fillRect/>
-          </a:stretch>
-        </p:blipFill>
-        <p:spPr>
-          <a:xfrm>
-            <a:off x="7972926" y="1783080"/>
-            <a:ext cx="1976387" cy="4023360"/>
-          </a:xfrm>
-          <a:prstGeom prst="rect">
-            <a:avLst/>
-          </a:prstGeom>
-        </p:spPr>
-      </p:pic>
-      <p:sp>
-        <p:nvSpPr>
-          <p:cNvPr id="6" name="Rectangle 5"/>
+              <a:rPr sz="2000" b="0" i="1">
+                <a:solidFill>
+                  <a:srgbClr val="484848"/>
+                </a:solidFill>
+                <a:latin typeface="Roboto Light"/>
+              </a:rPr>
+              <a:t>a threshold that tells someone</a:t>
+            </a:r>
+          </a:p>
+        </p:txBody>
+      </p:sp>
+      <p:sp>
+        <p:nvSpPr>
+          <p:cNvPr id="5" name="Rectangle 4"/>
           <p:cNvSpPr/>
           <p:nvPr/>
         </p:nvSpPr>
@@ -10524,14 +7343,57 @@
       </p:sp>
       <p:sp>
         <p:nvSpPr>
+          <p:cNvPr id="6" name="TextBox 5"/>
+          <p:cNvSpPr txBox="1"/>
+          <p:nvPr/>
+        </p:nvSpPr>
+        <p:spPr>
+          <a:xfrm>
+            <a:off x="502920" y="6400800"/>
+            <a:ext cx="5486400" cy="320040"/>
+          </a:xfrm>
+          <a:prstGeom prst="rect">
+            <a:avLst/>
+          </a:prstGeom>
+          <a:noFill/>
+        </p:spPr>
+        <p:txBody>
+          <a:bodyPr wrap="square" anchor="t" lIns="0" rIns="0" tIns="0" bIns="0">
+            <a:spAutoFit/>
+          </a:bodyPr>
+          <a:lstStyle/>
+          <a:p>
+            <a:r>
+              <a:rPr sz="1100" b="1" i="0">
+                <a:solidFill>
+                  <a:srgbClr val="2A2929"/>
+                </a:solidFill>
+                <a:latin typeface="Roboto"/>
+              </a:rPr>
+              <a:t>Kangan </a:t>
+            </a:r>
+            <a:r>
+              <a:rPr sz="1100" b="1" i="0">
+                <a:solidFill>
+                  <a:srgbClr val="D68E10"/>
+                </a:solidFill>
+                <a:latin typeface="Roboto"/>
+              </a:rPr>
+              <a:t>Institute</a:t>
+            </a:r>
+          </a:p>
+        </p:txBody>
+      </p:sp>
+      <p:sp>
+        <p:nvSpPr>
           <p:cNvPr id="7" name="TextBox 6"/>
           <p:cNvSpPr txBox="1"/>
           <p:nvPr/>
         </p:nvSpPr>
         <p:spPr>
           <a:xfrm>
-            <a:off x="502920" y="6400800"/>
-            <a:ext cx="5486400" cy="320040"/>
+            <a:off x="10515600" y="6400800"/>
+            <a:ext cx="1188720" cy="320040"/>
           </a:xfrm>
           <a:prstGeom prst="rect">
             <a:avLst/>
@@ -10544,49 +7406,6 @@
           </a:bodyPr>
           <a:lstStyle/>
           <a:p>
-            <a:r>
-              <a:rPr sz="1100" b="1" i="0">
-                <a:solidFill>
-                  <a:srgbClr val="2A2929"/>
-                </a:solidFill>
-                <a:latin typeface="Roboto"/>
-              </a:rPr>
-              <a:t>Kangan </a:t>
-            </a:r>
-            <a:r>
-              <a:rPr sz="1100" b="1" i="0">
-                <a:solidFill>
-                  <a:srgbClr val="D68E10"/>
-                </a:solidFill>
-                <a:latin typeface="Roboto"/>
-              </a:rPr>
-              <a:t>Institute</a:t>
-            </a:r>
-          </a:p>
-        </p:txBody>
-      </p:sp>
-      <p:sp>
-        <p:nvSpPr>
-          <p:cNvPr id="8" name="TextBox 7"/>
-          <p:cNvSpPr txBox="1"/>
-          <p:nvPr/>
-        </p:nvSpPr>
-        <p:spPr>
-          <a:xfrm>
-            <a:off x="10515600" y="6400800"/>
-            <a:ext cx="1188720" cy="320040"/>
-          </a:xfrm>
-          <a:prstGeom prst="rect">
-            <a:avLst/>
-          </a:prstGeom>
-          <a:noFill/>
-        </p:spPr>
-        <p:txBody>
-          <a:bodyPr wrap="square" anchor="t" lIns="0" rIns="0" tIns="0" bIns="0">
-            <a:spAutoFit/>
-          </a:bodyPr>
-          <a:lstStyle/>
-          <a:p>
             <a:pPr algn="r"/>
             <a:r>
               <a:rPr sz="1100" b="0" i="0">
@@ -10595,7 +7414,7 @@
                 </a:solidFill>
                 <a:latin typeface="Roboto"/>
               </a:rPr>
-              <a:t>4</a:t>
+              <a:t/>
             </a:r>
           </a:p>
         </p:txBody>
@@ -10628,60 +7447,50 @@
       <p:grpSpPr/>
       <p:sp>
         <p:nvSpPr>
-          <p:cNvPr id="2" name="Rectangle 1"/>
+          <p:cNvPr id="2" name="TextBox 1"/>
+          <p:cNvSpPr txBox="1"/>
+          <p:nvPr/>
+        </p:nvSpPr>
+        <p:spPr>
+          <a:xfrm>
+            <a:off x="640080" y="457200"/>
+            <a:ext cx="10881360" cy="960120"/>
+          </a:xfrm>
+          <a:prstGeom prst="rect">
+            <a:avLst/>
+          </a:prstGeom>
+          <a:noFill/>
+        </p:spPr>
+        <p:txBody>
+          <a:bodyPr wrap="square" anchor="t" lIns="0" rIns="0" tIns="0" bIns="0">
+            <a:spAutoFit/>
+          </a:bodyPr>
+          <a:lstStyle/>
+          <a:p>
+            <a:r>
+              <a:rPr sz="2800" b="1" i="0">
+                <a:solidFill>
+                  <a:srgbClr val="2A2929"/>
+                </a:solidFill>
+                <a:latin typeface="Roboto"/>
+              </a:rPr>
+              <a:t>Set an alarm to the design spec</a:t>
+            </a:r>
+          </a:p>
+        </p:txBody>
+      </p:sp>
+      <p:sp>
+        <p:nvSpPr>
+          <p:cNvPr id="3" name="Rectangle 2"/>
           <p:cNvSpPr/>
           <p:nvPr/>
         </p:nvSpPr>
         <p:spPr>
           <a:xfrm>
-            <a:off x="0" y="0"/>
-            <a:ext cx="12191695" cy="1234440"/>
-          </a:xfrm>
-          <a:prstGeom prst="rect">
-            <a:avLst/>
-          </a:prstGeom>
-          <a:solidFill>
-            <a:srgbClr val="2A2929"/>
-          </a:solidFill>
-          <a:ln>
-            <a:noFill/>
-          </a:ln>
-          <a:effectLst/>
-        </p:spPr>
-        <p:style>
-          <a:lnRef idx="1">
-            <a:schemeClr val="accent1"/>
-          </a:lnRef>
-          <a:fillRef idx="3">
-            <a:schemeClr val="accent1"/>
-          </a:fillRef>
-          <a:effectRef idx="2">
-            <a:schemeClr val="accent1"/>
-          </a:effectRef>
-          <a:fontRef idx="minor">
-            <a:schemeClr val="lt1"/>
-          </a:fontRef>
-        </p:style>
-        <p:txBody>
-          <a:bodyPr rtlCol="0" anchor="ctr"/>
-          <a:lstStyle/>
-          <a:p>
-            <a:pPr algn="ctr"/>
-          </a:p>
-        </p:txBody>
-      </p:sp>
-      <p:sp>
-        <p:nvSpPr>
-          <p:cNvPr id="3" name="Rounded Rectangle 2"/>
-          <p:cNvSpPr/>
-          <p:nvPr/>
-        </p:nvSpPr>
-        <p:spPr>
-          <a:xfrm>
-            <a:off x="640080" y="384048"/>
-            <a:ext cx="2331720" cy="457200"/>
-          </a:xfrm>
-          <a:prstGeom prst="roundRect">
+            <a:off x="658368" y="1371600"/>
+            <a:ext cx="1463040" cy="50800"/>
+          </a:xfrm>
+          <a:prstGeom prst="rect">
             <a:avLst/>
           </a:prstGeom>
           <a:solidFill>
@@ -10711,15 +7520,6 @@
           <a:lstStyle/>
           <a:p>
             <a:pPr algn="ctr"/>
-            <a:r>
-              <a:rPr sz="1300" b="1" i="0">
-                <a:solidFill>
-                  <a:srgbClr val="2A2929"/>
-                </a:solidFill>
-                <a:latin typeface="Roboto"/>
-              </a:rPr>
-              <a:t>RECORDED DEMO</a:t>
-            </a:r>
           </a:p>
         </p:txBody>
       </p:sp>
@@ -10731,8 +7531,8 @@
         </p:nvSpPr>
         <p:spPr>
           <a:xfrm>
-            <a:off x="3200400" y="310896"/>
-            <a:ext cx="8321040" cy="685800"/>
+            <a:off x="658368" y="1691640"/>
+            <a:ext cx="10881360" cy="4480560"/>
           </a:xfrm>
           <a:prstGeom prst="rect">
             <a:avLst/>
@@ -10741,40 +7541,6 @@
         </p:spPr>
         <p:txBody>
           <a:bodyPr wrap="square" anchor="ctr" lIns="0" rIns="0" tIns="0" bIns="0">
-            <a:spAutoFit/>
-          </a:bodyPr>
-          <a:lstStyle/>
-          <a:p>
-            <a:r>
-              <a:rPr sz="2500" b="1" i="0">
-                <a:solidFill>
-                  <a:srgbClr val="FFFFFF"/>
-                </a:solidFill>
-                <a:latin typeface="Roboto"/>
-              </a:rPr>
-              <a:t>Deploy the microservice</a:t>
-            </a:r>
-          </a:p>
-        </p:txBody>
-      </p:sp>
-      <p:sp>
-        <p:nvSpPr>
-          <p:cNvPr id="5" name="TextBox 4"/>
-          <p:cNvSpPr txBox="1"/>
-          <p:nvPr/>
-        </p:nvSpPr>
-        <p:spPr>
-          <a:xfrm>
-            <a:off x="658368" y="1554480"/>
-            <a:ext cx="10881360" cy="4297680"/>
-          </a:xfrm>
-          <a:prstGeom prst="rect">
-            <a:avLst/>
-          </a:prstGeom>
-          <a:noFill/>
-        </p:spPr>
-        <p:txBody>
-          <a:bodyPr wrap="square" anchor="t" lIns="0" rIns="0" tIns="0" bIns="0">
             <a:spAutoFit/>
           </a:bodyPr>
           <a:lstStyle/>
@@ -10791,7 +7557,7 @@
               </a:spcAft>
             </a:pPr>
             <a:r>
-              <a:rPr sz="1700" b="1" i="0">
+              <a:rPr sz="2400" b="1" i="0">
                 <a:solidFill>
                   <a:srgbClr val="EDAB0C"/>
                 </a:solidFill>
@@ -10800,13 +7566,13 @@
               <a:t>■  </a:t>
             </a:r>
             <a:r>
-              <a:rPr sz="1700" b="0" i="0">
+              <a:rPr sz="2400" b="0" i="0">
                 <a:solidFill>
                   <a:srgbClr val="2A2929"/>
                 </a:solidFill>
                 <a:latin typeface="Roboto"/>
               </a:rPr>
-              <a:t>Deploy the API/queue/function from the supplied code in the lab (us-east-1), wired to the provided store.</a:t>
+              <a:t>A scaling-relevant alarm: a threshold on a meaningful metric, with a notification attached.</a:t>
             </a:r>
           </a:p>
           <a:p>
@@ -10822,7 +7588,7 @@
               </a:spcAft>
             </a:pPr>
             <a:r>
-              <a:rPr sz="1700" b="1" i="0">
+              <a:rPr sz="2400" b="1" i="0">
                 <a:solidFill>
                   <a:srgbClr val="EDAB0C"/>
                 </a:solidFill>
@@ -10831,100 +7597,51 @@
               <a:t>■  </a:t>
             </a:r>
             <a:r>
-              <a:rPr sz="1700" b="0" i="0">
+              <a:rPr sz="2400" b="0" i="0">
                 <a:solidFill>
                   <a:srgbClr val="2A2929"/>
                 </a:solidFill>
                 <a:latin typeface="Roboto"/>
               </a:rPr>
-              <a:t>Confirm each resource and the event-source mapping.</a:t>
-            </a:r>
-          </a:p>
-        </p:txBody>
-      </p:sp>
-      <p:sp>
-        <p:nvSpPr>
-          <p:cNvPr id="6" name="Rounded Rectangle 5"/>
-          <p:cNvSpPr/>
-          <p:nvPr/>
-        </p:nvSpPr>
-        <p:spPr>
-          <a:xfrm>
-            <a:off x="640080" y="5897880"/>
-            <a:ext cx="7863840" cy="457200"/>
-          </a:xfrm>
-          <a:prstGeom prst="roundRect">
-            <a:avLst/>
-          </a:prstGeom>
-          <a:solidFill>
-            <a:srgbClr val="F9F9F9"/>
-          </a:solidFill>
-          <a:ln w="12700">
-            <a:solidFill>
-              <a:srgbClr val="CCCCCC"/>
-            </a:solidFill>
-          </a:ln>
-          <a:effectLst/>
-        </p:spPr>
-        <p:style>
-          <a:lnRef idx="1">
-            <a:schemeClr val="accent1"/>
-          </a:lnRef>
-          <a:fillRef idx="3">
-            <a:schemeClr val="accent1"/>
-          </a:fillRef>
-          <a:effectRef idx="2">
-            <a:schemeClr val="accent1"/>
-          </a:effectRef>
-          <a:fontRef idx="minor">
-            <a:schemeClr val="lt1"/>
-          </a:fontRef>
-        </p:style>
-        <p:txBody>
-          <a:bodyPr rtlCol="0" anchor="ctr"/>
-          <a:lstStyle/>
-          <a:p>
-            <a:pPr algn="ctr"/>
-          </a:p>
-        </p:txBody>
-      </p:sp>
-      <p:sp>
-        <p:nvSpPr>
-          <p:cNvPr id="7" name="TextBox 6"/>
-          <p:cNvSpPr txBox="1"/>
-          <p:nvPr/>
-        </p:nvSpPr>
-        <p:spPr>
-          <a:xfrm>
-            <a:off x="822960" y="5943600"/>
-            <a:ext cx="7498080" cy="365760"/>
-          </a:xfrm>
-          <a:prstGeom prst="rect">
-            <a:avLst/>
-          </a:prstGeom>
-          <a:noFill/>
-        </p:spPr>
-        <p:txBody>
-          <a:bodyPr wrap="square" anchor="ctr" lIns="0" rIns="0" tIns="0" bIns="0">
-            <a:spAutoFit/>
-          </a:bodyPr>
-          <a:lstStyle/>
-          <a:p>
-            <a:r>
-              <a:rPr sz="1400" b="1" i="0">
+              <a:t>The threshold traces to a design target — "why that number?" has an answer from the spec, not a shrug.</a:t>
+            </a:r>
+          </a:p>
+          <a:p>
+            <a:pPr marL="0" indent="0">
+              <a:lnSpc>
+                <a:spcPct val="105000"/>
+              </a:lnSpc>
+              <a:spcBef>
+                <a:spcPts val="0"/>
+              </a:spcBef>
+              <a:spcAft>
+                <a:spcPts val="1000"/>
+              </a:spcAft>
+            </a:pPr>
+            <a:r>
+              <a:rPr sz="2400" b="1" i="0">
+                <a:solidFill>
+                  <a:srgbClr val="EDAB0C"/>
+                </a:solidFill>
+                <a:latin typeface="Roboto"/>
+              </a:rPr>
+              <a:t>■  </a:t>
+            </a:r>
+            <a:r>
+              <a:rPr sz="2400" b="0" i="0">
                 <a:solidFill>
                   <a:srgbClr val="2A2929"/>
                 </a:solidFill>
                 <a:latin typeface="Roboto"/>
               </a:rPr>
-              <a:t>▶  Play the AWS recorded demo (recorded/live demo) — you do this next</a:t>
-            </a:r>
-          </a:p>
-        </p:txBody>
-      </p:sp>
-      <p:sp>
-        <p:nvSpPr>
-          <p:cNvPr id="8" name="Rectangle 7"/>
+              <a:t>An alarm nobody is told about is a light in an empty room; the notification is half the point.</a:t>
+            </a:r>
+          </a:p>
+        </p:txBody>
+      </p:sp>
+      <p:sp>
+        <p:nvSpPr>
+          <p:cNvPr id="5" name="Rectangle 4"/>
           <p:cNvSpPr/>
           <p:nvPr/>
         </p:nvSpPr>
@@ -10968,7 +7685,7 @@
       </p:sp>
       <p:sp>
         <p:nvSpPr>
-          <p:cNvPr id="9" name="TextBox 8"/>
+          <p:cNvPr id="6" name="TextBox 5"/>
           <p:cNvSpPr txBox="1"/>
           <p:nvPr/>
         </p:nvSpPr>
@@ -11011,7 +7728,7 @@
       </p:sp>
       <p:sp>
         <p:nvSpPr>
-          <p:cNvPr id="10" name="TextBox 9"/>
+          <p:cNvPr id="7" name="TextBox 6"/>
           <p:cNvSpPr txBox="1"/>
           <p:nvPr/>
         </p:nvSpPr>
@@ -11085,6 +7802,50 @@
             <a:avLst/>
           </a:prstGeom>
           <a:solidFill>
+            <a:srgbClr val="2A2929"/>
+          </a:solidFill>
+          <a:ln>
+            <a:noFill/>
+          </a:ln>
+          <a:effectLst/>
+        </p:spPr>
+        <p:style>
+          <a:lnRef idx="1">
+            <a:schemeClr val="accent1"/>
+          </a:lnRef>
+          <a:fillRef idx="3">
+            <a:schemeClr val="accent1"/>
+          </a:fillRef>
+          <a:effectRef idx="2">
+            <a:schemeClr val="accent1"/>
+          </a:effectRef>
+          <a:fontRef idx="minor">
+            <a:schemeClr val="lt1"/>
+          </a:fontRef>
+        </p:style>
+        <p:txBody>
+          <a:bodyPr rtlCol="0" anchor="ctr"/>
+          <a:lstStyle/>
+          <a:p>
+            <a:pPr algn="ctr"/>
+          </a:p>
+        </p:txBody>
+      </p:sp>
+      <p:sp>
+        <p:nvSpPr>
+          <p:cNvPr id="3" name="Rounded Rectangle 2"/>
+          <p:cNvSpPr/>
+          <p:nvPr/>
+        </p:nvSpPr>
+        <p:spPr>
+          <a:xfrm>
+            <a:off x="640080" y="384048"/>
+            <a:ext cx="2331720" cy="457200"/>
+          </a:xfrm>
+          <a:prstGeom prst="roundRect">
+            <a:avLst/>
+          </a:prstGeom>
+          <a:solidFill>
             <a:srgbClr val="27B5CE"/>
           </a:solidFill>
           <a:ln>
@@ -11111,58 +7872,14 @@
           <a:lstStyle/>
           <a:p>
             <a:pPr algn="ctr"/>
-          </a:p>
-        </p:txBody>
-      </p:sp>
-      <p:sp>
-        <p:nvSpPr>
-          <p:cNvPr id="3" name="Rounded Rectangle 2"/>
-          <p:cNvSpPr/>
-          <p:nvPr/>
-        </p:nvSpPr>
-        <p:spPr>
-          <a:xfrm>
-            <a:off x="640080" y="384048"/>
-            <a:ext cx="1691640" cy="457200"/>
-          </a:xfrm>
-          <a:prstGeom prst="roundRect">
-            <a:avLst/>
-          </a:prstGeom>
-          <a:solidFill>
-            <a:srgbClr val="2A2929"/>
-          </a:solidFill>
-          <a:ln>
-            <a:noFill/>
-          </a:ln>
-          <a:effectLst/>
-        </p:spPr>
-        <p:style>
-          <a:lnRef idx="1">
-            <a:schemeClr val="accent1"/>
-          </a:lnRef>
-          <a:fillRef idx="3">
-            <a:schemeClr val="accent1"/>
-          </a:fillRef>
-          <a:effectRef idx="2">
-            <a:schemeClr val="accent1"/>
-          </a:effectRef>
-          <a:fontRef idx="minor">
-            <a:schemeClr val="lt1"/>
-          </a:fontRef>
-        </p:style>
-        <p:txBody>
-          <a:bodyPr rtlCol="0" anchor="ctr"/>
-          <a:lstStyle/>
-          <a:p>
-            <a:pPr algn="ctr"/>
-            <a:r>
-              <a:rPr sz="1400" b="1" i="0">
-                <a:solidFill>
-                  <a:srgbClr val="FBB900"/>
-                </a:solidFill>
-                <a:latin typeface="Roboto"/>
-              </a:rPr>
-              <a:t>ACTIVITY</a:t>
+            <a:r>
+              <a:rPr sz="1300" b="1" i="0">
+                <a:solidFill>
+                  <a:srgbClr val="2A2929"/>
+                </a:solidFill>
+                <a:latin typeface="Roboto"/>
+              </a:rPr>
+              <a:t>RECORDED DEMO</a:t>
             </a:r>
           </a:p>
         </p:txBody>
@@ -11175,8 +7892,8 @@
         </p:nvSpPr>
         <p:spPr>
           <a:xfrm>
-            <a:off x="2560320" y="310896"/>
-            <a:ext cx="8961120" cy="685800"/>
+            <a:off x="3200400" y="310896"/>
+            <a:ext cx="8321040" cy="685800"/>
           </a:xfrm>
           <a:prstGeom prst="rect">
             <a:avLst/>
@@ -11190,13 +7907,13 @@
           <a:lstStyle/>
           <a:p>
             <a:r>
-              <a:rPr sz="2600" b="1" i="0">
+              <a:rPr sz="2500" b="1" i="0">
                 <a:solidFill>
                   <a:srgbClr val="FFFFFF"/>
                 </a:solidFill>
                 <a:latin typeface="Roboto"/>
               </a:rPr>
-              <a:t>Deploy &amp; configure</a:t>
+              <a:t>Configure and fire an alarm</a:t>
             </a:r>
           </a:p>
         </p:txBody>
@@ -11250,7 +7967,7 @@
                 </a:solidFill>
                 <a:latin typeface="Roboto"/>
               </a:rPr>
-              <a:t>On the practice scenario, deploy the practice microservice from the supplied code and wire it to the practice store.</a:t>
+              <a:t>Configure a queue-depth alarm with a notification, then drive the metric past the threshold.</a:t>
             </a:r>
           </a:p>
           <a:p>
@@ -11281,7 +7998,7 @@
                 </a:solidFill>
                 <a:latin typeface="Roboto"/>
               </a:rPr>
-              <a:t>Deploy to us-east-1; confirm the pipeline stands up.</a:t>
+              <a:t>Watch it go to alarm, see the notification arrive, and watch it recover.</a:t>
             </a:r>
           </a:p>
         </p:txBody>
@@ -11295,7 +8012,7 @@
         <p:spPr>
           <a:xfrm>
             <a:off x="640080" y="5897880"/>
-            <a:ext cx="4023360" cy="457200"/>
+            <a:ext cx="7863840" cy="457200"/>
           </a:xfrm>
           <a:prstGeom prst="roundRect">
             <a:avLst/>
@@ -11341,7 +8058,7 @@
         <p:spPr>
           <a:xfrm>
             <a:off x="822960" y="5943600"/>
-            <a:ext cx="3657600" cy="365760"/>
+            <a:ext cx="7498080" cy="365760"/>
           </a:xfrm>
           <a:prstGeom prst="rect">
             <a:avLst/>
@@ -11355,13 +8072,13 @@
           <a:lstStyle/>
           <a:p>
             <a:r>
-              <a:rPr sz="1500" b="1" i="0">
+              <a:rPr sz="1400" b="1" i="0">
                 <a:solidFill>
                   <a:srgbClr val="2A2929"/>
                 </a:solidFill>
                 <a:latin typeface="Roboto"/>
               </a:rPr>
-              <a:t>⏱  ~30 min</a:t>
+              <a:t>▶  Play the AWS recorded demo (recorded/live demo) — you do this next</a:t>
             </a:r>
           </a:p>
         </p:txBody>
